--- a/第3章-条件与循环/第3章-条件与循环.pptx
+++ b/第3章-条件与循环/第3章-条件与循环.pptx
@@ -15,7 +15,7 @@
     <p:sldId id="2708" r:id="rId3"/>
     <p:sldId id="2387" r:id="rId4"/>
     <p:sldId id="2709" r:id="rId5"/>
-    <p:sldId id="2761" r:id="rId6"/>
+    <p:sldId id="2772" r:id="rId6"/>
     <p:sldId id="2727" r:id="rId7"/>
     <p:sldId id="2763" r:id="rId8"/>
     <p:sldId id="2764" r:id="rId9"/>
@@ -445,3182 +445,37 @@
 </p:cmAuthorLst>
 </file>
 
-<file path=ppt/revisionInfo.xml><?xml version="1.0" encoding="utf-8"?>
-<p1510:revInfo xmlns:a="http://schemas.openxmlformats.org/drawingml/2006/main" xmlns:r="http://schemas.openxmlformats.org/officeDocument/2006/relationships" xmlns:p1510="http://schemas.microsoft.com/office/powerpoint/2015/10/main">
-  <p1510:revLst>
-    <p1510:client id="{F5C2D48E-4392-624B-B7FE-4C89A1D87AB0}" v="53" dt="2025-05-25T09:34:25.807"/>
-  </p1510:revLst>
-</p1510:revInfo>
-</file>
-
 <file path=ppt/changesInfos/changesInfo1.xml><?xml version="1.0" encoding="utf-8"?>
 <pc:chgInfo xmlns:a="http://schemas.openxmlformats.org/drawingml/2006/main" xmlns:r="http://schemas.openxmlformats.org/officeDocument/2006/relationships" xmlns:ac="http://schemas.microsoft.com/office/drawing/2013/main/command" xmlns:pc="http://schemas.microsoft.com/office/powerpoint/2013/main/command">
   <pc:docChgLst>
-    <pc:chgData name="Xin Luo" userId="82312ee5779919a4" providerId="LiveId" clId="{9073B790-108B-9A41-B544-91FBC3D671E5}"/>
-    <pc:docChg chg="custSel delSld modSld sldOrd">
-      <pc:chgData name="Xin Luo" userId="82312ee5779919a4" providerId="LiveId" clId="{9073B790-108B-9A41-B544-91FBC3D671E5}" dt="2025-05-08T15:08:38.626" v="318" actId="20578"/>
+    <pc:chgData name="Xin Luo" userId="82312ee5779919a4" providerId="LiveId" clId="{4B16E866-FFF1-585A-8670-68209B92BFC1}"/>
+    <pc:docChg chg="modSld">
+      <pc:chgData name="Xin Luo" userId="82312ee5779919a4" providerId="LiveId" clId="{4B16E866-FFF1-585A-8670-68209B92BFC1}" dt="2026-08-27T06:03:12.266" v="12" actId="108"/>
       <pc:docMkLst>
         <pc:docMk/>
       </pc:docMkLst>
       <pc:sldChg chg="modSp mod">
-        <pc:chgData name="Xin Luo" userId="82312ee5779919a4" providerId="LiveId" clId="{9073B790-108B-9A41-B544-91FBC3D671E5}" dt="2025-05-08T15:07:42.200" v="225" actId="1076"/>
+        <pc:chgData name="Xin Luo" userId="82312ee5779919a4" providerId="LiveId" clId="{4B16E866-FFF1-585A-8670-68209B92BFC1}" dt="2026-08-27T06:03:12.266" v="12" actId="108"/>
         <pc:sldMkLst>
           <pc:docMk/>
-          <pc:sldMk cId="1576120367" sldId="2387"/>
+          <pc:sldMk cId="4207004688" sldId="2741"/>
         </pc:sldMkLst>
         <pc:spChg chg="mod">
-          <ac:chgData name="Xin Luo" userId="82312ee5779919a4" providerId="LiveId" clId="{9073B790-108B-9A41-B544-91FBC3D671E5}" dt="2025-05-08T15:07:42.200" v="225" actId="1076"/>
+          <ac:chgData name="Xin Luo" userId="82312ee5779919a4" providerId="LiveId" clId="{4B16E866-FFF1-585A-8670-68209B92BFC1}" dt="2026-08-27T06:03:12.266" v="12" actId="108"/>
           <ac:spMkLst>
             <pc:docMk/>
-            <pc:sldMk cId="1576120367" sldId="2387"/>
-            <ac:spMk id="6" creationId="{00000000-0000-0000-0000-000000000000}"/>
+            <pc:sldMk cId="4207004688" sldId="2741"/>
+            <ac:spMk id="4" creationId="{DBE2EB52-1153-547D-4DDB-F105FCA1059C}"/>
           </ac:spMkLst>
         </pc:spChg>
         <pc:spChg chg="mod">
-          <ac:chgData name="Xin Luo" userId="82312ee5779919a4" providerId="LiveId" clId="{9073B790-108B-9A41-B544-91FBC3D671E5}" dt="2025-05-08T15:07:39.103" v="224" actId="20577"/>
+          <ac:chgData name="Xin Luo" userId="82312ee5779919a4" providerId="LiveId" clId="{4B16E866-FFF1-585A-8670-68209B92BFC1}" dt="2026-08-27T06:02:50.369" v="9" actId="20577"/>
           <ac:spMkLst>
             <pc:docMk/>
-            <pc:sldMk cId="1576120367" sldId="2387"/>
-            <ac:spMk id="12" creationId="{00000000-0000-0000-0000-000000000000}"/>
+            <pc:sldMk cId="4207004688" sldId="2741"/>
+            <ac:spMk id="6" creationId="{68615743-0F76-1E7B-8513-381292D6BC62}"/>
           </ac:spMkLst>
         </pc:spChg>
-        <pc:spChg chg="mod">
-          <ac:chgData name="Xin Luo" userId="82312ee5779919a4" providerId="LiveId" clId="{9073B790-108B-9A41-B544-91FBC3D671E5}" dt="2025-05-08T15:07:25.228" v="194" actId="20577"/>
-          <ac:spMkLst>
-            <pc:docMk/>
-            <pc:sldMk cId="1576120367" sldId="2387"/>
-            <ac:spMk id="14" creationId="{00000000-0000-0000-0000-000000000000}"/>
-          </ac:spMkLst>
-        </pc:spChg>
-      </pc:sldChg>
-      <pc:sldChg chg="modSp mod">
-        <pc:chgData name="Xin Luo" userId="82312ee5779919a4" providerId="LiveId" clId="{9073B790-108B-9A41-B544-91FBC3D671E5}" dt="2025-05-08T15:07:54.688" v="256" actId="20577"/>
-        <pc:sldMkLst>
-          <pc:docMk/>
-          <pc:sldMk cId="2415901206" sldId="2447"/>
-        </pc:sldMkLst>
-      </pc:sldChg>
-      <pc:sldChg chg="modSp mod">
-        <pc:chgData name="Xin Luo" userId="82312ee5779919a4" providerId="LiveId" clId="{9073B790-108B-9A41-B544-91FBC3D671E5}" dt="2025-05-08T15:06:05.338" v="98" actId="20577"/>
-        <pc:sldMkLst>
-          <pc:docMk/>
-          <pc:sldMk cId="1658607177" sldId="2708"/>
-        </pc:sldMkLst>
-        <pc:spChg chg="mod">
-          <ac:chgData name="Xin Luo" userId="82312ee5779919a4" providerId="LiveId" clId="{9073B790-108B-9A41-B544-91FBC3D671E5}" dt="2025-05-08T15:06:05.338" v="98" actId="20577"/>
-          <ac:spMkLst>
-            <pc:docMk/>
-            <pc:sldMk cId="1658607177" sldId="2708"/>
-            <ac:spMk id="3" creationId="{E375549C-74EF-2C8F-6432-2C52B803FB1B}"/>
-          </ac:spMkLst>
-        </pc:spChg>
-        <pc:spChg chg="mod">
-          <ac:chgData name="Xin Luo" userId="82312ee5779919a4" providerId="LiveId" clId="{9073B790-108B-9A41-B544-91FBC3D671E5}" dt="2025-05-08T15:05:53.449" v="82" actId="20577"/>
-          <ac:spMkLst>
-            <pc:docMk/>
-            <pc:sldMk cId="1658607177" sldId="2708"/>
-            <ac:spMk id="24" creationId="{00000000-0000-0000-0000-000000000000}"/>
-          </ac:spMkLst>
-        </pc:spChg>
-      </pc:sldChg>
-      <pc:sldChg chg="modSp mod">
-        <pc:chgData name="Xin Luo" userId="82312ee5779919a4" providerId="LiveId" clId="{9073B790-108B-9A41-B544-91FBC3D671E5}" dt="2025-05-08T15:08:09.867" v="289" actId="20577"/>
-        <pc:sldMkLst>
-          <pc:docMk/>
-          <pc:sldMk cId="481122590" sldId="2709"/>
-        </pc:sldMkLst>
-        <pc:spChg chg="mod">
-          <ac:chgData name="Xin Luo" userId="82312ee5779919a4" providerId="LiveId" clId="{9073B790-108B-9A41-B544-91FBC3D671E5}" dt="2025-05-08T15:08:09.867" v="289" actId="20577"/>
-          <ac:spMkLst>
-            <pc:docMk/>
-            <pc:sldMk cId="481122590" sldId="2709"/>
-            <ac:spMk id="7" creationId="{00000000-0000-0000-0000-000000000000}"/>
-          </ac:spMkLst>
-        </pc:spChg>
-      </pc:sldChg>
-      <pc:sldChg chg="ord">
-        <pc:chgData name="Xin Luo" userId="82312ee5779919a4" providerId="LiveId" clId="{9073B790-108B-9A41-B544-91FBC3D671E5}" dt="2025-05-08T15:08:38.626" v="318" actId="20578"/>
-        <pc:sldMkLst>
-          <pc:docMk/>
-          <pc:sldMk cId="3833073590" sldId="2716"/>
-        </pc:sldMkLst>
-      </pc:sldChg>
-      <pc:sldChg chg="modSp mod">
-        <pc:chgData name="Xin Luo" userId="82312ee5779919a4" providerId="LiveId" clId="{9073B790-108B-9A41-B544-91FBC3D671E5}" dt="2025-05-08T15:08:23.041" v="317" actId="20577"/>
-        <pc:sldMkLst>
-          <pc:docMk/>
-          <pc:sldMk cId="972163772" sldId="2720"/>
-        </pc:sldMkLst>
-        <pc:spChg chg="mod">
-          <ac:chgData name="Xin Luo" userId="82312ee5779919a4" providerId="LiveId" clId="{9073B790-108B-9A41-B544-91FBC3D671E5}" dt="2025-05-08T15:08:23.041" v="317" actId="20577"/>
-          <ac:spMkLst>
-            <pc:docMk/>
-            <pc:sldMk cId="972163772" sldId="2720"/>
-            <ac:spMk id="7" creationId="{00000000-0000-0000-0000-000000000000}"/>
-          </ac:spMkLst>
-        </pc:spChg>
-      </pc:sldChg>
-      <pc:sldChg chg="del">
-        <pc:chgData name="Xin Luo" userId="82312ee5779919a4" providerId="LiveId" clId="{9073B790-108B-9A41-B544-91FBC3D671E5}" dt="2025-05-08T15:05:09.672" v="25" actId="2696"/>
-        <pc:sldMkLst>
-          <pc:docMk/>
-          <pc:sldMk cId="1209572041" sldId="2722"/>
-        </pc:sldMkLst>
-      </pc:sldChg>
-      <pc:sldChg chg="ord">
-        <pc:chgData name="Xin Luo" userId="82312ee5779919a4" providerId="LiveId" clId="{9073B790-108B-9A41-B544-91FBC3D671E5}" dt="2025-05-08T15:08:38.626" v="318" actId="20578"/>
-        <pc:sldMkLst>
-          <pc:docMk/>
-          <pc:sldMk cId="2371836296" sldId="2756"/>
-        </pc:sldMkLst>
-      </pc:sldChg>
-      <pc:sldChg chg="ord">
-        <pc:chgData name="Xin Luo" userId="82312ee5779919a4" providerId="LiveId" clId="{9073B790-108B-9A41-B544-91FBC3D671E5}" dt="2025-05-08T15:08:38.626" v="318" actId="20578"/>
-        <pc:sldMkLst>
-          <pc:docMk/>
-          <pc:sldMk cId="397779649" sldId="2757"/>
-        </pc:sldMkLst>
-      </pc:sldChg>
-      <pc:sldChg chg="del">
-        <pc:chgData name="Xin Luo" userId="82312ee5779919a4" providerId="LiveId" clId="{9073B790-108B-9A41-B544-91FBC3D671E5}" dt="2025-05-08T15:04:45.007" v="0" actId="2696"/>
-        <pc:sldMkLst>
-          <pc:docMk/>
-          <pc:sldMk cId="472418319" sldId="2759"/>
-        </pc:sldMkLst>
-      </pc:sldChg>
-      <pc:sldChg chg="modSp mod">
-        <pc:chgData name="Xin Luo" userId="82312ee5779919a4" providerId="LiveId" clId="{9073B790-108B-9A41-B544-91FBC3D671E5}" dt="2025-05-08T15:05:06.820" v="23" actId="14100"/>
-        <pc:sldMkLst>
-          <pc:docMk/>
-          <pc:sldMk cId="1125183986" sldId="2760"/>
-        </pc:sldMkLst>
-        <pc:spChg chg="mod">
-          <ac:chgData name="Xin Luo" userId="82312ee5779919a4" providerId="LiveId" clId="{9073B790-108B-9A41-B544-91FBC3D671E5}" dt="2025-05-08T15:05:06.820" v="23" actId="14100"/>
-          <ac:spMkLst>
-            <pc:docMk/>
-            <pc:sldMk cId="1125183986" sldId="2760"/>
-            <ac:spMk id="13" creationId="{303BC878-BC57-D350-27A3-F03AE48213AC}"/>
-          </ac:spMkLst>
-        </pc:spChg>
-      </pc:sldChg>
-      <pc:sldChg chg="del">
-        <pc:chgData name="Xin Luo" userId="82312ee5779919a4" providerId="LiveId" clId="{9073B790-108B-9A41-B544-91FBC3D671E5}" dt="2025-05-08T15:05:09.671" v="24" actId="2696"/>
-        <pc:sldMkLst>
-          <pc:docMk/>
-          <pc:sldMk cId="1417780723" sldId="2761"/>
-        </pc:sldMkLst>
-      </pc:sldChg>
-    </pc:docChg>
-  </pc:docChgLst>
-  <pc:docChgLst>
-    <pc:chgData name="Xin Luo" userId="82312ee5779919a4" providerId="LiveId" clId="{98EC8ECB-A80D-1449-ACFE-0D931F29C13A}"/>
-    <pc:docChg chg="undo custSel addSld delSld modSld">
-      <pc:chgData name="Xin Luo" userId="82312ee5779919a4" providerId="LiveId" clId="{98EC8ECB-A80D-1449-ACFE-0D931F29C13A}" dt="2023-02-23T15:47:30.471" v="734" actId="478"/>
-      <pc:docMkLst>
-        <pc:docMk/>
-      </pc:docMkLst>
-      <pc:sldChg chg="modSp mod">
-        <pc:chgData name="Xin Luo" userId="82312ee5779919a4" providerId="LiveId" clId="{98EC8ECB-A80D-1449-ACFE-0D931F29C13A}" dt="2023-02-23T15:07:38.481" v="282" actId="20577"/>
-        <pc:sldMkLst>
-          <pc:docMk/>
-          <pc:sldMk cId="1576120367" sldId="2387"/>
-        </pc:sldMkLst>
-      </pc:sldChg>
-      <pc:sldChg chg="modSp mod">
-        <pc:chgData name="Xin Luo" userId="82312ee5779919a4" providerId="LiveId" clId="{98EC8ECB-A80D-1449-ACFE-0D931F29C13A}" dt="2023-02-23T15:23:38.561" v="288" actId="20577"/>
-        <pc:sldMkLst>
-          <pc:docMk/>
-          <pc:sldMk cId="2415901206" sldId="2447"/>
-        </pc:sldMkLst>
-      </pc:sldChg>
-      <pc:sldChg chg="addSp delSp modSp mod">
-        <pc:chgData name="Xin Luo" userId="82312ee5779919a4" providerId="LiveId" clId="{98EC8ECB-A80D-1449-ACFE-0D931F29C13A}" dt="2023-02-23T15:32:00.813" v="490" actId="20577"/>
-        <pc:sldMkLst>
-          <pc:docMk/>
-          <pc:sldMk cId="4067577602" sldId="2605"/>
-        </pc:sldMkLst>
-      </pc:sldChg>
-      <pc:sldChg chg="modSp mod">
-        <pc:chgData name="Xin Luo" userId="82312ee5779919a4" providerId="LiveId" clId="{98EC8ECB-A80D-1449-ACFE-0D931F29C13A}" dt="2023-02-23T15:03:54.789" v="48" actId="20577"/>
-        <pc:sldMkLst>
-          <pc:docMk/>
-          <pc:sldMk cId="1658607177" sldId="2708"/>
-        </pc:sldMkLst>
-      </pc:sldChg>
-      <pc:sldChg chg="modSp mod">
-        <pc:chgData name="Xin Luo" userId="82312ee5779919a4" providerId="LiveId" clId="{98EC8ECB-A80D-1449-ACFE-0D931F29C13A}" dt="2023-02-23T15:46:16.929" v="710" actId="20577"/>
-        <pc:sldMkLst>
-          <pc:docMk/>
-          <pc:sldMk cId="481122590" sldId="2709"/>
-        </pc:sldMkLst>
-      </pc:sldChg>
-      <pc:sldChg chg="modSp mod">
-        <pc:chgData name="Xin Luo" userId="82312ee5779919a4" providerId="LiveId" clId="{98EC8ECB-A80D-1449-ACFE-0D931F29C13A}" dt="2023-02-23T15:46:36.362" v="717" actId="20577"/>
-        <pc:sldMkLst>
-          <pc:docMk/>
-          <pc:sldMk cId="3833073590" sldId="2716"/>
-        </pc:sldMkLst>
-      </pc:sldChg>
-      <pc:sldChg chg="modSp mod">
-        <pc:chgData name="Xin Luo" userId="82312ee5779919a4" providerId="LiveId" clId="{98EC8ECB-A80D-1449-ACFE-0D931F29C13A}" dt="2023-02-23T15:47:08.933" v="728" actId="20577"/>
-        <pc:sldMkLst>
-          <pc:docMk/>
-          <pc:sldMk cId="972163772" sldId="2720"/>
-        </pc:sldMkLst>
-      </pc:sldChg>
-      <pc:sldChg chg="modSp mod">
-        <pc:chgData name="Xin Luo" userId="82312ee5779919a4" providerId="LiveId" clId="{98EC8ECB-A80D-1449-ACFE-0D931F29C13A}" dt="2023-02-23T15:47:17.016" v="729"/>
-        <pc:sldMkLst>
-          <pc:docMk/>
-          <pc:sldMk cId="2689695864" sldId="2721"/>
-        </pc:sldMkLst>
-      </pc:sldChg>
-      <pc:sldChg chg="delSp modSp mod">
-        <pc:chgData name="Xin Luo" userId="82312ee5779919a4" providerId="LiveId" clId="{98EC8ECB-A80D-1449-ACFE-0D931F29C13A}" dt="2023-02-23T15:47:30.471" v="734" actId="478"/>
-        <pc:sldMkLst>
-          <pc:docMk/>
-          <pc:sldMk cId="1209572041" sldId="2722"/>
-        </pc:sldMkLst>
-      </pc:sldChg>
-      <pc:sldChg chg="del">
-        <pc:chgData name="Xin Luo" userId="82312ee5779919a4" providerId="LiveId" clId="{98EC8ECB-A80D-1449-ACFE-0D931F29C13A}" dt="2023-02-23T15:46:08.434" v="701" actId="2696"/>
-        <pc:sldMkLst>
-          <pc:docMk/>
-          <pc:sldMk cId="353940032" sldId="2725"/>
-        </pc:sldMkLst>
-      </pc:sldChg>
-      <pc:sldChg chg="del">
-        <pc:chgData name="Xin Luo" userId="82312ee5779919a4" providerId="LiveId" clId="{98EC8ECB-A80D-1449-ACFE-0D931F29C13A}" dt="2023-02-23T15:46:08.455" v="709" actId="2696"/>
-        <pc:sldMkLst>
-          <pc:docMk/>
-          <pc:sldMk cId="45083394" sldId="2726"/>
-        </pc:sldMkLst>
-      </pc:sldChg>
-      <pc:sldChg chg="del">
-        <pc:chgData name="Xin Luo" userId="82312ee5779919a4" providerId="LiveId" clId="{98EC8ECB-A80D-1449-ACFE-0D931F29C13A}" dt="2023-02-23T15:46:08.437" v="702" actId="2696"/>
-        <pc:sldMkLst>
-          <pc:docMk/>
-          <pc:sldMk cId="148985918" sldId="2727"/>
-        </pc:sldMkLst>
-      </pc:sldChg>
-      <pc:sldChg chg="del">
-        <pc:chgData name="Xin Luo" userId="82312ee5779919a4" providerId="LiveId" clId="{98EC8ECB-A80D-1449-ACFE-0D931F29C13A}" dt="2023-02-23T15:46:08.445" v="706" actId="2696"/>
-        <pc:sldMkLst>
-          <pc:docMk/>
-          <pc:sldMk cId="3544980656" sldId="2728"/>
-        </pc:sldMkLst>
-      </pc:sldChg>
-      <pc:sldChg chg="del">
-        <pc:chgData name="Xin Luo" userId="82312ee5779919a4" providerId="LiveId" clId="{98EC8ECB-A80D-1449-ACFE-0D931F29C13A}" dt="2023-02-23T15:46:08.448" v="708" actId="2696"/>
-        <pc:sldMkLst>
-          <pc:docMk/>
-          <pc:sldMk cId="1664139585" sldId="2729"/>
-        </pc:sldMkLst>
-      </pc:sldChg>
-      <pc:sldChg chg="del">
-        <pc:chgData name="Xin Luo" userId="82312ee5779919a4" providerId="LiveId" clId="{98EC8ECB-A80D-1449-ACFE-0D931F29C13A}" dt="2023-02-23T15:46:08.446" v="707" actId="2696"/>
-        <pc:sldMkLst>
-          <pc:docMk/>
-          <pc:sldMk cId="3561803108" sldId="2730"/>
-        </pc:sldMkLst>
-      </pc:sldChg>
-      <pc:sldChg chg="del">
-        <pc:chgData name="Xin Luo" userId="82312ee5779919a4" providerId="LiveId" clId="{98EC8ECB-A80D-1449-ACFE-0D931F29C13A}" dt="2023-02-23T15:46:08.439" v="703" actId="2696"/>
-        <pc:sldMkLst>
-          <pc:docMk/>
-          <pc:sldMk cId="236610701" sldId="2731"/>
-        </pc:sldMkLst>
-      </pc:sldChg>
-      <pc:sldChg chg="del">
-        <pc:chgData name="Xin Luo" userId="82312ee5779919a4" providerId="LiveId" clId="{98EC8ECB-A80D-1449-ACFE-0D931F29C13A}" dt="2023-02-23T15:46:08.441" v="704" actId="2696"/>
-        <pc:sldMkLst>
-          <pc:docMk/>
-          <pc:sldMk cId="1986913413" sldId="2732"/>
-        </pc:sldMkLst>
-      </pc:sldChg>
-      <pc:sldChg chg="del">
-        <pc:chgData name="Xin Luo" userId="82312ee5779919a4" providerId="LiveId" clId="{98EC8ECB-A80D-1449-ACFE-0D931F29C13A}" dt="2023-02-23T15:46:08.443" v="705" actId="2696"/>
-        <pc:sldMkLst>
-          <pc:docMk/>
-          <pc:sldMk cId="270311508" sldId="2733"/>
-        </pc:sldMkLst>
-      </pc:sldChg>
-      <pc:sldChg chg="del">
-        <pc:chgData name="Xin Luo" userId="82312ee5779919a4" providerId="LiveId" clId="{98EC8ECB-A80D-1449-ACFE-0D931F29C13A}" dt="2023-02-23T15:47:22.827" v="730" actId="2696"/>
-        <pc:sldMkLst>
-          <pc:docMk/>
-          <pc:sldMk cId="3138813826" sldId="2734"/>
-        </pc:sldMkLst>
-      </pc:sldChg>
-      <pc:sldChg chg="del">
-        <pc:chgData name="Xin Luo" userId="82312ee5779919a4" providerId="LiveId" clId="{98EC8ECB-A80D-1449-ACFE-0D931F29C13A}" dt="2023-02-23T15:47:22.864" v="732" actId="2696"/>
-        <pc:sldMkLst>
-          <pc:docMk/>
-          <pc:sldMk cId="128317883" sldId="2735"/>
-        </pc:sldMkLst>
-      </pc:sldChg>
-      <pc:sldChg chg="del">
-        <pc:chgData name="Xin Luo" userId="82312ee5779919a4" providerId="LiveId" clId="{98EC8ECB-A80D-1449-ACFE-0D931F29C13A}" dt="2023-02-23T15:47:22.829" v="731" actId="2696"/>
-        <pc:sldMkLst>
-          <pc:docMk/>
-          <pc:sldMk cId="383906436" sldId="2736"/>
-        </pc:sldMkLst>
-      </pc:sldChg>
-      <pc:sldChg chg="addSp delSp modSp add mod">
-        <pc:chgData name="Xin Luo" userId="82312ee5779919a4" providerId="LiveId" clId="{98EC8ECB-A80D-1449-ACFE-0D931F29C13A}" dt="2023-02-23T15:45:27.987" v="683" actId="1037"/>
-        <pc:sldMkLst>
-          <pc:docMk/>
-          <pc:sldMk cId="655142816" sldId="2737"/>
-        </pc:sldMkLst>
-      </pc:sldChg>
-    </pc:docChg>
-  </pc:docChgLst>
-  <pc:docChgLst>
-    <pc:chgData name="Xin Luo" userId="82312ee5779919a4" providerId="LiveId" clId="{A508F461-0D73-864F-B88A-277BCD613B0A}"/>
-    <pc:docChg chg="modSld">
-      <pc:chgData name="Xin Luo" userId="82312ee5779919a4" providerId="LiveId" clId="{A508F461-0D73-864F-B88A-277BCD613B0A}" dt="2023-09-11T02:08:48.074" v="121" actId="1076"/>
-      <pc:docMkLst>
-        <pc:docMk/>
-      </pc:docMkLst>
-      <pc:sldChg chg="modSp mod">
-        <pc:chgData name="Xin Luo" userId="82312ee5779919a4" providerId="LiveId" clId="{A508F461-0D73-864F-B88A-277BCD613B0A}" dt="2023-09-11T01:25:36.157" v="49" actId="255"/>
-        <pc:sldMkLst>
-          <pc:docMk/>
-          <pc:sldMk cId="1209572041" sldId="2722"/>
-        </pc:sldMkLst>
-      </pc:sldChg>
-      <pc:sldChg chg="modSp mod">
-        <pc:chgData name="Xin Luo" userId="82312ee5779919a4" providerId="LiveId" clId="{A508F461-0D73-864F-B88A-277BCD613B0A}" dt="2023-09-11T02:08:48.074" v="121" actId="1076"/>
-        <pc:sldMkLst>
-          <pc:docMk/>
-          <pc:sldMk cId="3151170836" sldId="2742"/>
-        </pc:sldMkLst>
-      </pc:sldChg>
-      <pc:sldChg chg="modSp mod">
-        <pc:chgData name="Xin Luo" userId="82312ee5779919a4" providerId="LiveId" clId="{A508F461-0D73-864F-B88A-277BCD613B0A}" dt="2023-09-11T01:24:19.474" v="26" actId="255"/>
-        <pc:sldMkLst>
-          <pc:docMk/>
-          <pc:sldMk cId="3741103209" sldId="2745"/>
-        </pc:sldMkLst>
-      </pc:sldChg>
-      <pc:sldChg chg="modSp mod">
-        <pc:chgData name="Xin Luo" userId="82312ee5779919a4" providerId="LiveId" clId="{A508F461-0D73-864F-B88A-277BCD613B0A}" dt="2023-09-11T01:25:10.921" v="46" actId="1035"/>
-        <pc:sldMkLst>
-          <pc:docMk/>
-          <pc:sldMk cId="2081473989" sldId="2748"/>
-        </pc:sldMkLst>
-      </pc:sldChg>
-      <pc:sldChg chg="modSp mod">
-        <pc:chgData name="Xin Luo" userId="82312ee5779919a4" providerId="LiveId" clId="{A508F461-0D73-864F-B88A-277BCD613B0A}" dt="2023-09-11T01:23:28.376" v="25" actId="1037"/>
-        <pc:sldMkLst>
-          <pc:docMk/>
-          <pc:sldMk cId="2927474256" sldId="2754"/>
-        </pc:sldMkLst>
-      </pc:sldChg>
-    </pc:docChg>
-  </pc:docChgLst>
-  <pc:docChgLst>
-    <pc:chgData name="Xin Luo" userId="82312ee5779919a4" providerId="LiveId" clId="{44968A38-E2ED-AB49-A7AA-4E241E470C4E}"/>
-    <pc:docChg chg="custSel addSld modSld">
-      <pc:chgData name="Xin Luo" userId="82312ee5779919a4" providerId="LiveId" clId="{44968A38-E2ED-AB49-A7AA-4E241E470C4E}" dt="2024-04-06T05:28:09.746" v="48" actId="20577"/>
-      <pc:docMkLst>
-        <pc:docMk/>
-      </pc:docMkLst>
-      <pc:sldChg chg="addSp delSp modSp mod">
-        <pc:chgData name="Xin Luo" userId="82312ee5779919a4" providerId="LiveId" clId="{44968A38-E2ED-AB49-A7AA-4E241E470C4E}" dt="2024-04-06T05:28:09.746" v="48" actId="20577"/>
-        <pc:sldMkLst>
-          <pc:docMk/>
-          <pc:sldMk cId="1209572041" sldId="2722"/>
-        </pc:sldMkLst>
-      </pc:sldChg>
-      <pc:sldChg chg="add">
-        <pc:chgData name="Xin Luo" userId="82312ee5779919a4" providerId="LiveId" clId="{44968A38-E2ED-AB49-A7AA-4E241E470C4E}" dt="2024-04-06T03:15:35.142" v="0"/>
-        <pc:sldMkLst>
-          <pc:docMk/>
-          <pc:sldMk cId="472418319" sldId="2759"/>
-        </pc:sldMkLst>
-      </pc:sldChg>
-      <pc:sldChg chg="add">
-        <pc:chgData name="Xin Luo" userId="82312ee5779919a4" providerId="LiveId" clId="{44968A38-E2ED-AB49-A7AA-4E241E470C4E}" dt="2024-04-06T03:15:37.385" v="1"/>
-        <pc:sldMkLst>
-          <pc:docMk/>
-          <pc:sldMk cId="1125183986" sldId="2760"/>
-        </pc:sldMkLst>
-      </pc:sldChg>
-      <pc:sldChg chg="add">
-        <pc:chgData name="Xin Luo" userId="82312ee5779919a4" providerId="LiveId" clId="{44968A38-E2ED-AB49-A7AA-4E241E470C4E}" dt="2024-04-06T03:16:16.152" v="10"/>
-        <pc:sldMkLst>
-          <pc:docMk/>
-          <pc:sldMk cId="1417780723" sldId="2761"/>
-        </pc:sldMkLst>
-      </pc:sldChg>
-    </pc:docChg>
-  </pc:docChgLst>
-  <pc:docChgLst>
-    <pc:chgData name="Xin Luo" userId="82312ee5779919a4" providerId="LiveId" clId="{ABECCF1F-1CAA-3A42-9710-47D9CB1C5B21}"/>
-    <pc:docChg chg="undo custSel addSld modSld sldOrd">
-      <pc:chgData name="Xin Luo" userId="82312ee5779919a4" providerId="LiveId" clId="{ABECCF1F-1CAA-3A42-9710-47D9CB1C5B21}" dt="2023-08-21T09:31:16.266" v="879" actId="20577"/>
-      <pc:docMkLst>
-        <pc:docMk/>
-      </pc:docMkLst>
-      <pc:sldChg chg="modSp mod">
-        <pc:chgData name="Xin Luo" userId="82312ee5779919a4" providerId="LiveId" clId="{ABECCF1F-1CAA-3A42-9710-47D9CB1C5B21}" dt="2023-08-21T02:55:15.471" v="67" actId="20577"/>
-        <pc:sldMkLst>
-          <pc:docMk/>
-          <pc:sldMk cId="1576120367" sldId="2387"/>
-        </pc:sldMkLst>
-      </pc:sldChg>
-      <pc:sldChg chg="modSp mod">
-        <pc:chgData name="Xin Luo" userId="82312ee5779919a4" providerId="LiveId" clId="{ABECCF1F-1CAA-3A42-9710-47D9CB1C5B21}" dt="2023-08-21T03:50:02.826" v="70" actId="14100"/>
-        <pc:sldMkLst>
-          <pc:docMk/>
-          <pc:sldMk cId="3833073590" sldId="2716"/>
-        </pc:sldMkLst>
-      </pc:sldChg>
-      <pc:sldChg chg="addSp delSp modSp mod">
-        <pc:chgData name="Xin Luo" userId="82312ee5779919a4" providerId="LiveId" clId="{ABECCF1F-1CAA-3A42-9710-47D9CB1C5B21}" dt="2023-08-21T03:52:56.239" v="118"/>
-        <pc:sldMkLst>
-          <pc:docMk/>
-          <pc:sldMk cId="2776132283" sldId="2739"/>
-        </pc:sldMkLst>
-      </pc:sldChg>
-      <pc:sldChg chg="addSp modSp mod ord">
-        <pc:chgData name="Xin Luo" userId="82312ee5779919a4" providerId="LiveId" clId="{ABECCF1F-1CAA-3A42-9710-47D9CB1C5B21}" dt="2023-08-21T07:26:51.742" v="177" actId="20578"/>
-        <pc:sldMkLst>
-          <pc:docMk/>
-          <pc:sldMk cId="4194482579" sldId="2743"/>
-        </pc:sldMkLst>
-      </pc:sldChg>
-      <pc:sldChg chg="addSp delSp modSp add mod">
-        <pc:chgData name="Xin Luo" userId="82312ee5779919a4" providerId="LiveId" clId="{ABECCF1F-1CAA-3A42-9710-47D9CB1C5B21}" dt="2023-08-21T07:50:33.166" v="356" actId="20577"/>
-        <pc:sldMkLst>
-          <pc:docMk/>
-          <pc:sldMk cId="738332523" sldId="2751"/>
-        </pc:sldMkLst>
-      </pc:sldChg>
-      <pc:sldChg chg="addSp delSp modSp add mod">
-        <pc:chgData name="Xin Luo" userId="82312ee5779919a4" providerId="LiveId" clId="{ABECCF1F-1CAA-3A42-9710-47D9CB1C5B21}" dt="2023-08-21T07:50:29.891" v="352" actId="20577"/>
-        <pc:sldMkLst>
-          <pc:docMk/>
-          <pc:sldMk cId="3189639985" sldId="2752"/>
-        </pc:sldMkLst>
-      </pc:sldChg>
-      <pc:sldChg chg="addSp delSp modSp add mod">
-        <pc:chgData name="Xin Luo" userId="82312ee5779919a4" providerId="LiveId" clId="{ABECCF1F-1CAA-3A42-9710-47D9CB1C5B21}" dt="2023-08-21T08:59:24.857" v="602" actId="478"/>
-        <pc:sldMkLst>
-          <pc:docMk/>
-          <pc:sldMk cId="2878944048" sldId="2753"/>
-        </pc:sldMkLst>
-      </pc:sldChg>
-      <pc:sldChg chg="addSp delSp modSp add mod">
-        <pc:chgData name="Xin Luo" userId="82312ee5779919a4" providerId="LiveId" clId="{ABECCF1F-1CAA-3A42-9710-47D9CB1C5B21}" dt="2023-08-21T09:09:03.859" v="781" actId="14100"/>
-        <pc:sldMkLst>
-          <pc:docMk/>
-          <pc:sldMk cId="2927474256" sldId="2754"/>
-        </pc:sldMkLst>
-      </pc:sldChg>
-      <pc:sldChg chg="delSp modSp add mod">
-        <pc:chgData name="Xin Luo" userId="82312ee5779919a4" providerId="LiveId" clId="{ABECCF1F-1CAA-3A42-9710-47D9CB1C5B21}" dt="2023-08-21T09:31:16.266" v="879" actId="20577"/>
-        <pc:sldMkLst>
-          <pc:docMk/>
-          <pc:sldMk cId="3593416967" sldId="2755"/>
-        </pc:sldMkLst>
-      </pc:sldChg>
-    </pc:docChg>
-  </pc:docChgLst>
-  <pc:docChgLst>
-    <pc:chgData name="Xin Luo" userId="82312ee5779919a4" providerId="LiveId" clId="{9DD00C57-1E20-5F45-A5A7-A6F833EE305E}"/>
-    <pc:docChg chg="custSel delSld modSld">
-      <pc:chgData name="Xin Luo" userId="82312ee5779919a4" providerId="LiveId" clId="{9DD00C57-1E20-5F45-A5A7-A6F833EE305E}" dt="2024-04-05T07:56:38.877" v="69" actId="2696"/>
-      <pc:docMkLst>
-        <pc:docMk/>
-      </pc:docMkLst>
-      <pc:sldChg chg="del">
-        <pc:chgData name="Xin Luo" userId="82312ee5779919a4" providerId="LiveId" clId="{9DD00C57-1E20-5F45-A5A7-A6F833EE305E}" dt="2024-04-05T07:51:34.265" v="18" actId="2696"/>
-        <pc:sldMkLst>
-          <pc:docMk/>
-          <pc:sldMk cId="4067577602" sldId="2605"/>
-        </pc:sldMkLst>
-      </pc:sldChg>
-      <pc:sldChg chg="modSp mod">
-        <pc:chgData name="Xin Luo" userId="82312ee5779919a4" providerId="LiveId" clId="{9DD00C57-1E20-5F45-A5A7-A6F833EE305E}" dt="2024-04-05T07:42:36.104" v="17" actId="5793"/>
-        <pc:sldMkLst>
-          <pc:docMk/>
-          <pc:sldMk cId="1658607177" sldId="2708"/>
-        </pc:sldMkLst>
-      </pc:sldChg>
-      <pc:sldChg chg="modSp mod">
-        <pc:chgData name="Xin Luo" userId="82312ee5779919a4" providerId="LiveId" clId="{9DD00C57-1E20-5F45-A5A7-A6F833EE305E}" dt="2024-04-05T07:52:08.536" v="62" actId="20577"/>
-        <pc:sldMkLst>
-          <pc:docMk/>
-          <pc:sldMk cId="481122590" sldId="2709"/>
-        </pc:sldMkLst>
-      </pc:sldChg>
-      <pc:sldChg chg="del">
-        <pc:chgData name="Xin Luo" userId="82312ee5779919a4" providerId="LiveId" clId="{9DD00C57-1E20-5F45-A5A7-A6F833EE305E}" dt="2024-04-05T07:51:35.106" v="19" actId="2696"/>
-        <pc:sldMkLst>
-          <pc:docMk/>
-          <pc:sldMk cId="655142816" sldId="2737"/>
-        </pc:sldMkLst>
-      </pc:sldChg>
-      <pc:sldChg chg="del">
-        <pc:chgData name="Xin Luo" userId="82312ee5779919a4" providerId="LiveId" clId="{9DD00C57-1E20-5F45-A5A7-A6F833EE305E}" dt="2024-04-05T07:56:34.386" v="63" actId="2696"/>
-        <pc:sldMkLst>
-          <pc:docMk/>
-          <pc:sldMk cId="4156684215" sldId="2738"/>
-        </pc:sldMkLst>
-      </pc:sldChg>
-      <pc:sldChg chg="del">
-        <pc:chgData name="Xin Luo" userId="82312ee5779919a4" providerId="LiveId" clId="{9DD00C57-1E20-5F45-A5A7-A6F833EE305E}" dt="2024-04-05T07:56:38.877" v="69" actId="2696"/>
-        <pc:sldMkLst>
-          <pc:docMk/>
-          <pc:sldMk cId="2776132283" sldId="2739"/>
-        </pc:sldMkLst>
-      </pc:sldChg>
-      <pc:sldChg chg="del">
-        <pc:chgData name="Xin Luo" userId="82312ee5779919a4" providerId="LiveId" clId="{9DD00C57-1E20-5F45-A5A7-A6F833EE305E}" dt="2024-04-05T07:51:37.161" v="20" actId="2696"/>
-        <pc:sldMkLst>
-          <pc:docMk/>
-          <pc:sldMk cId="3151170836" sldId="2742"/>
-        </pc:sldMkLst>
-      </pc:sldChg>
-      <pc:sldChg chg="del">
-        <pc:chgData name="Xin Luo" userId="82312ee5779919a4" providerId="LiveId" clId="{9DD00C57-1E20-5F45-A5A7-A6F833EE305E}" dt="2024-04-05T07:56:34.962" v="64" actId="2696"/>
-        <pc:sldMkLst>
-          <pc:docMk/>
-          <pc:sldMk cId="738332523" sldId="2751"/>
-        </pc:sldMkLst>
-      </pc:sldChg>
-      <pc:sldChg chg="del">
-        <pc:chgData name="Xin Luo" userId="82312ee5779919a4" providerId="LiveId" clId="{9DD00C57-1E20-5F45-A5A7-A6F833EE305E}" dt="2024-04-05T07:56:35.443" v="65" actId="2696"/>
-        <pc:sldMkLst>
-          <pc:docMk/>
-          <pc:sldMk cId="3189639985" sldId="2752"/>
-        </pc:sldMkLst>
-      </pc:sldChg>
-      <pc:sldChg chg="del">
-        <pc:chgData name="Xin Luo" userId="82312ee5779919a4" providerId="LiveId" clId="{9DD00C57-1E20-5F45-A5A7-A6F833EE305E}" dt="2024-04-05T07:56:35.917" v="66" actId="2696"/>
-        <pc:sldMkLst>
-          <pc:docMk/>
-          <pc:sldMk cId="2878944048" sldId="2753"/>
-        </pc:sldMkLst>
-      </pc:sldChg>
-      <pc:sldChg chg="del">
-        <pc:chgData name="Xin Luo" userId="82312ee5779919a4" providerId="LiveId" clId="{9DD00C57-1E20-5F45-A5A7-A6F833EE305E}" dt="2024-04-05T07:56:36.696" v="67" actId="2696"/>
-        <pc:sldMkLst>
-          <pc:docMk/>
-          <pc:sldMk cId="2927474256" sldId="2754"/>
-        </pc:sldMkLst>
-      </pc:sldChg>
-      <pc:sldChg chg="del">
-        <pc:chgData name="Xin Luo" userId="82312ee5779919a4" providerId="LiveId" clId="{9DD00C57-1E20-5F45-A5A7-A6F833EE305E}" dt="2024-04-05T07:56:37.562" v="68" actId="2696"/>
-        <pc:sldMkLst>
-          <pc:docMk/>
-          <pc:sldMk cId="3593416967" sldId="2755"/>
-        </pc:sldMkLst>
-      </pc:sldChg>
-    </pc:docChg>
-  </pc:docChgLst>
-  <pc:docChgLst>
-    <pc:chgData name="Xin Luo" userId="82312ee5779919a4" providerId="LiveId" clId="{D28526AD-BB72-0B4E-9638-04907E1F3622}"/>
-    <pc:docChg chg="delSld modSld">
-      <pc:chgData name="Xin Luo" userId="82312ee5779919a4" providerId="LiveId" clId="{D28526AD-BB72-0B4E-9638-04907E1F3622}" dt="2023-09-18T01:27:13.837" v="116" actId="2696"/>
-      <pc:docMkLst>
-        <pc:docMk/>
-      </pc:docMkLst>
-      <pc:sldChg chg="modSp mod">
-        <pc:chgData name="Xin Luo" userId="82312ee5779919a4" providerId="LiveId" clId="{D28526AD-BB72-0B4E-9638-04907E1F3622}" dt="2023-09-18T01:27:09.604" v="115" actId="255"/>
-        <pc:sldMkLst>
-          <pc:docMk/>
-          <pc:sldMk cId="1209572041" sldId="2722"/>
-        </pc:sldMkLst>
-      </pc:sldChg>
-      <pc:sldChg chg="del">
-        <pc:chgData name="Xin Luo" userId="82312ee5779919a4" providerId="LiveId" clId="{D28526AD-BB72-0B4E-9638-04907E1F3622}" dt="2023-09-18T01:27:13.837" v="116" actId="2696"/>
-        <pc:sldMkLst>
-          <pc:docMk/>
-          <pc:sldMk cId="2476237792" sldId="2741"/>
-        </pc:sldMkLst>
-      </pc:sldChg>
-    </pc:docChg>
-  </pc:docChgLst>
-  <pc:docChgLst>
-    <pc:chgData name="Xin Luo" userId="82312ee5779919a4" providerId="LiveId" clId="{3C4A7AF4-6488-5041-B432-D36EF53163D3}"/>
-    <pc:docChg chg="undo custSel addSld delSld modSld sldOrd">
-      <pc:chgData name="Xin Luo" userId="82312ee5779919a4" providerId="LiveId" clId="{3C4A7AF4-6488-5041-B432-D36EF53163D3}" dt="2023-02-23T14:33:41.327" v="6919" actId="478"/>
-      <pc:docMkLst>
-        <pc:docMk/>
-      </pc:docMkLst>
-      <pc:sldChg chg="del">
-        <pc:chgData name="Xin Luo" userId="82312ee5779919a4" providerId="LiveId" clId="{3C4A7AF4-6488-5041-B432-D36EF53163D3}" dt="2023-02-22T05:30:51.981" v="0" actId="2696"/>
-        <pc:sldMkLst>
-          <pc:docMk/>
-          <pc:sldMk cId="1153920038" sldId="2206"/>
-        </pc:sldMkLst>
-      </pc:sldChg>
-      <pc:sldChg chg="addSp modSp mod">
-        <pc:chgData name="Xin Luo" userId="82312ee5779919a4" providerId="LiveId" clId="{3C4A7AF4-6488-5041-B432-D36EF53163D3}" dt="2023-02-23T07:39:26.083" v="2380" actId="20577"/>
-        <pc:sldMkLst>
-          <pc:docMk/>
-          <pc:sldMk cId="1576120367" sldId="2387"/>
-        </pc:sldMkLst>
-      </pc:sldChg>
-      <pc:sldChg chg="modSp mod">
-        <pc:chgData name="Xin Luo" userId="82312ee5779919a4" providerId="LiveId" clId="{3C4A7AF4-6488-5041-B432-D36EF53163D3}" dt="2023-02-22T07:33:21.001" v="351" actId="20577"/>
-        <pc:sldMkLst>
-          <pc:docMk/>
-          <pc:sldMk cId="2415901206" sldId="2447"/>
-        </pc:sldMkLst>
-      </pc:sldChg>
-      <pc:sldChg chg="addSp delSp modSp mod">
-        <pc:chgData name="Xin Luo" userId="82312ee5779919a4" providerId="LiveId" clId="{3C4A7AF4-6488-5041-B432-D36EF53163D3}" dt="2023-02-23T01:16:39.011" v="1571" actId="1037"/>
-        <pc:sldMkLst>
-          <pc:docMk/>
-          <pc:sldMk cId="4067577602" sldId="2605"/>
-        </pc:sldMkLst>
-      </pc:sldChg>
-      <pc:sldChg chg="del">
-        <pc:chgData name="Xin Luo" userId="82312ee5779919a4" providerId="LiveId" clId="{3C4A7AF4-6488-5041-B432-D36EF53163D3}" dt="2023-02-22T05:30:52.002" v="3" actId="2696"/>
-        <pc:sldMkLst>
-          <pc:docMk/>
-          <pc:sldMk cId="2688334957" sldId="2705"/>
-        </pc:sldMkLst>
-      </pc:sldChg>
-      <pc:sldChg chg="del">
-        <pc:chgData name="Xin Luo" userId="82312ee5779919a4" providerId="LiveId" clId="{3C4A7AF4-6488-5041-B432-D36EF53163D3}" dt="2023-02-22T05:30:51.986" v="2" actId="2696"/>
-        <pc:sldMkLst>
-          <pc:docMk/>
-          <pc:sldMk cId="2464444856" sldId="2706"/>
-        </pc:sldMkLst>
-      </pc:sldChg>
-      <pc:sldChg chg="del">
-        <pc:chgData name="Xin Luo" userId="82312ee5779919a4" providerId="LiveId" clId="{3C4A7AF4-6488-5041-B432-D36EF53163D3}" dt="2023-02-22T05:30:51.983" v="1" actId="2696"/>
-        <pc:sldMkLst>
-          <pc:docMk/>
-          <pc:sldMk cId="1602808061" sldId="2707"/>
-        </pc:sldMkLst>
-      </pc:sldChg>
-      <pc:sldChg chg="modSp mod">
-        <pc:chgData name="Xin Luo" userId="82312ee5779919a4" providerId="LiveId" clId="{3C4A7AF4-6488-5041-B432-D36EF53163D3}" dt="2023-02-22T07:27:49.994" v="45" actId="20577"/>
-        <pc:sldMkLst>
-          <pc:docMk/>
-          <pc:sldMk cId="1658607177" sldId="2708"/>
-        </pc:sldMkLst>
-      </pc:sldChg>
-      <pc:sldChg chg="modSp add mod">
-        <pc:chgData name="Xin Luo" userId="82312ee5779919a4" providerId="LiveId" clId="{3C4A7AF4-6488-5041-B432-D36EF53163D3}" dt="2023-02-23T07:39:57.891" v="2394" actId="20577"/>
-        <pc:sldMkLst>
-          <pc:docMk/>
-          <pc:sldMk cId="481122590" sldId="2709"/>
-        </pc:sldMkLst>
-      </pc:sldChg>
-      <pc:sldChg chg="addSp delSp modSp del mod">
-        <pc:chgData name="Xin Luo" userId="82312ee5779919a4" providerId="LiveId" clId="{3C4A7AF4-6488-5041-B432-D36EF53163D3}" dt="2023-02-23T07:26:52.546" v="2336" actId="2696"/>
-        <pc:sldMkLst>
-          <pc:docMk/>
-          <pc:sldMk cId="1257969106" sldId="2709"/>
-        </pc:sldMkLst>
-      </pc:sldChg>
-      <pc:sldChg chg="del">
-        <pc:chgData name="Xin Luo" userId="82312ee5779919a4" providerId="LiveId" clId="{3C4A7AF4-6488-5041-B432-D36EF53163D3}" dt="2023-02-22T07:32:46.487" v="311" actId="2696"/>
-        <pc:sldMkLst>
-          <pc:docMk/>
-          <pc:sldMk cId="2744383376" sldId="2711"/>
-        </pc:sldMkLst>
-      </pc:sldChg>
-      <pc:sldChg chg="del">
-        <pc:chgData name="Xin Luo" userId="82312ee5779919a4" providerId="LiveId" clId="{3C4A7AF4-6488-5041-B432-D36EF53163D3}" dt="2023-02-22T07:32:46.489" v="312" actId="2696"/>
-        <pc:sldMkLst>
-          <pc:docMk/>
-          <pc:sldMk cId="280619949" sldId="2714"/>
-        </pc:sldMkLst>
-      </pc:sldChg>
-      <pc:sldChg chg="del">
-        <pc:chgData name="Xin Luo" userId="82312ee5779919a4" providerId="LiveId" clId="{3C4A7AF4-6488-5041-B432-D36EF53163D3}" dt="2023-02-22T07:32:53.087" v="313" actId="2696"/>
-        <pc:sldMkLst>
-          <pc:docMk/>
-          <pc:sldMk cId="3852391939" sldId="2715"/>
-        </pc:sldMkLst>
-      </pc:sldChg>
-      <pc:sldChg chg="delSp modSp del mod ord">
-        <pc:chgData name="Xin Luo" userId="82312ee5779919a4" providerId="LiveId" clId="{3C4A7AF4-6488-5041-B432-D36EF53163D3}" dt="2023-02-23T07:26:52.546" v="2336" actId="2696"/>
-        <pc:sldMkLst>
-          <pc:docMk/>
-          <pc:sldMk cId="3026715585" sldId="2716"/>
-        </pc:sldMkLst>
-      </pc:sldChg>
-      <pc:sldChg chg="addSp modSp add mod">
-        <pc:chgData name="Xin Luo" userId="82312ee5779919a4" providerId="LiveId" clId="{3C4A7AF4-6488-5041-B432-D36EF53163D3}" dt="2023-02-23T07:58:34.775" v="2627" actId="20577"/>
-        <pc:sldMkLst>
-          <pc:docMk/>
-          <pc:sldMk cId="3833073590" sldId="2716"/>
-        </pc:sldMkLst>
-      </pc:sldChg>
-      <pc:sldChg chg="del">
-        <pc:chgData name="Xin Luo" userId="82312ee5779919a4" providerId="LiveId" clId="{3C4A7AF4-6488-5041-B432-D36EF53163D3}" dt="2023-02-22T07:32:53.106" v="315" actId="2696"/>
-        <pc:sldMkLst>
-          <pc:docMk/>
-          <pc:sldMk cId="4136986794" sldId="2717"/>
-        </pc:sldMkLst>
-      </pc:sldChg>
-      <pc:sldChg chg="del">
-        <pc:chgData name="Xin Luo" userId="82312ee5779919a4" providerId="LiveId" clId="{3C4A7AF4-6488-5041-B432-D36EF53163D3}" dt="2023-02-22T07:32:53.089" v="314" actId="2696"/>
-        <pc:sldMkLst>
-          <pc:docMk/>
-          <pc:sldMk cId="1778017482" sldId="2718"/>
-        </pc:sldMkLst>
-      </pc:sldChg>
-      <pc:sldChg chg="modSp del mod ord">
-        <pc:chgData name="Xin Luo" userId="82312ee5779919a4" providerId="LiveId" clId="{3C4A7AF4-6488-5041-B432-D36EF53163D3}" dt="2023-02-23T07:26:52.546" v="2336" actId="2696"/>
-        <pc:sldMkLst>
-          <pc:docMk/>
-          <pc:sldMk cId="1858913004" sldId="2719"/>
-        </pc:sldMkLst>
-      </pc:sldChg>
-      <pc:sldChg chg="modSp add del mod">
-        <pc:chgData name="Xin Luo" userId="82312ee5779919a4" providerId="LiveId" clId="{3C4A7AF4-6488-5041-B432-D36EF53163D3}" dt="2023-02-23T07:29:10.384" v="2343" actId="2696"/>
-        <pc:sldMkLst>
-          <pc:docMk/>
-          <pc:sldMk cId="3840444413" sldId="2719"/>
-        </pc:sldMkLst>
-      </pc:sldChg>
-      <pc:sldChg chg="modSp add mod ord">
-        <pc:chgData name="Xin Luo" userId="82312ee5779919a4" providerId="LiveId" clId="{3C4A7AF4-6488-5041-B432-D36EF53163D3}" dt="2023-02-23T04:51:04.333" v="1905" actId="20577"/>
-        <pc:sldMkLst>
-          <pc:docMk/>
-          <pc:sldMk cId="972163772" sldId="2720"/>
-        </pc:sldMkLst>
-      </pc:sldChg>
-      <pc:sldChg chg="del">
-        <pc:chgData name="Xin Luo" userId="82312ee5779919a4" providerId="LiveId" clId="{3C4A7AF4-6488-5041-B432-D36EF53163D3}" dt="2023-02-22T07:32:37.778" v="309" actId="2696"/>
-        <pc:sldMkLst>
-          <pc:docMk/>
-          <pc:sldMk cId="3480831675" sldId="2720"/>
-        </pc:sldMkLst>
-      </pc:sldChg>
-      <pc:sldChg chg="del">
-        <pc:chgData name="Xin Luo" userId="82312ee5779919a4" providerId="LiveId" clId="{3C4A7AF4-6488-5041-B432-D36EF53163D3}" dt="2023-02-22T07:32:46.484" v="310" actId="2696"/>
-        <pc:sldMkLst>
-          <pc:docMk/>
-          <pc:sldMk cId="1410676903" sldId="2721"/>
-        </pc:sldMkLst>
-      </pc:sldChg>
-      <pc:sldChg chg="delSp modSp add mod ord">
-        <pc:chgData name="Xin Luo" userId="82312ee5779919a4" providerId="LiveId" clId="{3C4A7AF4-6488-5041-B432-D36EF53163D3}" dt="2023-02-23T07:12:50.196" v="2062" actId="478"/>
-        <pc:sldMkLst>
-          <pc:docMk/>
-          <pc:sldMk cId="2689695864" sldId="2721"/>
-        </pc:sldMkLst>
-      </pc:sldChg>
-      <pc:sldChg chg="add del">
-        <pc:chgData name="Xin Luo" userId="82312ee5779919a4" providerId="LiveId" clId="{3C4A7AF4-6488-5041-B432-D36EF53163D3}" dt="2023-02-23T01:10:59.145" v="1497"/>
-        <pc:sldMkLst>
-          <pc:docMk/>
-          <pc:sldMk cId="2910826875" sldId="2721"/>
-        </pc:sldMkLst>
-      </pc:sldChg>
-      <pc:sldChg chg="addSp delSp modSp add mod ord">
-        <pc:chgData name="Xin Luo" userId="82312ee5779919a4" providerId="LiveId" clId="{3C4A7AF4-6488-5041-B432-D36EF53163D3}" dt="2023-02-23T07:26:03.168" v="2327" actId="20577"/>
-        <pc:sldMkLst>
-          <pc:docMk/>
-          <pc:sldMk cId="1209572041" sldId="2722"/>
-        </pc:sldMkLst>
-      </pc:sldChg>
-      <pc:sldChg chg="add del">
-        <pc:chgData name="Xin Luo" userId="82312ee5779919a4" providerId="LiveId" clId="{3C4A7AF4-6488-5041-B432-D36EF53163D3}" dt="2023-02-23T01:15:26.280" v="1535"/>
-        <pc:sldMkLst>
-          <pc:docMk/>
-          <pc:sldMk cId="1287359691" sldId="2722"/>
-        </pc:sldMkLst>
-      </pc:sldChg>
-      <pc:sldChg chg="add del">
-        <pc:chgData name="Xin Luo" userId="82312ee5779919a4" providerId="LiveId" clId="{3C4A7AF4-6488-5041-B432-D36EF53163D3}" dt="2023-02-23T04:49:30.686" v="1883" actId="2696"/>
-        <pc:sldMkLst>
-          <pc:docMk/>
-          <pc:sldMk cId="510300836" sldId="2723"/>
-        </pc:sldMkLst>
-      </pc:sldChg>
-      <pc:sldChg chg="addSp delSp modSp add del mod">
-        <pc:chgData name="Xin Luo" userId="82312ee5779919a4" providerId="LiveId" clId="{3C4A7AF4-6488-5041-B432-D36EF53163D3}" dt="2023-02-23T07:26:33.576" v="2330" actId="2696"/>
-        <pc:sldMkLst>
-          <pc:docMk/>
-          <pc:sldMk cId="2794277739" sldId="2723"/>
-        </pc:sldMkLst>
-      </pc:sldChg>
-      <pc:sldChg chg="addSp delSp new del mod">
-        <pc:chgData name="Xin Luo" userId="82312ee5779919a4" providerId="LiveId" clId="{3C4A7AF4-6488-5041-B432-D36EF53163D3}" dt="2023-02-23T07:57:59.493" v="2582" actId="2696"/>
-        <pc:sldMkLst>
-          <pc:docMk/>
-          <pc:sldMk cId="2812212654" sldId="2723"/>
-        </pc:sldMkLst>
-      </pc:sldChg>
-      <pc:sldChg chg="delSp modSp add del mod">
-        <pc:chgData name="Xin Luo" userId="82312ee5779919a4" providerId="LiveId" clId="{3C4A7AF4-6488-5041-B432-D36EF53163D3}" dt="2023-02-23T07:58:40.953" v="2629" actId="2696"/>
-        <pc:sldMkLst>
-          <pc:docMk/>
-          <pc:sldMk cId="1937332499" sldId="2724"/>
-        </pc:sldMkLst>
-      </pc:sldChg>
-      <pc:sldChg chg="addSp delSp modSp add mod">
-        <pc:chgData name="Xin Luo" userId="82312ee5779919a4" providerId="LiveId" clId="{3C4A7AF4-6488-5041-B432-D36EF53163D3}" dt="2023-02-23T14:01:10.568" v="6309" actId="403"/>
-        <pc:sldMkLst>
-          <pc:docMk/>
-          <pc:sldMk cId="353940032" sldId="2725"/>
-        </pc:sldMkLst>
-      </pc:sldChg>
-      <pc:sldChg chg="addSp delSp modSp add mod">
-        <pc:chgData name="Xin Luo" userId="82312ee5779919a4" providerId="LiveId" clId="{3C4A7AF4-6488-5041-B432-D36EF53163D3}" dt="2023-02-23T08:31:04.830" v="3778" actId="113"/>
-        <pc:sldMkLst>
-          <pc:docMk/>
-          <pc:sldMk cId="45083394" sldId="2726"/>
-        </pc:sldMkLst>
-      </pc:sldChg>
-      <pc:sldChg chg="addSp delSp modSp add mod">
-        <pc:chgData name="Xin Luo" userId="82312ee5779919a4" providerId="LiveId" clId="{3C4A7AF4-6488-5041-B432-D36EF53163D3}" dt="2023-02-23T09:13:39.268" v="5260" actId="1076"/>
-        <pc:sldMkLst>
-          <pc:docMk/>
-          <pc:sldMk cId="148985918" sldId="2727"/>
-        </pc:sldMkLst>
-      </pc:sldChg>
-      <pc:sldChg chg="addSp delSp modSp add mod">
-        <pc:chgData name="Xin Luo" userId="82312ee5779919a4" providerId="LiveId" clId="{3C4A7AF4-6488-5041-B432-D36EF53163D3}" dt="2023-02-23T08:32:21.875" v="3790" actId="1076"/>
-        <pc:sldMkLst>
-          <pc:docMk/>
-          <pc:sldMk cId="3544980656" sldId="2728"/>
-        </pc:sldMkLst>
-      </pc:sldChg>
-      <pc:sldChg chg="addSp delSp modSp add mod">
-        <pc:chgData name="Xin Luo" userId="82312ee5779919a4" providerId="LiveId" clId="{3C4A7AF4-6488-5041-B432-D36EF53163D3}" dt="2023-02-23T09:02:43.022" v="4809" actId="20577"/>
-        <pc:sldMkLst>
-          <pc:docMk/>
-          <pc:sldMk cId="1664139585" sldId="2729"/>
-        </pc:sldMkLst>
-      </pc:sldChg>
-      <pc:sldChg chg="addSp delSp modSp add mod">
-        <pc:chgData name="Xin Luo" userId="82312ee5779919a4" providerId="LiveId" clId="{3C4A7AF4-6488-5041-B432-D36EF53163D3}" dt="2023-02-23T09:02:46.545" v="4811" actId="20577"/>
-        <pc:sldMkLst>
-          <pc:docMk/>
-          <pc:sldMk cId="3561803108" sldId="2730"/>
-        </pc:sldMkLst>
-      </pc:sldChg>
-      <pc:sldChg chg="addSp delSp modSp add mod">
-        <pc:chgData name="Xin Luo" userId="82312ee5779919a4" providerId="LiveId" clId="{3C4A7AF4-6488-5041-B432-D36EF53163D3}" dt="2023-02-23T11:42:21.434" v="5641" actId="20577"/>
-        <pc:sldMkLst>
-          <pc:docMk/>
-          <pc:sldMk cId="236610701" sldId="2731"/>
-        </pc:sldMkLst>
-      </pc:sldChg>
-      <pc:sldChg chg="add del">
-        <pc:chgData name="Xin Luo" userId="82312ee5779919a4" providerId="LiveId" clId="{3C4A7AF4-6488-5041-B432-D36EF53163D3}" dt="2023-02-23T08:54:40.823" v="4449"/>
-        <pc:sldMkLst>
-          <pc:docMk/>
-          <pc:sldMk cId="3607281671" sldId="2731"/>
-        </pc:sldMkLst>
-      </pc:sldChg>
-      <pc:sldChg chg="addSp delSp modSp add mod modNotesTx">
-        <pc:chgData name="Xin Luo" userId="82312ee5779919a4" providerId="LiveId" clId="{3C4A7AF4-6488-5041-B432-D36EF53163D3}" dt="2023-02-23T13:58:03.496" v="6246" actId="1076"/>
-        <pc:sldMkLst>
-          <pc:docMk/>
-          <pc:sldMk cId="1986913413" sldId="2732"/>
-        </pc:sldMkLst>
-      </pc:sldChg>
-      <pc:sldChg chg="addSp delSp modSp add mod">
-        <pc:chgData name="Xin Luo" userId="82312ee5779919a4" providerId="LiveId" clId="{3C4A7AF4-6488-5041-B432-D36EF53163D3}" dt="2023-02-23T14:00:47.321" v="6304" actId="1076"/>
-        <pc:sldMkLst>
-          <pc:docMk/>
-          <pc:sldMk cId="270311508" sldId="2733"/>
-        </pc:sldMkLst>
-      </pc:sldChg>
-      <pc:sldChg chg="addSp delSp modSp add mod">
-        <pc:chgData name="Xin Luo" userId="82312ee5779919a4" providerId="LiveId" clId="{3C4A7AF4-6488-5041-B432-D36EF53163D3}" dt="2023-02-23T14:29:59.110" v="6746" actId="403"/>
-        <pc:sldMkLst>
-          <pc:docMk/>
-          <pc:sldMk cId="3138813826" sldId="2734"/>
-        </pc:sldMkLst>
-      </pc:sldChg>
-      <pc:sldChg chg="addSp modSp add mod">
-        <pc:chgData name="Xin Luo" userId="82312ee5779919a4" providerId="LiveId" clId="{3C4A7AF4-6488-5041-B432-D36EF53163D3}" dt="2023-02-23T14:33:30.940" v="6917" actId="1037"/>
-        <pc:sldMkLst>
-          <pc:docMk/>
-          <pc:sldMk cId="128317883" sldId="2735"/>
-        </pc:sldMkLst>
-      </pc:sldChg>
-      <pc:sldChg chg="delSp add mod">
-        <pc:chgData name="Xin Luo" userId="82312ee5779919a4" providerId="LiveId" clId="{3C4A7AF4-6488-5041-B432-D36EF53163D3}" dt="2023-02-23T14:33:41.327" v="6919" actId="478"/>
-        <pc:sldMkLst>
-          <pc:docMk/>
-          <pc:sldMk cId="383906436" sldId="2736"/>
-        </pc:sldMkLst>
-      </pc:sldChg>
-    </pc:docChg>
-  </pc:docChgLst>
-  <pc:docChgLst>
-    <pc:chgData name="Xin Luo" userId="82312ee5779919a4" providerId="LiveId" clId="{4807F875-6F75-AB41-83F0-5AE490FE2F1C}"/>
-    <pc:docChg chg="custSel addSld modSld">
-      <pc:chgData name="Xin Luo" userId="82312ee5779919a4" providerId="LiveId" clId="{4807F875-6F75-AB41-83F0-5AE490FE2F1C}" dt="2023-09-13T14:07:01.122" v="8" actId="1076"/>
-      <pc:docMkLst>
-        <pc:docMk/>
-      </pc:docMkLst>
-      <pc:sldChg chg="addSp delSp modSp mod">
-        <pc:chgData name="Xin Luo" userId="82312ee5779919a4" providerId="LiveId" clId="{4807F875-6F75-AB41-83F0-5AE490FE2F1C}" dt="2023-09-13T14:06:41.345" v="2" actId="478"/>
-        <pc:sldMkLst>
-          <pc:docMk/>
-          <pc:sldMk cId="3741103209" sldId="2745"/>
-        </pc:sldMkLst>
-      </pc:sldChg>
-      <pc:sldChg chg="modSp add mod">
-        <pc:chgData name="Xin Luo" userId="82312ee5779919a4" providerId="LiveId" clId="{4807F875-6F75-AB41-83F0-5AE490FE2F1C}" dt="2023-09-13T14:07:01.122" v="8" actId="1076"/>
-        <pc:sldMkLst>
-          <pc:docMk/>
-          <pc:sldMk cId="1878724924" sldId="2758"/>
-        </pc:sldMkLst>
-      </pc:sldChg>
-    </pc:docChg>
-  </pc:docChgLst>
-  <pc:docChgLst>
-    <pc:chgData name="Xin Luo" userId="82312ee5779919a4" providerId="LiveId" clId="{F5C2D48E-4392-624B-B7FE-4C89A1D87AB0}"/>
-    <pc:docChg chg="undo custSel addSld delSld modSld sldOrd">
-      <pc:chgData name="Xin Luo" userId="82312ee5779919a4" providerId="LiveId" clId="{F5C2D48E-4392-624B-B7FE-4C89A1D87AB0}" dt="2025-05-25T09:37:25.692" v="1619" actId="1076"/>
-      <pc:docMkLst>
-        <pc:docMk/>
-      </pc:docMkLst>
-      <pc:sldChg chg="addSp delSp modSp mod">
-        <pc:chgData name="Xin Luo" userId="82312ee5779919a4" providerId="LiveId" clId="{F5C2D48E-4392-624B-B7FE-4C89A1D87AB0}" dt="2025-05-25T05:40:36.754" v="318" actId="1035"/>
-        <pc:sldMkLst>
-          <pc:docMk/>
-          <pc:sldMk cId="1576120367" sldId="2387"/>
-        </pc:sldMkLst>
-        <pc:spChg chg="mod">
-          <ac:chgData name="Xin Luo" userId="82312ee5779919a4" providerId="LiveId" clId="{F5C2D48E-4392-624B-B7FE-4C89A1D87AB0}" dt="2025-05-25T05:40:29.653" v="289" actId="20577"/>
-          <ac:spMkLst>
-            <pc:docMk/>
-            <pc:sldMk cId="1576120367" sldId="2387"/>
-            <ac:spMk id="10" creationId="{00000000-0000-0000-0000-000000000000}"/>
-          </ac:spMkLst>
-        </pc:spChg>
-        <pc:spChg chg="mod">
-          <ac:chgData name="Xin Luo" userId="82312ee5779919a4" providerId="LiveId" clId="{F5C2D48E-4392-624B-B7FE-4C89A1D87AB0}" dt="2025-05-25T05:40:22.643" v="280" actId="20577"/>
-          <ac:spMkLst>
-            <pc:docMk/>
-            <pc:sldMk cId="1576120367" sldId="2387"/>
-            <ac:spMk id="12" creationId="{00000000-0000-0000-0000-000000000000}"/>
-          </ac:spMkLst>
-        </pc:spChg>
-        <pc:spChg chg="mod">
-          <ac:chgData name="Xin Luo" userId="82312ee5779919a4" providerId="LiveId" clId="{F5C2D48E-4392-624B-B7FE-4C89A1D87AB0}" dt="2025-05-25T05:40:28.068" v="285" actId="20577"/>
-          <ac:spMkLst>
-            <pc:docMk/>
-            <pc:sldMk cId="1576120367" sldId="2387"/>
-            <ac:spMk id="13" creationId="{00000000-0000-0000-0000-000000000000}"/>
-          </ac:spMkLst>
-        </pc:spChg>
-        <pc:grpChg chg="add del">
-          <ac:chgData name="Xin Luo" userId="82312ee5779919a4" providerId="LiveId" clId="{F5C2D48E-4392-624B-B7FE-4C89A1D87AB0}" dt="2025-05-25T05:40:25.367" v="281" actId="478"/>
-          <ac:grpSpMkLst>
-            <pc:docMk/>
-            <pc:sldMk cId="1576120367" sldId="2387"/>
-            <ac:grpSpMk id="2" creationId="{AFCAA61D-767A-24EA-9072-7425684288BB}"/>
-          </ac:grpSpMkLst>
-        </pc:grpChg>
-        <pc:grpChg chg="mod">
-          <ac:chgData name="Xin Luo" userId="82312ee5779919a4" providerId="LiveId" clId="{F5C2D48E-4392-624B-B7FE-4C89A1D87AB0}" dt="2025-05-25T05:40:36.754" v="318" actId="1035"/>
-          <ac:grpSpMkLst>
-            <pc:docMk/>
-            <pc:sldMk cId="1576120367" sldId="2387"/>
-            <ac:grpSpMk id="3" creationId="{12ED16A1-79B8-7DB1-1CC1-250B051BAD58}"/>
-          </ac:grpSpMkLst>
-        </pc:grpChg>
-        <pc:grpChg chg="mod">
-          <ac:chgData name="Xin Luo" userId="82312ee5779919a4" providerId="LiveId" clId="{F5C2D48E-4392-624B-B7FE-4C89A1D87AB0}" dt="2025-05-25T05:40:36.754" v="318" actId="1035"/>
-          <ac:grpSpMkLst>
-            <pc:docMk/>
-            <pc:sldMk cId="1576120367" sldId="2387"/>
-            <ac:grpSpMk id="9" creationId="{84B9B8D5-4BCC-CDFF-1E13-B005060A8BDF}"/>
-          </ac:grpSpMkLst>
-        </pc:grpChg>
-      </pc:sldChg>
-      <pc:sldChg chg="modSp del mod">
-        <pc:chgData name="Xin Luo" userId="82312ee5779919a4" providerId="LiveId" clId="{F5C2D48E-4392-624B-B7FE-4C89A1D87AB0}" dt="2025-05-25T05:40:46.371" v="325" actId="2696"/>
-        <pc:sldMkLst>
-          <pc:docMk/>
-          <pc:sldMk cId="2415901206" sldId="2447"/>
-        </pc:sldMkLst>
-        <pc:spChg chg="mod">
-          <ac:chgData name="Xin Luo" userId="82312ee5779919a4" providerId="LiveId" clId="{F5C2D48E-4392-624B-B7FE-4C89A1D87AB0}" dt="2025-05-25T05:40:45.033" v="324" actId="20577"/>
-          <ac:spMkLst>
-            <pc:docMk/>
-            <pc:sldMk cId="2415901206" sldId="2447"/>
-            <ac:spMk id="7" creationId="{00000000-0000-0000-0000-000000000000}"/>
-          </ac:spMkLst>
-        </pc:spChg>
-      </pc:sldChg>
-      <pc:sldChg chg="modSp mod ord">
-        <pc:chgData name="Xin Luo" userId="82312ee5779919a4" providerId="LiveId" clId="{F5C2D48E-4392-624B-B7FE-4C89A1D87AB0}" dt="2025-05-25T05:39:46.908" v="251" actId="20578"/>
-        <pc:sldMkLst>
-          <pc:docMk/>
-          <pc:sldMk cId="481122590" sldId="2709"/>
-        </pc:sldMkLst>
-        <pc:spChg chg="mod">
-          <ac:chgData name="Xin Luo" userId="82312ee5779919a4" providerId="LiveId" clId="{F5C2D48E-4392-624B-B7FE-4C89A1D87AB0}" dt="2025-05-25T05:39:17.031" v="249" actId="20577"/>
-          <ac:spMkLst>
-            <pc:docMk/>
-            <pc:sldMk cId="481122590" sldId="2709"/>
-            <ac:spMk id="7" creationId="{00000000-0000-0000-0000-000000000000}"/>
-          </ac:spMkLst>
-        </pc:spChg>
-      </pc:sldChg>
-      <pc:sldChg chg="modSp mod ord">
-        <pc:chgData name="Xin Luo" userId="82312ee5779919a4" providerId="LiveId" clId="{F5C2D48E-4392-624B-B7FE-4C89A1D87AB0}" dt="2025-05-25T05:40:02.977" v="267" actId="20578"/>
-        <pc:sldMkLst>
-          <pc:docMk/>
-          <pc:sldMk cId="972163772" sldId="2720"/>
-        </pc:sldMkLst>
-        <pc:spChg chg="mod">
-          <ac:chgData name="Xin Luo" userId="82312ee5779919a4" providerId="LiveId" clId="{F5C2D48E-4392-624B-B7FE-4C89A1D87AB0}" dt="2025-05-25T05:39:57.191" v="266" actId="20577"/>
-          <ac:spMkLst>
-            <pc:docMk/>
-            <pc:sldMk cId="972163772" sldId="2720"/>
-            <ac:spMk id="7" creationId="{00000000-0000-0000-0000-000000000000}"/>
-          </ac:spMkLst>
-        </pc:spChg>
-      </pc:sldChg>
-      <pc:sldChg chg="modSp mod">
-        <pc:chgData name="Xin Luo" userId="82312ee5779919a4" providerId="LiveId" clId="{F5C2D48E-4392-624B-B7FE-4C89A1D87AB0}" dt="2025-05-25T05:31:59.069" v="1" actId="20577"/>
-        <pc:sldMkLst>
-          <pc:docMk/>
-          <pc:sldMk cId="2742362314" sldId="2727"/>
-        </pc:sldMkLst>
-        <pc:spChg chg="mod">
-          <ac:chgData name="Xin Luo" userId="82312ee5779919a4" providerId="LiveId" clId="{F5C2D48E-4392-624B-B7FE-4C89A1D87AB0}" dt="2025-05-25T05:31:59.069" v="1" actId="20577"/>
-          <ac:spMkLst>
-            <pc:docMk/>
-            <pc:sldMk cId="2742362314" sldId="2727"/>
-            <ac:spMk id="2" creationId="{631AADB6-C88A-D817-4683-FC087E4E240F}"/>
-          </ac:spMkLst>
-        </pc:spChg>
-      </pc:sldChg>
-      <pc:sldChg chg="modSp mod">
-        <pc:chgData name="Xin Luo" userId="82312ee5779919a4" providerId="LiveId" clId="{F5C2D48E-4392-624B-B7FE-4C89A1D87AB0}" dt="2025-05-25T05:32:02.598" v="3" actId="20577"/>
-        <pc:sldMkLst>
-          <pc:docMk/>
-          <pc:sldMk cId="3682048310" sldId="2728"/>
-        </pc:sldMkLst>
-        <pc:spChg chg="mod">
-          <ac:chgData name="Xin Luo" userId="82312ee5779919a4" providerId="LiveId" clId="{F5C2D48E-4392-624B-B7FE-4C89A1D87AB0}" dt="2025-05-25T05:32:02.598" v="3" actId="20577"/>
-          <ac:spMkLst>
-            <pc:docMk/>
-            <pc:sldMk cId="3682048310" sldId="2728"/>
-            <ac:spMk id="2" creationId="{631AADB6-C88A-D817-4683-FC087E4E240F}"/>
-          </ac:spMkLst>
-        </pc:spChg>
-      </pc:sldChg>
-      <pc:sldChg chg="modSp mod">
-        <pc:chgData name="Xin Luo" userId="82312ee5779919a4" providerId="LiveId" clId="{F5C2D48E-4392-624B-B7FE-4C89A1D87AB0}" dt="2025-05-25T05:32:05.645" v="5" actId="20577"/>
-        <pc:sldMkLst>
-          <pc:docMk/>
-          <pc:sldMk cId="13868781" sldId="2732"/>
-        </pc:sldMkLst>
-        <pc:spChg chg="mod">
-          <ac:chgData name="Xin Luo" userId="82312ee5779919a4" providerId="LiveId" clId="{F5C2D48E-4392-624B-B7FE-4C89A1D87AB0}" dt="2025-05-25T05:32:05.645" v="5" actId="20577"/>
-          <ac:spMkLst>
-            <pc:docMk/>
-            <pc:sldMk cId="13868781" sldId="2732"/>
-            <ac:spMk id="2" creationId="{631AADB6-C88A-D817-4683-FC087E4E240F}"/>
-          </ac:spMkLst>
-        </pc:spChg>
-      </pc:sldChg>
-      <pc:sldChg chg="addSp delSp modSp add mod ord">
-        <pc:chgData name="Xin Luo" userId="82312ee5779919a4" providerId="LiveId" clId="{F5C2D48E-4392-624B-B7FE-4C89A1D87AB0}" dt="2025-05-25T05:40:10.491" v="269" actId="1076"/>
-        <pc:sldMkLst>
-          <pc:docMk/>
-          <pc:sldMk cId="4047407875" sldId="2761"/>
-        </pc:sldMkLst>
-        <pc:spChg chg="mod">
-          <ac:chgData name="Xin Luo" userId="82312ee5779919a4" providerId="LiveId" clId="{F5C2D48E-4392-624B-B7FE-4C89A1D87AB0}" dt="2025-05-25T05:40:10.491" v="269" actId="1076"/>
-          <ac:spMkLst>
-            <pc:docMk/>
-            <pc:sldMk cId="4047407875" sldId="2761"/>
-            <ac:spMk id="2" creationId="{93441D31-5719-59DF-5079-DB372564FAF6}"/>
-          </ac:spMkLst>
-        </pc:spChg>
-        <pc:spChg chg="mod">
-          <ac:chgData name="Xin Luo" userId="82312ee5779919a4" providerId="LiveId" clId="{F5C2D48E-4392-624B-B7FE-4C89A1D87AB0}" dt="2025-05-25T05:34:54.417" v="111" actId="20577"/>
-          <ac:spMkLst>
-            <pc:docMk/>
-            <pc:sldMk cId="4047407875" sldId="2761"/>
-            <ac:spMk id="3" creationId="{CDE205C4-818C-8150-F768-46C492E9D698}"/>
-          </ac:spMkLst>
-        </pc:spChg>
-        <pc:spChg chg="add mod">
-          <ac:chgData name="Xin Luo" userId="82312ee5779919a4" providerId="LiveId" clId="{F5C2D48E-4392-624B-B7FE-4C89A1D87AB0}" dt="2025-05-25T05:38:56.904" v="233" actId="1037"/>
-          <ac:spMkLst>
-            <pc:docMk/>
-            <pc:sldMk cId="4047407875" sldId="2761"/>
-            <ac:spMk id="8" creationId="{EF94CDEC-06DA-1ABE-9B92-7AA1B1F6B9AB}"/>
-          </ac:spMkLst>
-        </pc:spChg>
-        <pc:spChg chg="add mod">
-          <ac:chgData name="Xin Luo" userId="82312ee5779919a4" providerId="LiveId" clId="{F5C2D48E-4392-624B-B7FE-4C89A1D87AB0}" dt="2025-05-25T05:38:56.904" v="233" actId="1037"/>
-          <ac:spMkLst>
-            <pc:docMk/>
-            <pc:sldMk cId="4047407875" sldId="2761"/>
-            <ac:spMk id="11" creationId="{098F771B-E95E-E79F-A2C2-729DC0F76100}"/>
-          </ac:spMkLst>
-        </pc:spChg>
-        <pc:spChg chg="add mod">
-          <ac:chgData name="Xin Luo" userId="82312ee5779919a4" providerId="LiveId" clId="{F5C2D48E-4392-624B-B7FE-4C89A1D87AB0}" dt="2025-05-25T05:38:56.904" v="233" actId="1037"/>
-          <ac:spMkLst>
-            <pc:docMk/>
-            <pc:sldMk cId="4047407875" sldId="2761"/>
-            <ac:spMk id="12" creationId="{99C9FA85-CCD6-88DE-BFDF-43EECE15CDE3}"/>
-          </ac:spMkLst>
-        </pc:spChg>
-        <pc:spChg chg="add mod">
-          <ac:chgData name="Xin Luo" userId="82312ee5779919a4" providerId="LiveId" clId="{F5C2D48E-4392-624B-B7FE-4C89A1D87AB0}" dt="2025-05-25T05:38:59.554" v="239" actId="1037"/>
-          <ac:spMkLst>
-            <pc:docMk/>
-            <pc:sldMk cId="4047407875" sldId="2761"/>
-            <ac:spMk id="14" creationId="{6963E5F3-0A76-4F1D-FB75-B57AFA8785DE}"/>
-          </ac:spMkLst>
-        </pc:spChg>
-        <pc:spChg chg="add mod">
-          <ac:chgData name="Xin Luo" userId="82312ee5779919a4" providerId="LiveId" clId="{F5C2D48E-4392-624B-B7FE-4C89A1D87AB0}" dt="2025-05-25T05:38:59.554" v="239" actId="1037"/>
-          <ac:spMkLst>
-            <pc:docMk/>
-            <pc:sldMk cId="4047407875" sldId="2761"/>
-            <ac:spMk id="15" creationId="{EE74E830-8282-7D1B-33CE-BBC5ED3E3776}"/>
-          </ac:spMkLst>
-        </pc:spChg>
-        <pc:spChg chg="add mod">
-          <ac:chgData name="Xin Luo" userId="82312ee5779919a4" providerId="LiveId" clId="{F5C2D48E-4392-624B-B7FE-4C89A1D87AB0}" dt="2025-05-25T05:38:59.554" v="239" actId="1037"/>
-          <ac:spMkLst>
-            <pc:docMk/>
-            <pc:sldMk cId="4047407875" sldId="2761"/>
-            <ac:spMk id="16" creationId="{58CB4E39-2825-73DB-4F80-6518513FC1C2}"/>
-          </ac:spMkLst>
-        </pc:spChg>
-        <pc:spChg chg="add mod">
-          <ac:chgData name="Xin Luo" userId="82312ee5779919a4" providerId="LiveId" clId="{F5C2D48E-4392-624B-B7FE-4C89A1D87AB0}" dt="2025-05-25T05:37:50.568" v="193" actId="1076"/>
-          <ac:spMkLst>
-            <pc:docMk/>
-            <pc:sldMk cId="4047407875" sldId="2761"/>
-            <ac:spMk id="17" creationId="{8732244A-53EE-AB77-19E6-2799E1F0E168}"/>
-          </ac:spMkLst>
-        </pc:spChg>
-        <pc:spChg chg="add mod">
-          <ac:chgData name="Xin Luo" userId="82312ee5779919a4" providerId="LiveId" clId="{F5C2D48E-4392-624B-B7FE-4C89A1D87AB0}" dt="2025-05-25T05:37:50.568" v="193" actId="1076"/>
-          <ac:spMkLst>
-            <pc:docMk/>
-            <pc:sldMk cId="4047407875" sldId="2761"/>
-            <ac:spMk id="18" creationId="{1D730D1A-B74A-5DE3-98ED-62E90A6B14C2}"/>
-          </ac:spMkLst>
-        </pc:spChg>
-        <pc:spChg chg="add mod">
-          <ac:chgData name="Xin Luo" userId="82312ee5779919a4" providerId="LiveId" clId="{F5C2D48E-4392-624B-B7FE-4C89A1D87AB0}" dt="2025-05-25T05:37:50.568" v="193" actId="1076"/>
-          <ac:spMkLst>
-            <pc:docMk/>
-            <pc:sldMk cId="4047407875" sldId="2761"/>
-            <ac:spMk id="19" creationId="{75AE055E-0F2D-2C5F-E37C-B238B4F4695B}"/>
-          </ac:spMkLst>
-        </pc:spChg>
-        <pc:grpChg chg="del">
-          <ac:chgData name="Xin Luo" userId="82312ee5779919a4" providerId="LiveId" clId="{F5C2D48E-4392-624B-B7FE-4C89A1D87AB0}" dt="2025-05-25T05:34:58.964" v="112" actId="478"/>
-          <ac:grpSpMkLst>
-            <pc:docMk/>
-            <pc:sldMk cId="4047407875" sldId="2761"/>
-            <ac:grpSpMk id="69" creationId="{57269F70-BEF7-36B2-C7F3-57DD256065C3}"/>
-          </ac:grpSpMkLst>
-        </pc:grpChg>
-        <pc:cxnChg chg="mod">
-          <ac:chgData name="Xin Luo" userId="82312ee5779919a4" providerId="LiveId" clId="{F5C2D48E-4392-624B-B7FE-4C89A1D87AB0}" dt="2025-05-25T05:34:58.964" v="112" actId="478"/>
-          <ac:cxnSpMkLst>
-            <pc:docMk/>
-            <pc:sldMk cId="4047407875" sldId="2761"/>
-            <ac:cxnSpMk id="9" creationId="{3B1317D9-899E-A571-12E1-EDB38D4E1037}"/>
-          </ac:cxnSpMkLst>
-        </pc:cxnChg>
-        <pc:cxnChg chg="mod">
-          <ac:chgData name="Xin Luo" userId="82312ee5779919a4" providerId="LiveId" clId="{F5C2D48E-4392-624B-B7FE-4C89A1D87AB0}" dt="2025-05-25T05:34:58.964" v="112" actId="478"/>
-          <ac:cxnSpMkLst>
-            <pc:docMk/>
-            <pc:sldMk cId="4047407875" sldId="2761"/>
-            <ac:cxnSpMk id="10" creationId="{7E706F97-8498-CEE6-29F8-01B5DAC0D935}"/>
-          </ac:cxnSpMkLst>
-        </pc:cxnChg>
-        <pc:cxnChg chg="mod">
-          <ac:chgData name="Xin Luo" userId="82312ee5779919a4" providerId="LiveId" clId="{F5C2D48E-4392-624B-B7FE-4C89A1D87AB0}" dt="2025-05-25T05:34:58.964" v="112" actId="478"/>
-          <ac:cxnSpMkLst>
-            <pc:docMk/>
-            <pc:sldMk cId="4047407875" sldId="2761"/>
-            <ac:cxnSpMk id="13" creationId="{5E491273-C2D9-21F8-71D4-C27899B78F2F}"/>
-          </ac:cxnSpMkLst>
-        </pc:cxnChg>
-        <pc:cxnChg chg="add mod">
-          <ac:chgData name="Xin Luo" userId="82312ee5779919a4" providerId="LiveId" clId="{F5C2D48E-4392-624B-B7FE-4C89A1D87AB0}" dt="2025-05-25T05:38:56.904" v="233" actId="1037"/>
-          <ac:cxnSpMkLst>
-            <pc:docMk/>
-            <pc:sldMk cId="4047407875" sldId="2761"/>
-            <ac:cxnSpMk id="21" creationId="{628E76A6-A10A-5E61-6172-E71C88C38219}"/>
-          </ac:cxnSpMkLst>
-        </pc:cxnChg>
-        <pc:cxnChg chg="add mod">
-          <ac:chgData name="Xin Luo" userId="82312ee5779919a4" providerId="LiveId" clId="{F5C2D48E-4392-624B-B7FE-4C89A1D87AB0}" dt="2025-05-25T05:38:56.904" v="233" actId="1037"/>
-          <ac:cxnSpMkLst>
-            <pc:docMk/>
-            <pc:sldMk cId="4047407875" sldId="2761"/>
-            <ac:cxnSpMk id="22" creationId="{57C08D9C-AADC-42F6-6126-E5DCAEAF78F4}"/>
-          </ac:cxnSpMkLst>
-        </pc:cxnChg>
-        <pc:cxnChg chg="add mod">
-          <ac:chgData name="Xin Luo" userId="82312ee5779919a4" providerId="LiveId" clId="{F5C2D48E-4392-624B-B7FE-4C89A1D87AB0}" dt="2025-05-25T05:38:59.554" v="239" actId="1037"/>
-          <ac:cxnSpMkLst>
-            <pc:docMk/>
-            <pc:sldMk cId="4047407875" sldId="2761"/>
-            <ac:cxnSpMk id="25" creationId="{EF916940-2FD7-56B6-C229-8EACE57184DE}"/>
-          </ac:cxnSpMkLst>
-        </pc:cxnChg>
-        <pc:cxnChg chg="mod">
-          <ac:chgData name="Xin Luo" userId="82312ee5779919a4" providerId="LiveId" clId="{F5C2D48E-4392-624B-B7FE-4C89A1D87AB0}" dt="2025-05-25T05:34:58.964" v="112" actId="478"/>
-          <ac:cxnSpMkLst>
-            <pc:docMk/>
-            <pc:sldMk cId="4047407875" sldId="2761"/>
-            <ac:cxnSpMk id="26" creationId="{DD816219-89EB-4711-B9DA-00F56A10637A}"/>
-          </ac:cxnSpMkLst>
-        </pc:cxnChg>
-        <pc:cxnChg chg="add mod">
-          <ac:chgData name="Xin Luo" userId="82312ee5779919a4" providerId="LiveId" clId="{F5C2D48E-4392-624B-B7FE-4C89A1D87AB0}" dt="2025-05-25T05:38:59.554" v="239" actId="1037"/>
-          <ac:cxnSpMkLst>
-            <pc:docMk/>
-            <pc:sldMk cId="4047407875" sldId="2761"/>
-            <ac:cxnSpMk id="30" creationId="{6DD26FCC-49C5-D57D-6C56-DC036AA2B373}"/>
-          </ac:cxnSpMkLst>
-        </pc:cxnChg>
-        <pc:cxnChg chg="mod">
-          <ac:chgData name="Xin Luo" userId="82312ee5779919a4" providerId="LiveId" clId="{F5C2D48E-4392-624B-B7FE-4C89A1D87AB0}" dt="2025-05-25T05:34:58.964" v="112" actId="478"/>
-          <ac:cxnSpMkLst>
-            <pc:docMk/>
-            <pc:sldMk cId="4047407875" sldId="2761"/>
-            <ac:cxnSpMk id="33" creationId="{C50355C1-6C4E-F9DC-075E-BCEB9DFA4610}"/>
-          </ac:cxnSpMkLst>
-        </pc:cxnChg>
-        <pc:cxnChg chg="add mod">
-          <ac:chgData name="Xin Luo" userId="82312ee5779919a4" providerId="LiveId" clId="{F5C2D48E-4392-624B-B7FE-4C89A1D87AB0}" dt="2025-05-25T05:38:18.897" v="198" actId="208"/>
-          <ac:cxnSpMkLst>
-            <pc:docMk/>
-            <pc:sldMk cId="4047407875" sldId="2761"/>
-            <ac:cxnSpMk id="37" creationId="{E179FCB4-F757-9E55-9A7F-E9A5752B8297}"/>
-          </ac:cxnSpMkLst>
-        </pc:cxnChg>
-        <pc:cxnChg chg="mod">
-          <ac:chgData name="Xin Luo" userId="82312ee5779919a4" providerId="LiveId" clId="{F5C2D48E-4392-624B-B7FE-4C89A1D87AB0}" dt="2025-05-25T05:34:58.964" v="112" actId="478"/>
-          <ac:cxnSpMkLst>
-            <pc:docMk/>
-            <pc:sldMk cId="4047407875" sldId="2761"/>
-            <ac:cxnSpMk id="40" creationId="{984E1D2C-B9A5-1280-B406-86A49B26EFAE}"/>
-          </ac:cxnSpMkLst>
-        </pc:cxnChg>
-        <pc:cxnChg chg="add mod">
-          <ac:chgData name="Xin Luo" userId="82312ee5779919a4" providerId="LiveId" clId="{F5C2D48E-4392-624B-B7FE-4C89A1D87AB0}" dt="2025-05-25T05:38:18.897" v="198" actId="208"/>
-          <ac:cxnSpMkLst>
-            <pc:docMk/>
-            <pc:sldMk cId="4047407875" sldId="2761"/>
-            <ac:cxnSpMk id="42" creationId="{5DC430BC-294B-9AF2-EF66-3FCCDC6D1C66}"/>
-          </ac:cxnSpMkLst>
-        </pc:cxnChg>
-        <pc:cxnChg chg="add mod">
-          <ac:chgData name="Xin Luo" userId="82312ee5779919a4" providerId="LiveId" clId="{F5C2D48E-4392-624B-B7FE-4C89A1D87AB0}" dt="2025-05-25T05:38:23.161" v="199" actId="14100"/>
-          <ac:cxnSpMkLst>
-            <pc:docMk/>
-            <pc:sldMk cId="4047407875" sldId="2761"/>
-            <ac:cxnSpMk id="46" creationId="{9A62E57C-ABC3-F35D-9A10-6B2765C9F7C1}"/>
-          </ac:cxnSpMkLst>
-        </pc:cxnChg>
-      </pc:sldChg>
-      <pc:sldChg chg="addSp delSp modSp add mod">
-        <pc:chgData name="Xin Luo" userId="82312ee5779919a4" providerId="LiveId" clId="{F5C2D48E-4392-624B-B7FE-4C89A1D87AB0}" dt="2025-05-25T09:24:36.148" v="1307" actId="1076"/>
-        <pc:sldMkLst>
-          <pc:docMk/>
-          <pc:sldMk cId="3693262253" sldId="2762"/>
-        </pc:sldMkLst>
-        <pc:spChg chg="mod">
-          <ac:chgData name="Xin Luo" userId="82312ee5779919a4" providerId="LiveId" clId="{F5C2D48E-4392-624B-B7FE-4C89A1D87AB0}" dt="2025-05-25T09:23:34.106" v="1280" actId="14100"/>
-          <ac:spMkLst>
-            <pc:docMk/>
-            <pc:sldMk cId="3693262253" sldId="2762"/>
-            <ac:spMk id="2" creationId="{41CCF177-61DC-54A7-A2FB-DF1876DFA561}"/>
-          </ac:spMkLst>
-        </pc:spChg>
-        <pc:spChg chg="mod">
-          <ac:chgData name="Xin Luo" userId="82312ee5779919a4" providerId="LiveId" clId="{F5C2D48E-4392-624B-B7FE-4C89A1D87AB0}" dt="2025-05-25T05:58:20.537" v="634" actId="20577"/>
-          <ac:spMkLst>
-            <pc:docMk/>
-            <pc:sldMk cId="3693262253" sldId="2762"/>
-            <ac:spMk id="3" creationId="{C1F01A01-DCA0-E182-0057-8C4F1C2D5E07}"/>
-          </ac:spMkLst>
-        </pc:spChg>
-        <pc:spChg chg="add mod">
-          <ac:chgData name="Xin Luo" userId="82312ee5779919a4" providerId="LiveId" clId="{F5C2D48E-4392-624B-B7FE-4C89A1D87AB0}" dt="2025-05-25T09:24:28.705" v="1305" actId="1076"/>
-          <ac:spMkLst>
-            <pc:docMk/>
-            <pc:sldMk cId="3693262253" sldId="2762"/>
-            <ac:spMk id="14" creationId="{29F8F2CC-7778-CD15-760C-27DFEB546C64}"/>
-          </ac:spMkLst>
-        </pc:spChg>
-        <pc:spChg chg="add del mod">
-          <ac:chgData name="Xin Luo" userId="82312ee5779919a4" providerId="LiveId" clId="{F5C2D48E-4392-624B-B7FE-4C89A1D87AB0}" dt="2025-05-25T09:23:00.558" v="1273" actId="478"/>
-          <ac:spMkLst>
-            <pc:docMk/>
-            <pc:sldMk cId="3693262253" sldId="2762"/>
-            <ac:spMk id="17" creationId="{8E6FEEB5-06F8-83BD-9B78-581329E65DDD}"/>
-          </ac:spMkLst>
-        </pc:spChg>
-        <pc:spChg chg="add del mod">
-          <ac:chgData name="Xin Luo" userId="82312ee5779919a4" providerId="LiveId" clId="{F5C2D48E-4392-624B-B7FE-4C89A1D87AB0}" dt="2025-05-25T09:23:00.558" v="1273" actId="478"/>
-          <ac:spMkLst>
-            <pc:docMk/>
-            <pc:sldMk cId="3693262253" sldId="2762"/>
-            <ac:spMk id="23" creationId="{2DB6CB38-3D67-E21B-E29C-C639D11C2184}"/>
-          </ac:spMkLst>
-        </pc:spChg>
-        <pc:spChg chg="add mod">
-          <ac:chgData name="Xin Luo" userId="82312ee5779919a4" providerId="LiveId" clId="{F5C2D48E-4392-624B-B7FE-4C89A1D87AB0}" dt="2025-05-25T09:24:36.148" v="1307" actId="1076"/>
-          <ac:spMkLst>
-            <pc:docMk/>
-            <pc:sldMk cId="3693262253" sldId="2762"/>
-            <ac:spMk id="24" creationId="{1D8EF0F3-02B3-29AB-512E-2547DBD29A10}"/>
-          </ac:spMkLst>
-        </pc:spChg>
-        <pc:spChg chg="add del mod">
-          <ac:chgData name="Xin Luo" userId="82312ee5779919a4" providerId="LiveId" clId="{F5C2D48E-4392-624B-B7FE-4C89A1D87AB0}" dt="2025-05-25T09:24:22.188" v="1304"/>
-          <ac:spMkLst>
-            <pc:docMk/>
-            <pc:sldMk cId="3693262253" sldId="2762"/>
-            <ac:spMk id="27" creationId="{A27758D4-2C22-AAE6-1F2E-E4867841D6CF}"/>
-          </ac:spMkLst>
-        </pc:spChg>
-        <pc:grpChg chg="del">
-          <ac:chgData name="Xin Luo" userId="82312ee5779919a4" providerId="LiveId" clId="{F5C2D48E-4392-624B-B7FE-4C89A1D87AB0}" dt="2025-05-25T05:57:55.760" v="588" actId="478"/>
-          <ac:grpSpMkLst>
-            <pc:docMk/>
-            <pc:sldMk cId="3693262253" sldId="2762"/>
-            <ac:grpSpMk id="69" creationId="{F6C99862-DEB1-4A13-21EB-41BA04952043}"/>
-          </ac:grpSpMkLst>
-        </pc:grpChg>
-        <pc:picChg chg="add mod">
-          <ac:chgData name="Xin Luo" userId="82312ee5779919a4" providerId="LiveId" clId="{F5C2D48E-4392-624B-B7FE-4C89A1D87AB0}" dt="2025-05-25T05:59:08.055" v="666" actId="27614"/>
-          <ac:picMkLst>
-            <pc:docMk/>
-            <pc:sldMk cId="3693262253" sldId="2762"/>
-            <ac:picMk id="11" creationId="{715330CE-A75C-9E94-2DC2-1AD026ACBE74}"/>
-          </ac:picMkLst>
-        </pc:picChg>
-        <pc:picChg chg="add mod">
-          <ac:chgData name="Xin Luo" userId="82312ee5779919a4" providerId="LiveId" clId="{F5C2D48E-4392-624B-B7FE-4C89A1D87AB0}" dt="2025-05-25T09:24:28.705" v="1305" actId="1076"/>
-          <ac:picMkLst>
-            <pc:docMk/>
-            <pc:sldMk cId="3693262253" sldId="2762"/>
-            <ac:picMk id="16" creationId="{6106BD67-7CB1-E8E7-9BA6-334F58FC7E5C}"/>
-          </ac:picMkLst>
-        </pc:picChg>
-        <pc:picChg chg="add del mod">
-          <ac:chgData name="Xin Luo" userId="82312ee5779919a4" providerId="LiveId" clId="{F5C2D48E-4392-624B-B7FE-4C89A1D87AB0}" dt="2025-05-25T09:23:00.558" v="1273" actId="478"/>
-          <ac:picMkLst>
-            <pc:docMk/>
-            <pc:sldMk cId="3693262253" sldId="2762"/>
-            <ac:picMk id="19" creationId="{98E83181-2E1A-34E4-770D-814A347AD434}"/>
-          </ac:picMkLst>
-        </pc:picChg>
-        <pc:picChg chg="add del mod">
-          <ac:chgData name="Xin Luo" userId="82312ee5779919a4" providerId="LiveId" clId="{F5C2D48E-4392-624B-B7FE-4C89A1D87AB0}" dt="2025-05-25T09:23:00.558" v="1273" actId="478"/>
-          <ac:picMkLst>
-            <pc:docMk/>
-            <pc:sldMk cId="3693262253" sldId="2762"/>
-            <ac:picMk id="21" creationId="{76A5142D-F51F-9ED0-6904-3440256B140E}"/>
-          </ac:picMkLst>
-        </pc:picChg>
-        <pc:cxnChg chg="mod">
-          <ac:chgData name="Xin Luo" userId="82312ee5779919a4" providerId="LiveId" clId="{F5C2D48E-4392-624B-B7FE-4C89A1D87AB0}" dt="2025-05-25T05:57:55.760" v="588" actId="478"/>
-          <ac:cxnSpMkLst>
-            <pc:docMk/>
-            <pc:sldMk cId="3693262253" sldId="2762"/>
-            <ac:cxnSpMk id="9" creationId="{7073D247-F283-7200-CFD7-268D3D1C7FF4}"/>
-          </ac:cxnSpMkLst>
-        </pc:cxnChg>
-        <pc:cxnChg chg="mod">
-          <ac:chgData name="Xin Luo" userId="82312ee5779919a4" providerId="LiveId" clId="{F5C2D48E-4392-624B-B7FE-4C89A1D87AB0}" dt="2025-05-25T05:57:55.760" v="588" actId="478"/>
-          <ac:cxnSpMkLst>
-            <pc:docMk/>
-            <pc:sldMk cId="3693262253" sldId="2762"/>
-            <ac:cxnSpMk id="10" creationId="{A8CD8015-224B-E835-A6E4-EC0B539D82B9}"/>
-          </ac:cxnSpMkLst>
-        </pc:cxnChg>
-        <pc:cxnChg chg="mod">
-          <ac:chgData name="Xin Luo" userId="82312ee5779919a4" providerId="LiveId" clId="{F5C2D48E-4392-624B-B7FE-4C89A1D87AB0}" dt="2025-05-25T05:57:55.760" v="588" actId="478"/>
-          <ac:cxnSpMkLst>
-            <pc:docMk/>
-            <pc:sldMk cId="3693262253" sldId="2762"/>
-            <ac:cxnSpMk id="13" creationId="{EA13A35D-9D03-28DB-1CE4-B215DDF6B08C}"/>
-          </ac:cxnSpMkLst>
-        </pc:cxnChg>
-        <pc:cxnChg chg="mod">
-          <ac:chgData name="Xin Luo" userId="82312ee5779919a4" providerId="LiveId" clId="{F5C2D48E-4392-624B-B7FE-4C89A1D87AB0}" dt="2025-05-25T05:57:55.760" v="588" actId="478"/>
-          <ac:cxnSpMkLst>
-            <pc:docMk/>
-            <pc:sldMk cId="3693262253" sldId="2762"/>
-            <ac:cxnSpMk id="26" creationId="{68BEF567-B515-0060-B597-785E6F7A9FBD}"/>
-          </ac:cxnSpMkLst>
-        </pc:cxnChg>
-        <pc:cxnChg chg="mod">
-          <ac:chgData name="Xin Luo" userId="82312ee5779919a4" providerId="LiveId" clId="{F5C2D48E-4392-624B-B7FE-4C89A1D87AB0}" dt="2025-05-25T05:57:55.760" v="588" actId="478"/>
-          <ac:cxnSpMkLst>
-            <pc:docMk/>
-            <pc:sldMk cId="3693262253" sldId="2762"/>
-            <ac:cxnSpMk id="33" creationId="{EA96489D-D1D8-FB9A-7AB2-D49CDFBF1ADA}"/>
-          </ac:cxnSpMkLst>
-        </pc:cxnChg>
-        <pc:cxnChg chg="mod">
-          <ac:chgData name="Xin Luo" userId="82312ee5779919a4" providerId="LiveId" clId="{F5C2D48E-4392-624B-B7FE-4C89A1D87AB0}" dt="2025-05-25T05:57:55.760" v="588" actId="478"/>
-          <ac:cxnSpMkLst>
-            <pc:docMk/>
-            <pc:sldMk cId="3693262253" sldId="2762"/>
-            <ac:cxnSpMk id="40" creationId="{D226F121-AC0F-7635-93D0-C18636190507}"/>
-          </ac:cxnSpMkLst>
-        </pc:cxnChg>
-      </pc:sldChg>
-      <pc:sldChg chg="addSp delSp modSp add mod">
-        <pc:chgData name="Xin Luo" userId="82312ee5779919a4" providerId="LiveId" clId="{F5C2D48E-4392-624B-B7FE-4C89A1D87AB0}" dt="2025-05-25T09:01:05.683" v="1204" actId="20577"/>
-        <pc:sldMkLst>
-          <pc:docMk/>
-          <pc:sldMk cId="723835855" sldId="2763"/>
-        </pc:sldMkLst>
-        <pc:spChg chg="mod">
-          <ac:chgData name="Xin Luo" userId="82312ee5779919a4" providerId="LiveId" clId="{F5C2D48E-4392-624B-B7FE-4C89A1D87AB0}" dt="2025-05-25T09:01:05.683" v="1204" actId="20577"/>
-          <ac:spMkLst>
-            <pc:docMk/>
-            <pc:sldMk cId="723835855" sldId="2763"/>
-            <ac:spMk id="2" creationId="{C0FB9C93-210B-6ECD-FB6C-9E33E3F06F39}"/>
-          </ac:spMkLst>
-        </pc:spChg>
-        <pc:spChg chg="add del mod">
-          <ac:chgData name="Xin Luo" userId="82312ee5779919a4" providerId="LiveId" clId="{F5C2D48E-4392-624B-B7FE-4C89A1D87AB0}" dt="2025-05-25T05:42:01.693" v="332" actId="478"/>
-          <ac:spMkLst>
-            <pc:docMk/>
-            <pc:sldMk cId="723835855" sldId="2763"/>
-            <ac:spMk id="11" creationId="{4CCAB81E-9323-959D-D59C-516035883A3B}"/>
-          </ac:spMkLst>
-        </pc:spChg>
-        <pc:grpChg chg="del">
-          <ac:chgData name="Xin Luo" userId="82312ee5779919a4" providerId="LiveId" clId="{F5C2D48E-4392-624B-B7FE-4C89A1D87AB0}" dt="2025-05-25T05:40:54.968" v="327" actId="478"/>
-          <ac:grpSpMkLst>
-            <pc:docMk/>
-            <pc:sldMk cId="723835855" sldId="2763"/>
-            <ac:grpSpMk id="69" creationId="{6F66EF5A-E9F0-F3C3-9E86-68975D6A095C}"/>
-          </ac:grpSpMkLst>
-        </pc:grpChg>
-        <pc:cxnChg chg="mod">
-          <ac:chgData name="Xin Luo" userId="82312ee5779919a4" providerId="LiveId" clId="{F5C2D48E-4392-624B-B7FE-4C89A1D87AB0}" dt="2025-05-25T05:40:54.968" v="327" actId="478"/>
-          <ac:cxnSpMkLst>
-            <pc:docMk/>
-            <pc:sldMk cId="723835855" sldId="2763"/>
-            <ac:cxnSpMk id="9" creationId="{A14A05A1-59C4-9C3B-6DB4-C6C94257ACD5}"/>
-          </ac:cxnSpMkLst>
-        </pc:cxnChg>
-        <pc:cxnChg chg="mod">
-          <ac:chgData name="Xin Luo" userId="82312ee5779919a4" providerId="LiveId" clId="{F5C2D48E-4392-624B-B7FE-4C89A1D87AB0}" dt="2025-05-25T05:40:54.968" v="327" actId="478"/>
-          <ac:cxnSpMkLst>
-            <pc:docMk/>
-            <pc:sldMk cId="723835855" sldId="2763"/>
-            <ac:cxnSpMk id="10" creationId="{4073F309-ECB9-6247-347D-1F101EE97C60}"/>
-          </ac:cxnSpMkLst>
-        </pc:cxnChg>
-        <pc:cxnChg chg="mod">
-          <ac:chgData name="Xin Luo" userId="82312ee5779919a4" providerId="LiveId" clId="{F5C2D48E-4392-624B-B7FE-4C89A1D87AB0}" dt="2025-05-25T05:40:54.968" v="327" actId="478"/>
-          <ac:cxnSpMkLst>
-            <pc:docMk/>
-            <pc:sldMk cId="723835855" sldId="2763"/>
-            <ac:cxnSpMk id="13" creationId="{EAEDBF41-C9D1-9114-73A8-E29926411CE1}"/>
-          </ac:cxnSpMkLst>
-        </pc:cxnChg>
-        <pc:cxnChg chg="mod">
-          <ac:chgData name="Xin Luo" userId="82312ee5779919a4" providerId="LiveId" clId="{F5C2D48E-4392-624B-B7FE-4C89A1D87AB0}" dt="2025-05-25T05:40:54.968" v="327" actId="478"/>
-          <ac:cxnSpMkLst>
-            <pc:docMk/>
-            <pc:sldMk cId="723835855" sldId="2763"/>
-            <ac:cxnSpMk id="26" creationId="{1F8E6313-1906-96B8-31D7-B95776B5BAE5}"/>
-          </ac:cxnSpMkLst>
-        </pc:cxnChg>
-        <pc:cxnChg chg="mod">
-          <ac:chgData name="Xin Luo" userId="82312ee5779919a4" providerId="LiveId" clId="{F5C2D48E-4392-624B-B7FE-4C89A1D87AB0}" dt="2025-05-25T05:40:54.968" v="327" actId="478"/>
-          <ac:cxnSpMkLst>
-            <pc:docMk/>
-            <pc:sldMk cId="723835855" sldId="2763"/>
-            <ac:cxnSpMk id="33" creationId="{206F96FC-BBD5-BB36-C849-C1EA1BB3D724}"/>
-          </ac:cxnSpMkLst>
-        </pc:cxnChg>
-        <pc:cxnChg chg="mod">
-          <ac:chgData name="Xin Luo" userId="82312ee5779919a4" providerId="LiveId" clId="{F5C2D48E-4392-624B-B7FE-4C89A1D87AB0}" dt="2025-05-25T05:40:54.968" v="327" actId="478"/>
-          <ac:cxnSpMkLst>
-            <pc:docMk/>
-            <pc:sldMk cId="723835855" sldId="2763"/>
-            <ac:cxnSpMk id="40" creationId="{C49C1B19-98C3-7E7A-66CE-CBFD7A64F2F9}"/>
-          </ac:cxnSpMkLst>
-        </pc:cxnChg>
-      </pc:sldChg>
-      <pc:sldChg chg="addSp modSp add mod">
-        <pc:chgData name="Xin Luo" userId="82312ee5779919a4" providerId="LiveId" clId="{F5C2D48E-4392-624B-B7FE-4C89A1D87AB0}" dt="2025-05-25T09:37:25.692" v="1619" actId="1076"/>
-        <pc:sldMkLst>
-          <pc:docMk/>
-          <pc:sldMk cId="79226244" sldId="2764"/>
-        </pc:sldMkLst>
-        <pc:spChg chg="mod">
-          <ac:chgData name="Xin Luo" userId="82312ee5779919a4" providerId="LiveId" clId="{F5C2D48E-4392-624B-B7FE-4C89A1D87AB0}" dt="2025-05-25T09:02:12.408" v="1212" actId="21"/>
-          <ac:spMkLst>
-            <pc:docMk/>
-            <pc:sldMk cId="79226244" sldId="2764"/>
-            <ac:spMk id="2" creationId="{26E7FE04-ED10-AD28-7E79-0FFF219A8228}"/>
-          </ac:spMkLst>
-        </pc:spChg>
-        <pc:spChg chg="add mod">
-          <ac:chgData name="Xin Luo" userId="82312ee5779919a4" providerId="LiveId" clId="{F5C2D48E-4392-624B-B7FE-4C89A1D87AB0}" dt="2025-05-25T09:20:44.835" v="1250" actId="1076"/>
-          <ac:spMkLst>
-            <pc:docMk/>
-            <pc:sldMk cId="79226244" sldId="2764"/>
-            <ac:spMk id="8" creationId="{CE50B879-C39F-CE80-A983-BB2720366799}"/>
-          </ac:spMkLst>
-        </pc:spChg>
-        <pc:spChg chg="add mod">
-          <ac:chgData name="Xin Luo" userId="82312ee5779919a4" providerId="LiveId" clId="{F5C2D48E-4392-624B-B7FE-4C89A1D87AB0}" dt="2025-05-25T09:20:44.835" v="1250" actId="1076"/>
-          <ac:spMkLst>
-            <pc:docMk/>
-            <pc:sldMk cId="79226244" sldId="2764"/>
-            <ac:spMk id="9" creationId="{D18F394F-DDD4-6C97-0D0E-1D1DB3DD3A5B}"/>
-          </ac:spMkLst>
-        </pc:spChg>
-        <pc:spChg chg="add mod">
-          <ac:chgData name="Xin Luo" userId="82312ee5779919a4" providerId="LiveId" clId="{F5C2D48E-4392-624B-B7FE-4C89A1D87AB0}" dt="2025-05-25T09:21:04.675" v="1270" actId="14100"/>
-          <ac:spMkLst>
-            <pc:docMk/>
-            <pc:sldMk cId="79226244" sldId="2764"/>
-            <ac:spMk id="13" creationId="{0AB4425C-04AB-C511-10CB-7F7F2F90872F}"/>
-          </ac:spMkLst>
-        </pc:spChg>
-        <pc:spChg chg="add mod">
-          <ac:chgData name="Xin Luo" userId="82312ee5779919a4" providerId="LiveId" clId="{F5C2D48E-4392-624B-B7FE-4C89A1D87AB0}" dt="2025-05-25T09:19:54.894" v="1237" actId="14100"/>
-          <ac:spMkLst>
-            <pc:docMk/>
-            <pc:sldMk cId="79226244" sldId="2764"/>
-            <ac:spMk id="14" creationId="{383AE1B9-F195-4055-AF97-5F7058ABCEE5}"/>
-          </ac:spMkLst>
-        </pc:spChg>
-        <pc:spChg chg="add mod">
-          <ac:chgData name="Xin Luo" userId="82312ee5779919a4" providerId="LiveId" clId="{F5C2D48E-4392-624B-B7FE-4C89A1D87AB0}" dt="2025-05-25T09:20:10.815" v="1247" actId="20577"/>
-          <ac:spMkLst>
-            <pc:docMk/>
-            <pc:sldMk cId="79226244" sldId="2764"/>
-            <ac:spMk id="15" creationId="{5D43ABD5-5B57-8113-B38D-657948375C6F}"/>
-          </ac:spMkLst>
-        </pc:spChg>
-        <pc:spChg chg="add mod">
-          <ac:chgData name="Xin Luo" userId="82312ee5779919a4" providerId="LiveId" clId="{F5C2D48E-4392-624B-B7FE-4C89A1D87AB0}" dt="2025-05-25T09:37:17.756" v="1618" actId="1035"/>
-          <ac:spMkLst>
-            <pc:docMk/>
-            <pc:sldMk cId="79226244" sldId="2764"/>
-            <ac:spMk id="19" creationId="{F40432DF-FE1A-2F7C-86AB-8E010D261FE4}"/>
-          </ac:spMkLst>
-        </pc:spChg>
-        <pc:picChg chg="add mod">
-          <ac:chgData name="Xin Luo" userId="82312ee5779919a4" providerId="LiveId" clId="{F5C2D48E-4392-624B-B7FE-4C89A1D87AB0}" dt="2025-05-25T09:20:44.835" v="1250" actId="1076"/>
-          <ac:picMkLst>
-            <pc:docMk/>
-            <pc:sldMk cId="79226244" sldId="2764"/>
-            <ac:picMk id="5" creationId="{C4B97976-EB68-DC67-5DEC-7ABF98606051}"/>
-          </ac:picMkLst>
-        </pc:picChg>
-        <pc:picChg chg="add mod">
-          <ac:chgData name="Xin Luo" userId="82312ee5779919a4" providerId="LiveId" clId="{F5C2D48E-4392-624B-B7FE-4C89A1D87AB0}" dt="2025-05-25T09:20:46.981" v="1252" actId="1076"/>
-          <ac:picMkLst>
-            <pc:docMk/>
-            <pc:sldMk cId="79226244" sldId="2764"/>
-            <ac:picMk id="7" creationId="{607894F7-E1BB-7627-C4FB-1F4608512224}"/>
-          </ac:picMkLst>
-        </pc:picChg>
-        <pc:picChg chg="add mod">
-          <ac:chgData name="Xin Luo" userId="82312ee5779919a4" providerId="LiveId" clId="{F5C2D48E-4392-624B-B7FE-4C89A1D87AB0}" dt="2025-05-25T09:37:25.692" v="1619" actId="1076"/>
-          <ac:picMkLst>
-            <pc:docMk/>
-            <pc:sldMk cId="79226244" sldId="2764"/>
-            <ac:picMk id="11" creationId="{46EB6E5A-85F0-9346-6E60-F50B6AB697A8}"/>
-          </ac:picMkLst>
-        </pc:picChg>
-        <pc:picChg chg="add mod">
-          <ac:chgData name="Xin Luo" userId="82312ee5779919a4" providerId="LiveId" clId="{F5C2D48E-4392-624B-B7FE-4C89A1D87AB0}" dt="2025-05-25T09:20:45.481" v="1251" actId="27614"/>
-          <ac:picMkLst>
-            <pc:docMk/>
-            <pc:sldMk cId="79226244" sldId="2764"/>
-            <ac:picMk id="17" creationId="{2BFD923F-620B-CC75-A34B-8043277DF373}"/>
-          </ac:picMkLst>
-        </pc:picChg>
-      </pc:sldChg>
-      <pc:sldChg chg="addSp delSp modSp add mod">
-        <pc:chgData name="Xin Luo" userId="82312ee5779919a4" providerId="LiveId" clId="{F5C2D48E-4392-624B-B7FE-4C89A1D87AB0}" dt="2025-05-25T09:21:46.610" v="1271" actId="1076"/>
-        <pc:sldMkLst>
-          <pc:docMk/>
-          <pc:sldMk cId="4051555128" sldId="2765"/>
-        </pc:sldMkLst>
-        <pc:spChg chg="mod">
-          <ac:chgData name="Xin Luo" userId="82312ee5779919a4" providerId="LiveId" clId="{F5C2D48E-4392-624B-B7FE-4C89A1D87AB0}" dt="2025-05-25T05:54:34.172" v="562" actId="20577"/>
-          <ac:spMkLst>
-            <pc:docMk/>
-            <pc:sldMk cId="4051555128" sldId="2765"/>
-            <ac:spMk id="2" creationId="{5ED012DB-8942-8839-D497-3485DD138C48}"/>
-          </ac:spMkLst>
-        </pc:spChg>
-        <pc:spChg chg="add mod">
-          <ac:chgData name="Xin Luo" userId="82312ee5779919a4" providerId="LiveId" clId="{F5C2D48E-4392-624B-B7FE-4C89A1D87AB0}" dt="2025-05-25T09:21:46.610" v="1271" actId="1076"/>
-          <ac:spMkLst>
-            <pc:docMk/>
-            <pc:sldMk cId="4051555128" sldId="2765"/>
-            <ac:spMk id="6" creationId="{F2B66AF0-5876-C132-0855-94A67F7109F4}"/>
-          </ac:spMkLst>
-        </pc:spChg>
-        <pc:spChg chg="del">
-          <ac:chgData name="Xin Luo" userId="82312ee5779919a4" providerId="LiveId" clId="{F5C2D48E-4392-624B-B7FE-4C89A1D87AB0}" dt="2025-05-25T05:54:50.815" v="565" actId="478"/>
-          <ac:spMkLst>
-            <pc:docMk/>
-            <pc:sldMk cId="4051555128" sldId="2765"/>
-            <ac:spMk id="8" creationId="{C638D974-066B-E252-19B8-5D66C38C5D06}"/>
-          </ac:spMkLst>
-        </pc:spChg>
-        <pc:spChg chg="del">
-          <ac:chgData name="Xin Luo" userId="82312ee5779919a4" providerId="LiveId" clId="{F5C2D48E-4392-624B-B7FE-4C89A1D87AB0}" dt="2025-05-25T05:54:50.815" v="565" actId="478"/>
-          <ac:spMkLst>
-            <pc:docMk/>
-            <pc:sldMk cId="4051555128" sldId="2765"/>
-            <ac:spMk id="9" creationId="{EB15FCB8-CD2D-0A0D-5ED1-B4C3B82D0D3F}"/>
-          </ac:spMkLst>
-        </pc:spChg>
-        <pc:picChg chg="del">
-          <ac:chgData name="Xin Luo" userId="82312ee5779919a4" providerId="LiveId" clId="{F5C2D48E-4392-624B-B7FE-4C89A1D87AB0}" dt="2025-05-25T05:54:46.902" v="563" actId="478"/>
-          <ac:picMkLst>
-            <pc:docMk/>
-            <pc:sldMk cId="4051555128" sldId="2765"/>
-            <ac:picMk id="5" creationId="{A45A7C82-3593-AFBE-47AB-1044B789B768}"/>
-          </ac:picMkLst>
-        </pc:picChg>
-        <pc:picChg chg="del">
-          <ac:chgData name="Xin Luo" userId="82312ee5779919a4" providerId="LiveId" clId="{F5C2D48E-4392-624B-B7FE-4C89A1D87AB0}" dt="2025-05-25T05:54:47.603" v="564" actId="478"/>
-          <ac:picMkLst>
-            <pc:docMk/>
-            <pc:sldMk cId="4051555128" sldId="2765"/>
-            <ac:picMk id="7" creationId="{C7D0980B-C85B-36BF-F4A4-85968C3CFF40}"/>
-          </ac:picMkLst>
-        </pc:picChg>
-      </pc:sldChg>
-      <pc:sldChg chg="addSp delSp modSp add mod">
-        <pc:chgData name="Xin Luo" userId="82312ee5779919a4" providerId="LiveId" clId="{F5C2D48E-4392-624B-B7FE-4C89A1D87AB0}" dt="2025-05-25T06:07:56.751" v="876" actId="14100"/>
-        <pc:sldMkLst>
-          <pc:docMk/>
-          <pc:sldMk cId="3164559666" sldId="2766"/>
-        </pc:sldMkLst>
-        <pc:spChg chg="mod">
-          <ac:chgData name="Xin Luo" userId="82312ee5779919a4" providerId="LiveId" clId="{F5C2D48E-4392-624B-B7FE-4C89A1D87AB0}" dt="2025-05-25T06:05:48.702" v="866" actId="20577"/>
-          <ac:spMkLst>
-            <pc:docMk/>
-            <pc:sldMk cId="3164559666" sldId="2766"/>
-            <ac:spMk id="2" creationId="{E6ACC44B-2985-3CB9-03D7-98BEB254FA18}"/>
-          </ac:spMkLst>
-        </pc:spChg>
-        <pc:spChg chg="add mod">
-          <ac:chgData name="Xin Luo" userId="82312ee5779919a4" providerId="LiveId" clId="{F5C2D48E-4392-624B-B7FE-4C89A1D87AB0}" dt="2025-05-25T06:06:05.030" v="873" actId="1076"/>
-          <ac:spMkLst>
-            <pc:docMk/>
-            <pc:sldMk cId="3164559666" sldId="2766"/>
-            <ac:spMk id="5" creationId="{B9AA8721-8AB0-FD63-C515-B41BF6589657}"/>
-          </ac:spMkLst>
-        </pc:spChg>
-        <pc:spChg chg="del">
-          <ac:chgData name="Xin Luo" userId="82312ee5779919a4" providerId="LiveId" clId="{F5C2D48E-4392-624B-B7FE-4C89A1D87AB0}" dt="2025-05-25T06:05:31.249" v="860" actId="478"/>
-          <ac:spMkLst>
-            <pc:docMk/>
-            <pc:sldMk cId="3164559666" sldId="2766"/>
-            <ac:spMk id="14" creationId="{6621A068-020E-383A-5A85-24C4C5233E5F}"/>
-          </ac:spMkLst>
-        </pc:spChg>
-        <pc:spChg chg="del">
-          <ac:chgData name="Xin Luo" userId="82312ee5779919a4" providerId="LiveId" clId="{F5C2D48E-4392-624B-B7FE-4C89A1D87AB0}" dt="2025-05-25T06:05:06.281" v="820" actId="478"/>
-          <ac:spMkLst>
-            <pc:docMk/>
-            <pc:sldMk cId="3164559666" sldId="2766"/>
-            <ac:spMk id="17" creationId="{14902B58-3358-43D5-1740-DD749EB3A5D6}"/>
-          </ac:spMkLst>
-        </pc:spChg>
-        <pc:spChg chg="del">
-          <ac:chgData name="Xin Luo" userId="82312ee5779919a4" providerId="LiveId" clId="{F5C2D48E-4392-624B-B7FE-4C89A1D87AB0}" dt="2025-05-25T06:05:06.281" v="820" actId="478"/>
-          <ac:spMkLst>
-            <pc:docMk/>
-            <pc:sldMk cId="3164559666" sldId="2766"/>
-            <ac:spMk id="23" creationId="{A77B70A9-8728-12DC-03EE-0AD1FB230988}"/>
-          </ac:spMkLst>
-        </pc:spChg>
-        <pc:picChg chg="add mod">
-          <ac:chgData name="Xin Luo" userId="82312ee5779919a4" providerId="LiveId" clId="{F5C2D48E-4392-624B-B7FE-4C89A1D87AB0}" dt="2025-05-25T06:07:56.751" v="876" actId="14100"/>
-          <ac:picMkLst>
-            <pc:docMk/>
-            <pc:sldMk cId="3164559666" sldId="2766"/>
-            <ac:picMk id="7" creationId="{09D682C3-4C17-04B8-38EC-693846756B46}"/>
-          </ac:picMkLst>
-        </pc:picChg>
-        <pc:picChg chg="del">
-          <ac:chgData name="Xin Luo" userId="82312ee5779919a4" providerId="LiveId" clId="{F5C2D48E-4392-624B-B7FE-4C89A1D87AB0}" dt="2025-05-25T06:05:29.712" v="859" actId="478"/>
-          <ac:picMkLst>
-            <pc:docMk/>
-            <pc:sldMk cId="3164559666" sldId="2766"/>
-            <ac:picMk id="11" creationId="{F7485E45-1E08-E7DF-FF35-A90D565D2FC8}"/>
-          </ac:picMkLst>
-        </pc:picChg>
-        <pc:picChg chg="del">
-          <ac:chgData name="Xin Luo" userId="82312ee5779919a4" providerId="LiveId" clId="{F5C2D48E-4392-624B-B7FE-4C89A1D87AB0}" dt="2025-05-25T06:05:03.288" v="818" actId="478"/>
-          <ac:picMkLst>
-            <pc:docMk/>
-            <pc:sldMk cId="3164559666" sldId="2766"/>
-            <ac:picMk id="16" creationId="{3BBC37B8-C694-BC95-BD53-D04B76C6F4F9}"/>
-          </ac:picMkLst>
-        </pc:picChg>
-        <pc:picChg chg="del">
-          <ac:chgData name="Xin Luo" userId="82312ee5779919a4" providerId="LiveId" clId="{F5C2D48E-4392-624B-B7FE-4C89A1D87AB0}" dt="2025-05-25T06:05:06.281" v="820" actId="478"/>
-          <ac:picMkLst>
-            <pc:docMk/>
-            <pc:sldMk cId="3164559666" sldId="2766"/>
-            <ac:picMk id="19" creationId="{57E637FF-8077-ADC9-DB62-47EA366AF73E}"/>
-          </ac:picMkLst>
-        </pc:picChg>
-        <pc:picChg chg="del">
-          <ac:chgData name="Xin Luo" userId="82312ee5779919a4" providerId="LiveId" clId="{F5C2D48E-4392-624B-B7FE-4C89A1D87AB0}" dt="2025-05-25T06:05:03.901" v="819" actId="478"/>
-          <ac:picMkLst>
-            <pc:docMk/>
-            <pc:sldMk cId="3164559666" sldId="2766"/>
-            <ac:picMk id="21" creationId="{437B1991-0E54-9E66-D20E-599093FF8154}"/>
-          </ac:picMkLst>
-        </pc:picChg>
-      </pc:sldChg>
-      <pc:sldChg chg="addSp delSp modSp add mod">
-        <pc:chgData name="Xin Luo" userId="82312ee5779919a4" providerId="LiveId" clId="{F5C2D48E-4392-624B-B7FE-4C89A1D87AB0}" dt="2025-05-25T09:28:23.639" v="1452" actId="1036"/>
-        <pc:sldMkLst>
-          <pc:docMk/>
-          <pc:sldMk cId="4247154155" sldId="2767"/>
-        </pc:sldMkLst>
-        <pc:spChg chg="mod">
-          <ac:chgData name="Xin Luo" userId="82312ee5779919a4" providerId="LiveId" clId="{F5C2D48E-4392-624B-B7FE-4C89A1D87AB0}" dt="2025-05-25T08:44:19.575" v="895" actId="20577"/>
-          <ac:spMkLst>
-            <pc:docMk/>
-            <pc:sldMk cId="4247154155" sldId="2767"/>
-            <ac:spMk id="2" creationId="{78174917-5D93-3CA2-B20E-18CBCBBD1C3C}"/>
-          </ac:spMkLst>
-        </pc:spChg>
-        <pc:spChg chg="mod">
-          <ac:chgData name="Xin Luo" userId="82312ee5779919a4" providerId="LiveId" clId="{F5C2D48E-4392-624B-B7FE-4C89A1D87AB0}" dt="2025-05-25T08:45:00.237" v="902" actId="14100"/>
-          <ac:spMkLst>
-            <pc:docMk/>
-            <pc:sldMk cId="4247154155" sldId="2767"/>
-            <ac:spMk id="5" creationId="{F9E5267F-B4B4-DFAA-C864-2D3D76FB5FB1}"/>
-          </ac:spMkLst>
-        </pc:spChg>
-        <pc:spChg chg="add mod">
-          <ac:chgData name="Xin Luo" userId="82312ee5779919a4" providerId="LiveId" clId="{F5C2D48E-4392-624B-B7FE-4C89A1D87AB0}" dt="2025-05-25T09:28:21.178" v="1447" actId="1076"/>
-          <ac:spMkLst>
-            <pc:docMk/>
-            <pc:sldMk cId="4247154155" sldId="2767"/>
-            <ac:spMk id="8" creationId="{73960FA1-F1DC-D891-8E2A-86EB801665ED}"/>
-          </ac:spMkLst>
-        </pc:spChg>
-        <pc:picChg chg="add mod">
-          <ac:chgData name="Xin Luo" userId="82312ee5779919a4" providerId="LiveId" clId="{F5C2D48E-4392-624B-B7FE-4C89A1D87AB0}" dt="2025-05-25T09:28:23.639" v="1452" actId="1036"/>
-          <ac:picMkLst>
-            <pc:docMk/>
-            <pc:sldMk cId="4247154155" sldId="2767"/>
-            <ac:picMk id="6" creationId="{D76E0D47-03BB-5D1B-6787-732A8B9CEB74}"/>
-          </ac:picMkLst>
-        </pc:picChg>
-        <pc:picChg chg="del">
-          <ac:chgData name="Xin Luo" userId="82312ee5779919a4" providerId="LiveId" clId="{F5C2D48E-4392-624B-B7FE-4C89A1D87AB0}" dt="2025-05-25T08:45:42.315" v="903" actId="478"/>
-          <ac:picMkLst>
-            <pc:docMk/>
-            <pc:sldMk cId="4247154155" sldId="2767"/>
-            <ac:picMk id="7" creationId="{DA08DDF8-D2EF-F116-91EE-1312F7353057}"/>
-          </ac:picMkLst>
-        </pc:picChg>
-      </pc:sldChg>
-      <pc:sldChg chg="addSp delSp modSp add mod">
-        <pc:chgData name="Xin Luo" userId="82312ee5779919a4" providerId="LiveId" clId="{F5C2D48E-4392-624B-B7FE-4C89A1D87AB0}" dt="2025-05-25T09:31:08.338" v="1519" actId="27614"/>
-        <pc:sldMkLst>
-          <pc:docMk/>
-          <pc:sldMk cId="1524494882" sldId="2768"/>
-        </pc:sldMkLst>
-        <pc:spChg chg="mod">
-          <ac:chgData name="Xin Luo" userId="82312ee5779919a4" providerId="LiveId" clId="{F5C2D48E-4392-624B-B7FE-4C89A1D87AB0}" dt="2025-05-25T09:28:53.665" v="1484" actId="20577"/>
-          <ac:spMkLst>
-            <pc:docMk/>
-            <pc:sldMk cId="1524494882" sldId="2768"/>
-            <ac:spMk id="2" creationId="{1468AB1A-DF7F-E4B7-1620-FAAA0AAC4645}"/>
-          </ac:spMkLst>
-        </pc:spChg>
-        <pc:spChg chg="mod">
-          <ac:chgData name="Xin Luo" userId="82312ee5779919a4" providerId="LiveId" clId="{F5C2D48E-4392-624B-B7FE-4C89A1D87AB0}" dt="2025-05-25T09:30:10.607" v="1515" actId="20577"/>
-          <ac:spMkLst>
-            <pc:docMk/>
-            <pc:sldMk cId="1524494882" sldId="2768"/>
-            <ac:spMk id="5" creationId="{50F101EB-393E-FE56-EB84-9C937140F7CE}"/>
-          </ac:spMkLst>
-        </pc:spChg>
-        <pc:spChg chg="add del mod">
-          <ac:chgData name="Xin Luo" userId="82312ee5779919a4" providerId="LiveId" clId="{F5C2D48E-4392-624B-B7FE-4C89A1D87AB0}" dt="2025-05-25T09:28:59.764" v="1487" actId="478"/>
-          <ac:spMkLst>
-            <pc:docMk/>
-            <pc:sldMk cId="1524494882" sldId="2768"/>
-            <ac:spMk id="8" creationId="{22AE9B1A-944D-AC07-D42D-E0096763783F}"/>
-          </ac:spMkLst>
-        </pc:spChg>
-        <pc:picChg chg="del">
-          <ac:chgData name="Xin Luo" userId="82312ee5779919a4" providerId="LiveId" clId="{F5C2D48E-4392-624B-B7FE-4C89A1D87AB0}" dt="2025-05-25T08:47:44.505" v="1002" actId="478"/>
-          <ac:picMkLst>
-            <pc:docMk/>
-            <pc:sldMk cId="1524494882" sldId="2768"/>
-            <ac:picMk id="6" creationId="{F1489C54-8C1C-8F88-9FE5-F10C7631C5B7}"/>
-          </ac:picMkLst>
-        </pc:picChg>
-        <pc:picChg chg="add del mod">
-          <ac:chgData name="Xin Luo" userId="82312ee5779919a4" providerId="LiveId" clId="{F5C2D48E-4392-624B-B7FE-4C89A1D87AB0}" dt="2025-05-25T09:28:58.779" v="1486" actId="478"/>
-          <ac:picMkLst>
-            <pc:docMk/>
-            <pc:sldMk cId="1524494882" sldId="2768"/>
-            <ac:picMk id="7" creationId="{0706C582-8633-E3B9-65D7-F32B0014AA4C}"/>
-          </ac:picMkLst>
-        </pc:picChg>
-        <pc:picChg chg="add del mod">
-          <ac:chgData name="Xin Luo" userId="82312ee5779919a4" providerId="LiveId" clId="{F5C2D48E-4392-624B-B7FE-4C89A1D87AB0}" dt="2025-05-25T09:28:57.014" v="1485" actId="478"/>
-          <ac:picMkLst>
-            <pc:docMk/>
-            <pc:sldMk cId="1524494882" sldId="2768"/>
-            <ac:picMk id="10" creationId="{B6BD6D0F-3420-E96B-D6D4-61470E5262AE}"/>
-          </ac:picMkLst>
-        </pc:picChg>
-        <pc:picChg chg="add mod">
-          <ac:chgData name="Xin Luo" userId="82312ee5779919a4" providerId="LiveId" clId="{F5C2D48E-4392-624B-B7FE-4C89A1D87AB0}" dt="2025-05-25T08:50:23.029" v="1043"/>
-          <ac:picMkLst>
-            <pc:docMk/>
-            <pc:sldMk cId="1524494882" sldId="2768"/>
-            <ac:picMk id="12" creationId="{2ADB60C8-892C-99D4-1901-EA9C15584A0D}"/>
-          </ac:picMkLst>
-        </pc:picChg>
-        <pc:picChg chg="add mod">
-          <ac:chgData name="Xin Luo" userId="82312ee5779919a4" providerId="LiveId" clId="{F5C2D48E-4392-624B-B7FE-4C89A1D87AB0}" dt="2025-05-25T09:31:08.338" v="1519" actId="27614"/>
-          <ac:picMkLst>
-            <pc:docMk/>
-            <pc:sldMk cId="1524494882" sldId="2768"/>
-            <ac:picMk id="14" creationId="{AD74C925-160E-1095-20E9-53151E6830E5}"/>
-          </ac:picMkLst>
-        </pc:picChg>
-      </pc:sldChg>
-      <pc:sldChg chg="addSp delSp modSp add mod">
-        <pc:chgData name="Xin Luo" userId="82312ee5779919a4" providerId="LiveId" clId="{F5C2D48E-4392-624B-B7FE-4C89A1D87AB0}" dt="2025-05-25T08:54:47.697" v="1203" actId="1076"/>
-        <pc:sldMkLst>
-          <pc:docMk/>
-          <pc:sldMk cId="3902283813" sldId="2769"/>
-        </pc:sldMkLst>
-        <pc:spChg chg="mod">
-          <ac:chgData name="Xin Luo" userId="82312ee5779919a4" providerId="LiveId" clId="{F5C2D48E-4392-624B-B7FE-4C89A1D87AB0}" dt="2025-05-25T08:50:34.397" v="1060" actId="20577"/>
-          <ac:spMkLst>
-            <pc:docMk/>
-            <pc:sldMk cId="3902283813" sldId="2769"/>
-            <ac:spMk id="2" creationId="{84C78015-0E7D-654C-0B58-247C85D66E8D}"/>
-          </ac:spMkLst>
-        </pc:spChg>
-        <pc:spChg chg="mod">
-          <ac:chgData name="Xin Luo" userId="82312ee5779919a4" providerId="LiveId" clId="{F5C2D48E-4392-624B-B7FE-4C89A1D87AB0}" dt="2025-05-25T08:54:39.265" v="1200" actId="1035"/>
-          <ac:spMkLst>
-            <pc:docMk/>
-            <pc:sldMk cId="3902283813" sldId="2769"/>
-            <ac:spMk id="5" creationId="{88CBD4A2-17CE-0B15-E6D8-9C777704BF68}"/>
-          </ac:spMkLst>
-        </pc:spChg>
-        <pc:spChg chg="del">
-          <ac:chgData name="Xin Luo" userId="82312ee5779919a4" providerId="LiveId" clId="{F5C2D48E-4392-624B-B7FE-4C89A1D87AB0}" dt="2025-05-25T08:50:54.775" v="1098" actId="478"/>
-          <ac:spMkLst>
-            <pc:docMk/>
-            <pc:sldMk cId="3902283813" sldId="2769"/>
-            <ac:spMk id="8" creationId="{0F46FF98-4332-DAE7-2EF5-48758A1C1FE3}"/>
-          </ac:spMkLst>
-        </pc:spChg>
-        <pc:spChg chg="add mod">
-          <ac:chgData name="Xin Luo" userId="82312ee5779919a4" providerId="LiveId" clId="{F5C2D48E-4392-624B-B7FE-4C89A1D87AB0}" dt="2025-05-25T08:54:47.697" v="1203" actId="1076"/>
-          <ac:spMkLst>
-            <pc:docMk/>
-            <pc:sldMk cId="3902283813" sldId="2769"/>
-            <ac:spMk id="9" creationId="{D513AA3F-0385-D013-13AD-1D0FB8D9B70A}"/>
-          </ac:spMkLst>
-        </pc:spChg>
-        <pc:spChg chg="add mod">
-          <ac:chgData name="Xin Luo" userId="82312ee5779919a4" providerId="LiveId" clId="{F5C2D48E-4392-624B-B7FE-4C89A1D87AB0}" dt="2025-05-25T08:54:39.265" v="1200" actId="1035"/>
-          <ac:spMkLst>
-            <pc:docMk/>
-            <pc:sldMk cId="3902283813" sldId="2769"/>
-            <ac:spMk id="13" creationId="{79BD1779-1247-FF78-7205-4B19381D21C2}"/>
-          </ac:spMkLst>
-        </pc:spChg>
-        <pc:picChg chg="add mod">
-          <ac:chgData name="Xin Luo" userId="82312ee5779919a4" providerId="LiveId" clId="{F5C2D48E-4392-624B-B7FE-4C89A1D87AB0}" dt="2025-05-25T08:54:39.265" v="1200" actId="1035"/>
-          <ac:picMkLst>
-            <pc:docMk/>
-            <pc:sldMk cId="3902283813" sldId="2769"/>
-            <ac:picMk id="6" creationId="{1D4765C1-C7D2-6B77-B5F2-AD3408B81C51}"/>
-          </ac:picMkLst>
-        </pc:picChg>
-        <pc:picChg chg="del">
-          <ac:chgData name="Xin Luo" userId="82312ee5779919a4" providerId="LiveId" clId="{F5C2D48E-4392-624B-B7FE-4C89A1D87AB0}" dt="2025-05-25T08:50:50.934" v="1097" actId="478"/>
-          <ac:picMkLst>
-            <pc:docMk/>
-            <pc:sldMk cId="3902283813" sldId="2769"/>
-            <ac:picMk id="7" creationId="{447B3182-7E10-1A11-19FE-6CE9ABA256D9}"/>
-          </ac:picMkLst>
-        </pc:picChg>
-        <pc:picChg chg="del">
-          <ac:chgData name="Xin Luo" userId="82312ee5779919a4" providerId="LiveId" clId="{F5C2D48E-4392-624B-B7FE-4C89A1D87AB0}" dt="2025-05-25T08:50:50.934" v="1097" actId="478"/>
-          <ac:picMkLst>
-            <pc:docMk/>
-            <pc:sldMk cId="3902283813" sldId="2769"/>
-            <ac:picMk id="10" creationId="{BAF3879B-BD10-459D-98CB-64E03D443CA9}"/>
-          </ac:picMkLst>
-        </pc:picChg>
-        <pc:picChg chg="add mod">
-          <ac:chgData name="Xin Luo" userId="82312ee5779919a4" providerId="LiveId" clId="{F5C2D48E-4392-624B-B7FE-4C89A1D87AB0}" dt="2025-05-25T08:54:45.427" v="1202" actId="14100"/>
-          <ac:picMkLst>
-            <pc:docMk/>
-            <pc:sldMk cId="3902283813" sldId="2769"/>
-            <ac:picMk id="12" creationId="{B3CF1D18-0AAB-D188-EA4F-4D3662AAFA59}"/>
-          </ac:picMkLst>
-        </pc:picChg>
-        <pc:picChg chg="add mod">
-          <ac:chgData name="Xin Luo" userId="82312ee5779919a4" providerId="LiveId" clId="{F5C2D48E-4392-624B-B7FE-4C89A1D87AB0}" dt="2025-05-25T08:54:39.265" v="1200" actId="1035"/>
-          <ac:picMkLst>
-            <pc:docMk/>
-            <pc:sldMk cId="3902283813" sldId="2769"/>
-            <ac:picMk id="15" creationId="{5570B240-4AD9-03E9-01BE-0EC4AAD4D06C}"/>
-          </ac:picMkLst>
-        </pc:picChg>
-      </pc:sldChg>
-      <pc:sldChg chg="addSp delSp modSp add mod">
-        <pc:chgData name="Xin Luo" userId="82312ee5779919a4" providerId="LiveId" clId="{F5C2D48E-4392-624B-B7FE-4C89A1D87AB0}" dt="2025-05-25T09:26:38.401" v="1405" actId="113"/>
-        <pc:sldMkLst>
-          <pc:docMk/>
-          <pc:sldMk cId="3835729153" sldId="2770"/>
-        </pc:sldMkLst>
-        <pc:spChg chg="del">
-          <ac:chgData name="Xin Luo" userId="82312ee5779919a4" providerId="LiveId" clId="{F5C2D48E-4392-624B-B7FE-4C89A1D87AB0}" dt="2025-05-25T09:24:44.109" v="1309" actId="478"/>
-          <ac:spMkLst>
-            <pc:docMk/>
-            <pc:sldMk cId="3835729153" sldId="2770"/>
-            <ac:spMk id="2" creationId="{65394BC4-C6F1-B4A5-669C-CEAB90833AFD}"/>
-          </ac:spMkLst>
-        </pc:spChg>
-        <pc:spChg chg="add mod">
-          <ac:chgData name="Xin Luo" userId="82312ee5779919a4" providerId="LiveId" clId="{F5C2D48E-4392-624B-B7FE-4C89A1D87AB0}" dt="2025-05-25T09:25:47.949" v="1357" actId="1036"/>
-          <ac:spMkLst>
-            <pc:docMk/>
-            <pc:sldMk cId="3835729153" sldId="2770"/>
-            <ac:spMk id="5" creationId="{7A0EFF5A-AB15-E3BA-F41B-DD427939B6E7}"/>
-          </ac:spMkLst>
-        </pc:spChg>
-        <pc:spChg chg="del">
-          <ac:chgData name="Xin Luo" userId="82312ee5779919a4" providerId="LiveId" clId="{F5C2D48E-4392-624B-B7FE-4C89A1D87AB0}" dt="2025-05-25T09:24:41.718" v="1308" actId="478"/>
-          <ac:spMkLst>
-            <pc:docMk/>
-            <pc:sldMk cId="3835729153" sldId="2770"/>
-            <ac:spMk id="14" creationId="{E6C4783A-CF21-D7B8-5CC2-009E19CB55D3}"/>
-          </ac:spMkLst>
-        </pc:spChg>
-        <pc:spChg chg="mod">
-          <ac:chgData name="Xin Luo" userId="82312ee5779919a4" providerId="LiveId" clId="{F5C2D48E-4392-624B-B7FE-4C89A1D87AB0}" dt="2025-05-25T09:26:38.401" v="1405" actId="113"/>
-          <ac:spMkLst>
-            <pc:docMk/>
-            <pc:sldMk cId="3835729153" sldId="2770"/>
-            <ac:spMk id="17" creationId="{8237E2BA-E811-2F56-DC70-823F1A953D39}"/>
-          </ac:spMkLst>
-        </pc:spChg>
-        <pc:spChg chg="mod">
-          <ac:chgData name="Xin Luo" userId="82312ee5779919a4" providerId="LiveId" clId="{F5C2D48E-4392-624B-B7FE-4C89A1D87AB0}" dt="2025-05-25T09:25:47.949" v="1357" actId="1036"/>
-          <ac:spMkLst>
-            <pc:docMk/>
-            <pc:sldMk cId="3835729153" sldId="2770"/>
-            <ac:spMk id="23" creationId="{690F9F59-11B1-3DDA-C932-5ABCE8E3B426}"/>
-          </ac:spMkLst>
-        </pc:spChg>
-        <pc:picChg chg="del">
-          <ac:chgData name="Xin Luo" userId="82312ee5779919a4" providerId="LiveId" clId="{F5C2D48E-4392-624B-B7FE-4C89A1D87AB0}" dt="2025-05-25T09:24:41.718" v="1308" actId="478"/>
-          <ac:picMkLst>
-            <pc:docMk/>
-            <pc:sldMk cId="3835729153" sldId="2770"/>
-            <ac:picMk id="11" creationId="{2FF2DBB5-1AFD-326A-70C4-A944DDA1D9F2}"/>
-          </ac:picMkLst>
-        </pc:picChg>
-        <pc:picChg chg="del">
-          <ac:chgData name="Xin Luo" userId="82312ee5779919a4" providerId="LiveId" clId="{F5C2D48E-4392-624B-B7FE-4C89A1D87AB0}" dt="2025-05-25T09:24:41.718" v="1308" actId="478"/>
-          <ac:picMkLst>
-            <pc:docMk/>
-            <pc:sldMk cId="3835729153" sldId="2770"/>
-            <ac:picMk id="16" creationId="{43ADEA4B-87AB-B486-A4C3-722BE692058C}"/>
-          </ac:picMkLst>
-        </pc:picChg>
-        <pc:picChg chg="mod">
-          <ac:chgData name="Xin Luo" userId="82312ee5779919a4" providerId="LiveId" clId="{F5C2D48E-4392-624B-B7FE-4C89A1D87AB0}" dt="2025-05-25T09:25:47.949" v="1357" actId="1036"/>
-          <ac:picMkLst>
-            <pc:docMk/>
-            <pc:sldMk cId="3835729153" sldId="2770"/>
-            <ac:picMk id="19" creationId="{0B6D64A1-7D44-00F7-0F0C-02506712C397}"/>
-          </ac:picMkLst>
-        </pc:picChg>
-        <pc:picChg chg="mod">
-          <ac:chgData name="Xin Luo" userId="82312ee5779919a4" providerId="LiveId" clId="{F5C2D48E-4392-624B-B7FE-4C89A1D87AB0}" dt="2025-05-25T09:25:47.949" v="1357" actId="1036"/>
-          <ac:picMkLst>
-            <pc:docMk/>
-            <pc:sldMk cId="3835729153" sldId="2770"/>
-            <ac:picMk id="21" creationId="{59B8B295-E4F9-3D24-3280-6169F168DDE0}"/>
-          </ac:picMkLst>
-        </pc:picChg>
-      </pc:sldChg>
-      <pc:sldChg chg="addSp delSp modSp add mod">
-        <pc:chgData name="Xin Luo" userId="82312ee5779919a4" providerId="LiveId" clId="{F5C2D48E-4392-624B-B7FE-4C89A1D87AB0}" dt="2025-05-25T09:34:33.964" v="1601" actId="27614"/>
-        <pc:sldMkLst>
-          <pc:docMk/>
-          <pc:sldMk cId="1977184621" sldId="2771"/>
-        </pc:sldMkLst>
-        <pc:spChg chg="mod">
-          <ac:chgData name="Xin Luo" userId="82312ee5779919a4" providerId="LiveId" clId="{F5C2D48E-4392-624B-B7FE-4C89A1D87AB0}" dt="2025-05-25T09:33:57.944" v="1597" actId="113"/>
-          <ac:spMkLst>
-            <pc:docMk/>
-            <pc:sldMk cId="1977184621" sldId="2771"/>
-            <ac:spMk id="5" creationId="{C8DB5932-470B-681C-10BF-660ADE8ECD54}"/>
-          </ac:spMkLst>
-        </pc:spChg>
-        <pc:spChg chg="mod">
-          <ac:chgData name="Xin Luo" userId="82312ee5779919a4" providerId="LiveId" clId="{F5C2D48E-4392-624B-B7FE-4C89A1D87AB0}" dt="2025-05-25T09:33:55.246" v="1596" actId="113"/>
-          <ac:spMkLst>
-            <pc:docMk/>
-            <pc:sldMk cId="1977184621" sldId="2771"/>
-            <ac:spMk id="8" creationId="{A91E7D1C-C66E-E713-7E46-AD4957E71339}"/>
-          </ac:spMkLst>
-        </pc:spChg>
-        <pc:picChg chg="add mod">
-          <ac:chgData name="Xin Luo" userId="82312ee5779919a4" providerId="LiveId" clId="{F5C2D48E-4392-624B-B7FE-4C89A1D87AB0}" dt="2025-05-25T09:34:33.964" v="1601" actId="27614"/>
-          <ac:picMkLst>
-            <pc:docMk/>
-            <pc:sldMk cId="1977184621" sldId="2771"/>
-            <ac:picMk id="6" creationId="{4C286593-6294-977A-B5D1-B45431BDD231}"/>
-          </ac:picMkLst>
-        </pc:picChg>
-        <pc:picChg chg="del">
-          <ac:chgData name="Xin Luo" userId="82312ee5779919a4" providerId="LiveId" clId="{F5C2D48E-4392-624B-B7FE-4C89A1D87AB0}" dt="2025-05-25T09:34:25.530" v="1598" actId="478"/>
-          <ac:picMkLst>
-            <pc:docMk/>
-            <pc:sldMk cId="1977184621" sldId="2771"/>
-            <ac:picMk id="10" creationId="{1728E37A-94DE-7106-0B76-9DA03E6B142D}"/>
-          </ac:picMkLst>
-        </pc:picChg>
-      </pc:sldChg>
-    </pc:docChg>
-  </pc:docChgLst>
-  <pc:docChgLst>
-    <pc:chgData name="Xin Luo" userId="82312ee5779919a4" providerId="LiveId" clId="{7C35D78A-E8DF-394E-816A-D2222F18F092}"/>
-    <pc:docChg chg="delSld modSld">
-      <pc:chgData name="Xin Luo" userId="82312ee5779919a4" providerId="LiveId" clId="{7C35D78A-E8DF-394E-816A-D2222F18F092}" dt="2022-11-28T03:56:42.353" v="21" actId="2696"/>
-      <pc:docMkLst>
-        <pc:docMk/>
-      </pc:docMkLst>
-      <pc:sldChg chg="del">
-        <pc:chgData name="Xin Luo" userId="82312ee5779919a4" providerId="LiveId" clId="{7C35D78A-E8DF-394E-816A-D2222F18F092}" dt="2022-11-28T03:56:38.106" v="20" actId="2696"/>
-        <pc:sldMkLst>
-          <pc:docMk/>
-          <pc:sldMk cId="0" sldId="279"/>
-        </pc:sldMkLst>
-      </pc:sldChg>
-      <pc:sldChg chg="modSp mod">
-        <pc:chgData name="Xin Luo" userId="82312ee5779919a4" providerId="LiveId" clId="{7C35D78A-E8DF-394E-816A-D2222F18F092}" dt="2022-11-28T03:56:03.446" v="17" actId="20577"/>
-        <pc:sldMkLst>
-          <pc:docMk/>
-          <pc:sldMk cId="1153920038" sldId="2206"/>
-        </pc:sldMkLst>
-      </pc:sldChg>
-      <pc:sldChg chg="del">
-        <pc:chgData name="Xin Luo" userId="82312ee5779919a4" providerId="LiveId" clId="{7C35D78A-E8DF-394E-816A-D2222F18F092}" dt="2022-11-28T03:56:42.353" v="21" actId="2696"/>
-        <pc:sldMkLst>
-          <pc:docMk/>
-          <pc:sldMk cId="0" sldId="2501"/>
-        </pc:sldMkLst>
-      </pc:sldChg>
-      <pc:sldChg chg="del">
-        <pc:chgData name="Xin Luo" userId="82312ee5779919a4" providerId="LiveId" clId="{7C35D78A-E8DF-394E-816A-D2222F18F092}" dt="2022-11-28T03:56:17.803" v="18" actId="2696"/>
-        <pc:sldMkLst>
-          <pc:docMk/>
-          <pc:sldMk cId="2689840772" sldId="2604"/>
-        </pc:sldMkLst>
-      </pc:sldChg>
-      <pc:sldChg chg="del">
-        <pc:chgData name="Xin Luo" userId="82312ee5779919a4" providerId="LiveId" clId="{7C35D78A-E8DF-394E-816A-D2222F18F092}" dt="2022-11-28T03:56:33.667" v="19" actId="2696"/>
-        <pc:sldMkLst>
-          <pc:docMk/>
-          <pc:sldMk cId="1392274363" sldId="2606"/>
-        </pc:sldMkLst>
-      </pc:sldChg>
-      <pc:sldChg chg="del">
-        <pc:chgData name="Xin Luo" userId="82312ee5779919a4" providerId="LiveId" clId="{7C35D78A-E8DF-394E-816A-D2222F18F092}" dt="2022-11-28T03:56:33.667" v="19" actId="2696"/>
-        <pc:sldMkLst>
-          <pc:docMk/>
-          <pc:sldMk cId="292605530" sldId="2607"/>
-        </pc:sldMkLst>
-      </pc:sldChg>
-      <pc:sldChg chg="del">
-        <pc:chgData name="Xin Luo" userId="82312ee5779919a4" providerId="LiveId" clId="{7C35D78A-E8DF-394E-816A-D2222F18F092}" dt="2022-11-28T03:56:33.667" v="19" actId="2696"/>
-        <pc:sldMkLst>
-          <pc:docMk/>
-          <pc:sldMk cId="1432126823" sldId="2608"/>
-        </pc:sldMkLst>
-      </pc:sldChg>
-      <pc:sldChg chg="del">
-        <pc:chgData name="Xin Luo" userId="82312ee5779919a4" providerId="LiveId" clId="{7C35D78A-E8DF-394E-816A-D2222F18F092}" dt="2022-11-28T03:56:33.667" v="19" actId="2696"/>
-        <pc:sldMkLst>
-          <pc:docMk/>
-          <pc:sldMk cId="2780969545" sldId="2609"/>
-        </pc:sldMkLst>
-      </pc:sldChg>
-      <pc:sldChg chg="del">
-        <pc:chgData name="Xin Luo" userId="82312ee5779919a4" providerId="LiveId" clId="{7C35D78A-E8DF-394E-816A-D2222F18F092}" dt="2022-11-28T03:56:33.667" v="19" actId="2696"/>
-        <pc:sldMkLst>
-          <pc:docMk/>
-          <pc:sldMk cId="1351738911" sldId="2610"/>
-        </pc:sldMkLst>
-      </pc:sldChg>
-      <pc:sldChg chg="del">
-        <pc:chgData name="Xin Luo" userId="82312ee5779919a4" providerId="LiveId" clId="{7C35D78A-E8DF-394E-816A-D2222F18F092}" dt="2022-11-28T03:56:33.667" v="19" actId="2696"/>
-        <pc:sldMkLst>
-          <pc:docMk/>
-          <pc:sldMk cId="1504723508" sldId="2611"/>
-        </pc:sldMkLst>
-      </pc:sldChg>
-      <pc:sldChg chg="del">
-        <pc:chgData name="Xin Luo" userId="82312ee5779919a4" providerId="LiveId" clId="{7C35D78A-E8DF-394E-816A-D2222F18F092}" dt="2022-11-28T03:56:38.106" v="20" actId="2696"/>
-        <pc:sldMkLst>
-          <pc:docMk/>
-          <pc:sldMk cId="63705705" sldId="2612"/>
-        </pc:sldMkLst>
-      </pc:sldChg>
-      <pc:sldChg chg="del">
-        <pc:chgData name="Xin Luo" userId="82312ee5779919a4" providerId="LiveId" clId="{7C35D78A-E8DF-394E-816A-D2222F18F092}" dt="2022-11-28T03:56:42.353" v="21" actId="2696"/>
-        <pc:sldMkLst>
-          <pc:docMk/>
-          <pc:sldMk cId="3070817833" sldId="2652"/>
-        </pc:sldMkLst>
-      </pc:sldChg>
-      <pc:sldChg chg="del">
-        <pc:chgData name="Xin Luo" userId="82312ee5779919a4" providerId="LiveId" clId="{7C35D78A-E8DF-394E-816A-D2222F18F092}" dt="2022-11-28T03:56:42.353" v="21" actId="2696"/>
-        <pc:sldMkLst>
-          <pc:docMk/>
-          <pc:sldMk cId="2261973024" sldId="2686"/>
-        </pc:sldMkLst>
-      </pc:sldChg>
-      <pc:sldChg chg="del">
-        <pc:chgData name="Xin Luo" userId="82312ee5779919a4" providerId="LiveId" clId="{7C35D78A-E8DF-394E-816A-D2222F18F092}" dt="2022-11-28T03:56:38.106" v="20" actId="2696"/>
-        <pc:sldMkLst>
-          <pc:docMk/>
-          <pc:sldMk cId="1836653143" sldId="2688"/>
-        </pc:sldMkLst>
-      </pc:sldChg>
-      <pc:sldChg chg="del">
-        <pc:chgData name="Xin Luo" userId="82312ee5779919a4" providerId="LiveId" clId="{7C35D78A-E8DF-394E-816A-D2222F18F092}" dt="2022-11-28T03:56:38.106" v="20" actId="2696"/>
-        <pc:sldMkLst>
-          <pc:docMk/>
-          <pc:sldMk cId="715274259" sldId="2690"/>
-        </pc:sldMkLst>
-      </pc:sldChg>
-      <pc:sldChg chg="del">
-        <pc:chgData name="Xin Luo" userId="82312ee5779919a4" providerId="LiveId" clId="{7C35D78A-E8DF-394E-816A-D2222F18F092}" dt="2022-11-28T03:56:42.353" v="21" actId="2696"/>
-        <pc:sldMkLst>
-          <pc:docMk/>
-          <pc:sldMk cId="3906920652" sldId="2694"/>
-        </pc:sldMkLst>
-      </pc:sldChg>
-      <pc:sldChg chg="del">
-        <pc:chgData name="Xin Luo" userId="82312ee5779919a4" providerId="LiveId" clId="{7C35D78A-E8DF-394E-816A-D2222F18F092}" dt="2022-11-28T03:56:42.353" v="21" actId="2696"/>
-        <pc:sldMkLst>
-          <pc:docMk/>
-          <pc:sldMk cId="558234131" sldId="2697"/>
-        </pc:sldMkLst>
-      </pc:sldChg>
-      <pc:sldChg chg="del">
-        <pc:chgData name="Xin Luo" userId="82312ee5779919a4" providerId="LiveId" clId="{7C35D78A-E8DF-394E-816A-D2222F18F092}" dt="2022-11-28T03:56:38.106" v="20" actId="2696"/>
-        <pc:sldMkLst>
-          <pc:docMk/>
-          <pc:sldMk cId="507602036" sldId="2700"/>
-        </pc:sldMkLst>
-      </pc:sldChg>
-      <pc:sldChg chg="del">
-        <pc:chgData name="Xin Luo" userId="82312ee5779919a4" providerId="LiveId" clId="{7C35D78A-E8DF-394E-816A-D2222F18F092}" dt="2022-11-28T03:56:38.106" v="20" actId="2696"/>
-        <pc:sldMkLst>
-          <pc:docMk/>
-          <pc:sldMk cId="569668922" sldId="2703"/>
-        </pc:sldMkLst>
-      </pc:sldChg>
-      <pc:sldChg chg="del">
-        <pc:chgData name="Xin Luo" userId="82312ee5779919a4" providerId="LiveId" clId="{7C35D78A-E8DF-394E-816A-D2222F18F092}" dt="2022-11-28T03:56:38.106" v="20" actId="2696"/>
-        <pc:sldMkLst>
-          <pc:docMk/>
-          <pc:sldMk cId="693600848" sldId="2705"/>
-        </pc:sldMkLst>
-      </pc:sldChg>
-      <pc:sldChg chg="del">
-        <pc:chgData name="Xin Luo" userId="82312ee5779919a4" providerId="LiveId" clId="{7C35D78A-E8DF-394E-816A-D2222F18F092}" dt="2022-11-28T03:56:38.106" v="20" actId="2696"/>
-        <pc:sldMkLst>
-          <pc:docMk/>
-          <pc:sldMk cId="2447019445" sldId="2706"/>
-        </pc:sldMkLst>
-      </pc:sldChg>
-      <pc:sldChg chg="del">
-        <pc:chgData name="Xin Luo" userId="82312ee5779919a4" providerId="LiveId" clId="{7C35D78A-E8DF-394E-816A-D2222F18F092}" dt="2022-11-28T03:56:42.353" v="21" actId="2696"/>
-        <pc:sldMkLst>
-          <pc:docMk/>
-          <pc:sldMk cId="3037020054" sldId="2707"/>
-        </pc:sldMkLst>
-      </pc:sldChg>
-      <pc:sldChg chg="del">
-        <pc:chgData name="Xin Luo" userId="82312ee5779919a4" providerId="LiveId" clId="{7C35D78A-E8DF-394E-816A-D2222F18F092}" dt="2022-11-28T03:56:42.353" v="21" actId="2696"/>
-        <pc:sldMkLst>
-          <pc:docMk/>
-          <pc:sldMk cId="446628750" sldId="2708"/>
-        </pc:sldMkLst>
-      </pc:sldChg>
-      <pc:sldChg chg="del">
-        <pc:chgData name="Xin Luo" userId="82312ee5779919a4" providerId="LiveId" clId="{7C35D78A-E8DF-394E-816A-D2222F18F092}" dt="2022-11-28T03:56:42.353" v="21" actId="2696"/>
-        <pc:sldMkLst>
-          <pc:docMk/>
-          <pc:sldMk cId="770366385" sldId="2709"/>
-        </pc:sldMkLst>
-      </pc:sldChg>
-      <pc:sldChg chg="del">
-        <pc:chgData name="Xin Luo" userId="82312ee5779919a4" providerId="LiveId" clId="{7C35D78A-E8DF-394E-816A-D2222F18F092}" dt="2022-11-28T03:56:42.353" v="21" actId="2696"/>
-        <pc:sldMkLst>
-          <pc:docMk/>
-          <pc:sldMk cId="1259562490" sldId="2710"/>
-        </pc:sldMkLst>
-      </pc:sldChg>
-      <pc:sldChg chg="del">
-        <pc:chgData name="Xin Luo" userId="82312ee5779919a4" providerId="LiveId" clId="{7C35D78A-E8DF-394E-816A-D2222F18F092}" dt="2022-11-28T03:56:42.353" v="21" actId="2696"/>
-        <pc:sldMkLst>
-          <pc:docMk/>
-          <pc:sldMk cId="573676958" sldId="2711"/>
-        </pc:sldMkLst>
-      </pc:sldChg>
-      <pc:sldChg chg="del">
-        <pc:chgData name="Xin Luo" userId="82312ee5779919a4" providerId="LiveId" clId="{7C35D78A-E8DF-394E-816A-D2222F18F092}" dt="2022-11-28T03:56:33.667" v="19" actId="2696"/>
-        <pc:sldMkLst>
-          <pc:docMk/>
-          <pc:sldMk cId="2970267871" sldId="2712"/>
-        </pc:sldMkLst>
-      </pc:sldChg>
-      <pc:sldChg chg="del">
-        <pc:chgData name="Xin Luo" userId="82312ee5779919a4" providerId="LiveId" clId="{7C35D78A-E8DF-394E-816A-D2222F18F092}" dt="2022-11-28T03:56:42.353" v="21" actId="2696"/>
-        <pc:sldMkLst>
-          <pc:docMk/>
-          <pc:sldMk cId="4061658258" sldId="2713"/>
-        </pc:sldMkLst>
-      </pc:sldChg>
-      <pc:sldChg chg="del">
-        <pc:chgData name="Xin Luo" userId="82312ee5779919a4" providerId="LiveId" clId="{7C35D78A-E8DF-394E-816A-D2222F18F092}" dt="2022-11-28T03:56:17.803" v="18" actId="2696"/>
-        <pc:sldMkLst>
-          <pc:docMk/>
-          <pc:sldMk cId="2358282757" sldId="2714"/>
-        </pc:sldMkLst>
-      </pc:sldChg>
-    </pc:docChg>
-  </pc:docChgLst>
-  <pc:docChgLst>
-    <pc:chgData name="Xin Luo" userId="82312ee5779919a4" providerId="LiveId" clId="{82BFAA31-791A-9843-976C-3AAFAA5AC07D}"/>
-    <pc:docChg chg="undo custSel addSld delSld modSld">
-      <pc:chgData name="Xin Luo" userId="82312ee5779919a4" providerId="LiveId" clId="{82BFAA31-791A-9843-976C-3AAFAA5AC07D}" dt="2023-03-05T13:50:34.172" v="6224" actId="1035"/>
-      <pc:docMkLst>
-        <pc:docMk/>
-      </pc:docMkLst>
-      <pc:sldChg chg="modSp mod">
-        <pc:chgData name="Xin Luo" userId="82312ee5779919a4" providerId="LiveId" clId="{82BFAA31-791A-9843-976C-3AAFAA5AC07D}" dt="2023-03-04T01:58:49.501" v="2918" actId="20577"/>
-        <pc:sldMkLst>
-          <pc:docMk/>
-          <pc:sldMk cId="4067577602" sldId="2605"/>
-        </pc:sldMkLst>
-      </pc:sldChg>
-      <pc:sldChg chg="addSp delSp modSp mod">
-        <pc:chgData name="Xin Luo" userId="82312ee5779919a4" providerId="LiveId" clId="{82BFAA31-791A-9843-976C-3AAFAA5AC07D}" dt="2023-03-04T03:17:04.154" v="3027" actId="20577"/>
-        <pc:sldMkLst>
-          <pc:docMk/>
-          <pc:sldMk cId="3833073590" sldId="2716"/>
-        </pc:sldMkLst>
-      </pc:sldChg>
-      <pc:sldChg chg="addSp delSp modSp mod">
-        <pc:chgData name="Xin Luo" userId="82312ee5779919a4" providerId="LiveId" clId="{82BFAA31-791A-9843-976C-3AAFAA5AC07D}" dt="2023-02-24T08:50:06.402" v="585" actId="20577"/>
-        <pc:sldMkLst>
-          <pc:docMk/>
-          <pc:sldMk cId="972163772" sldId="2720"/>
-        </pc:sldMkLst>
-      </pc:sldChg>
-      <pc:sldChg chg="addSp delSp modSp mod">
-        <pc:chgData name="Xin Luo" userId="82312ee5779919a4" providerId="LiveId" clId="{82BFAA31-791A-9843-976C-3AAFAA5AC07D}" dt="2023-02-24T13:00:34.955" v="2586" actId="1036"/>
-        <pc:sldMkLst>
-          <pc:docMk/>
-          <pc:sldMk cId="2689695864" sldId="2721"/>
-        </pc:sldMkLst>
-      </pc:sldChg>
-      <pc:sldChg chg="modSp add del mod">
-        <pc:chgData name="Xin Luo" userId="82312ee5779919a4" providerId="LiveId" clId="{82BFAA31-791A-9843-976C-3AAFAA5AC07D}" dt="2023-03-05T13:50:34.172" v="6224" actId="1035"/>
-        <pc:sldMkLst>
-          <pc:docMk/>
-          <pc:sldMk cId="1209572041" sldId="2722"/>
-        </pc:sldMkLst>
-      </pc:sldChg>
-      <pc:sldChg chg="add del">
-        <pc:chgData name="Xin Luo" userId="82312ee5779919a4" providerId="LiveId" clId="{82BFAA31-791A-9843-976C-3AAFAA5AC07D}" dt="2023-03-04T02:01:30.300" v="3010" actId="2696"/>
-        <pc:sldMkLst>
-          <pc:docMk/>
-          <pc:sldMk cId="2179406886" sldId="2724"/>
-        </pc:sldMkLst>
-      </pc:sldChg>
-      <pc:sldChg chg="addSp delSp modSp add mod">
-        <pc:chgData name="Xin Luo" userId="82312ee5779919a4" providerId="LiveId" clId="{82BFAA31-791A-9843-976C-3AAFAA5AC07D}" dt="2023-03-04T03:20:48.887" v="3034" actId="1036"/>
-        <pc:sldMkLst>
-          <pc:docMk/>
-          <pc:sldMk cId="4156684215" sldId="2738"/>
-        </pc:sldMkLst>
-      </pc:sldChg>
-      <pc:sldChg chg="delSp modSp add mod">
-        <pc:chgData name="Xin Luo" userId="82312ee5779919a4" providerId="LiveId" clId="{82BFAA31-791A-9843-976C-3AAFAA5AC07D}" dt="2023-03-04T03:45:03.441" v="3776" actId="21"/>
-        <pc:sldMkLst>
-          <pc:docMk/>
-          <pc:sldMk cId="2776132283" sldId="2739"/>
-        </pc:sldMkLst>
-      </pc:sldChg>
-      <pc:sldChg chg="delSp modSp add mod">
-        <pc:chgData name="Xin Luo" userId="82312ee5779919a4" providerId="LiveId" clId="{82BFAA31-791A-9843-976C-3AAFAA5AC07D}" dt="2023-02-24T12:42:54.354" v="2196" actId="20577"/>
-        <pc:sldMkLst>
-          <pc:docMk/>
-          <pc:sldMk cId="2510358707" sldId="2740"/>
-        </pc:sldMkLst>
-      </pc:sldChg>
-      <pc:sldChg chg="add del">
-        <pc:chgData name="Xin Luo" userId="82312ee5779919a4" providerId="LiveId" clId="{82BFAA31-791A-9843-976C-3AAFAA5AC07D}" dt="2023-02-24T12:26:24.988" v="1931"/>
-        <pc:sldMkLst>
-          <pc:docMk/>
-          <pc:sldMk cId="2028886328" sldId="2741"/>
-        </pc:sldMkLst>
-      </pc:sldChg>
-      <pc:sldChg chg="delSp modSp add mod">
-        <pc:chgData name="Xin Luo" userId="82312ee5779919a4" providerId="LiveId" clId="{82BFAA31-791A-9843-976C-3AAFAA5AC07D}" dt="2023-03-04T15:50:04.739" v="6144" actId="1076"/>
-        <pc:sldMkLst>
-          <pc:docMk/>
-          <pc:sldMk cId="2476237792" sldId="2741"/>
-        </pc:sldMkLst>
-      </pc:sldChg>
-      <pc:sldChg chg="addSp delSp modSp add mod">
-        <pc:chgData name="Xin Luo" userId="82312ee5779919a4" providerId="LiveId" clId="{82BFAA31-791A-9843-976C-3AAFAA5AC07D}" dt="2023-03-04T03:03:29.776" v="3020" actId="1036"/>
-        <pc:sldMkLst>
-          <pc:docMk/>
-          <pc:sldMk cId="3151170836" sldId="2742"/>
-        </pc:sldMkLst>
-      </pc:sldChg>
-      <pc:sldChg chg="addSp delSp modSp add mod">
-        <pc:chgData name="Xin Luo" userId="82312ee5779919a4" providerId="LiveId" clId="{82BFAA31-791A-9843-976C-3AAFAA5AC07D}" dt="2023-03-04T03:37:26.975" v="3431" actId="1076"/>
-        <pc:sldMkLst>
-          <pc:docMk/>
-          <pc:sldMk cId="4194482579" sldId="2743"/>
-        </pc:sldMkLst>
-      </pc:sldChg>
-      <pc:sldChg chg="addSp delSp modSp add mod">
-        <pc:chgData name="Xin Luo" userId="82312ee5779919a4" providerId="LiveId" clId="{82BFAA31-791A-9843-976C-3AAFAA5AC07D}" dt="2023-03-04T15:11:00.971" v="4794" actId="2711"/>
-        <pc:sldMkLst>
-          <pc:docMk/>
-          <pc:sldMk cId="3883315984" sldId="2744"/>
-        </pc:sldMkLst>
-      </pc:sldChg>
-      <pc:sldChg chg="modSp add mod">
-        <pc:chgData name="Xin Luo" userId="82312ee5779919a4" providerId="LiveId" clId="{82BFAA31-791A-9843-976C-3AAFAA5AC07D}" dt="2023-03-04T15:21:58.766" v="5230" actId="1038"/>
-        <pc:sldMkLst>
-          <pc:docMk/>
-          <pc:sldMk cId="3741103209" sldId="2745"/>
-        </pc:sldMkLst>
-      </pc:sldChg>
-      <pc:sldChg chg="modSp add mod">
-        <pc:chgData name="Xin Luo" userId="82312ee5779919a4" providerId="LiveId" clId="{82BFAA31-791A-9843-976C-3AAFAA5AC07D}" dt="2023-03-04T15:08:22.005" v="4615" actId="1035"/>
-        <pc:sldMkLst>
-          <pc:docMk/>
-          <pc:sldMk cId="322086101" sldId="2746"/>
-        </pc:sldMkLst>
-      </pc:sldChg>
-      <pc:sldChg chg="addSp modSp add mod">
-        <pc:chgData name="Xin Luo" userId="82312ee5779919a4" providerId="LiveId" clId="{82BFAA31-791A-9843-976C-3AAFAA5AC07D}" dt="2023-03-04T15:26:46.366" v="5547" actId="1076"/>
-        <pc:sldMkLst>
-          <pc:docMk/>
-          <pc:sldMk cId="2920839983" sldId="2747"/>
-        </pc:sldMkLst>
-      </pc:sldChg>
-      <pc:sldChg chg="addSp delSp modSp add mod">
-        <pc:chgData name="Xin Luo" userId="82312ee5779919a4" providerId="LiveId" clId="{82BFAA31-791A-9843-976C-3AAFAA5AC07D}" dt="2023-03-04T15:46:20.499" v="5952" actId="1582"/>
-        <pc:sldMkLst>
-          <pc:docMk/>
-          <pc:sldMk cId="2081473989" sldId="2748"/>
-        </pc:sldMkLst>
-      </pc:sldChg>
-      <pc:sldChg chg="addSp delSp modSp add mod">
-        <pc:chgData name="Xin Luo" userId="82312ee5779919a4" providerId="LiveId" clId="{82BFAA31-791A-9843-976C-3AAFAA5AC07D}" dt="2023-03-04T15:48:59.888" v="6079" actId="1076"/>
-        <pc:sldMkLst>
-          <pc:docMk/>
-          <pc:sldMk cId="1994915307" sldId="2749"/>
-        </pc:sldMkLst>
-      </pc:sldChg>
-      <pc:sldChg chg="addSp delSp modSp add mod">
-        <pc:chgData name="Xin Luo" userId="82312ee5779919a4" providerId="LiveId" clId="{82BFAA31-791A-9843-976C-3AAFAA5AC07D}" dt="2023-03-04T15:43:09.927" v="5903" actId="1035"/>
-        <pc:sldMkLst>
-          <pc:docMk/>
-          <pc:sldMk cId="202264030" sldId="2750"/>
-        </pc:sldMkLst>
-      </pc:sldChg>
-      <pc:sldChg chg="add del">
-        <pc:chgData name="Xin Luo" userId="82312ee5779919a4" providerId="LiveId" clId="{82BFAA31-791A-9843-976C-3AAFAA5AC07D}" dt="2023-03-04T15:46:42.673" v="5956" actId="2696"/>
-        <pc:sldMkLst>
-          <pc:docMk/>
-          <pc:sldMk cId="1628918360" sldId="2751"/>
-        </pc:sldMkLst>
-      </pc:sldChg>
-    </pc:docChg>
-  </pc:docChgLst>
-  <pc:docChgLst>
-    <pc:chgData name="Xin Luo" userId="82312ee5779919a4" providerId="LiveId" clId="{23920C8D-EBCE-A347-9C82-C14316D20539}"/>
-    <pc:docChg chg="undo custSel addSld modSld">
-      <pc:chgData name="Xin Luo" userId="82312ee5779919a4" providerId="LiveId" clId="{23920C8D-EBCE-A347-9C82-C14316D20539}" dt="2022-10-26T12:19:06.428" v="501" actId="767"/>
-      <pc:docMkLst>
-        <pc:docMk/>
-      </pc:docMkLst>
-      <pc:sldChg chg="modSp mod">
-        <pc:chgData name="Xin Luo" userId="82312ee5779919a4" providerId="LiveId" clId="{23920C8D-EBCE-A347-9C82-C14316D20539}" dt="2022-10-10T01:06:29.261" v="368" actId="404"/>
-        <pc:sldMkLst>
-          <pc:docMk/>
-          <pc:sldMk cId="1576120367" sldId="2387"/>
-        </pc:sldMkLst>
-      </pc:sldChg>
-      <pc:sldChg chg="modSp mod">
-        <pc:chgData name="Xin Luo" userId="82312ee5779919a4" providerId="LiveId" clId="{23920C8D-EBCE-A347-9C82-C14316D20539}" dt="2022-10-10T01:06:39.449" v="369" actId="403"/>
-        <pc:sldMkLst>
-          <pc:docMk/>
-          <pc:sldMk cId="2415901206" sldId="2447"/>
-        </pc:sldMkLst>
-      </pc:sldChg>
-      <pc:sldChg chg="addSp delSp modSp mod">
-        <pc:chgData name="Xin Luo" userId="82312ee5779919a4" providerId="LiveId" clId="{23920C8D-EBCE-A347-9C82-C14316D20539}" dt="2022-10-26T11:18:20.490" v="500"/>
-        <pc:sldMkLst>
-          <pc:docMk/>
-          <pc:sldMk cId="2689840772" sldId="2604"/>
-        </pc:sldMkLst>
-      </pc:sldChg>
-      <pc:sldChg chg="modSp mod">
-        <pc:chgData name="Xin Luo" userId="82312ee5779919a4" providerId="LiveId" clId="{23920C8D-EBCE-A347-9C82-C14316D20539}" dt="2022-10-25T11:53:23.523" v="402" actId="207"/>
-        <pc:sldMkLst>
-          <pc:docMk/>
-          <pc:sldMk cId="1392274363" sldId="2606"/>
-        </pc:sldMkLst>
-      </pc:sldChg>
-      <pc:sldChg chg="modSp mod">
-        <pc:chgData name="Xin Luo" userId="82312ee5779919a4" providerId="LiveId" clId="{23920C8D-EBCE-A347-9C82-C14316D20539}" dt="2022-10-25T12:03:26.240" v="414" actId="14100"/>
-        <pc:sldMkLst>
-          <pc:docMk/>
-          <pc:sldMk cId="292605530" sldId="2607"/>
-        </pc:sldMkLst>
-      </pc:sldChg>
-      <pc:sldChg chg="modSp mod">
-        <pc:chgData name="Xin Luo" userId="82312ee5779919a4" providerId="LiveId" clId="{23920C8D-EBCE-A347-9C82-C14316D20539}" dt="2022-10-25T12:09:03.730" v="478" actId="1036"/>
-        <pc:sldMkLst>
-          <pc:docMk/>
-          <pc:sldMk cId="2780969545" sldId="2609"/>
-        </pc:sldMkLst>
-      </pc:sldChg>
-      <pc:sldChg chg="modSp mod">
-        <pc:chgData name="Xin Luo" userId="82312ee5779919a4" providerId="LiveId" clId="{23920C8D-EBCE-A347-9C82-C14316D20539}" dt="2022-10-26T02:56:58.658" v="480" actId="207"/>
-        <pc:sldMkLst>
-          <pc:docMk/>
-          <pc:sldMk cId="63705705" sldId="2612"/>
-        </pc:sldMkLst>
-      </pc:sldChg>
-      <pc:sldChg chg="addSp modSp">
-        <pc:chgData name="Xin Luo" userId="82312ee5779919a4" providerId="LiveId" clId="{23920C8D-EBCE-A347-9C82-C14316D20539}" dt="2022-10-26T12:19:06.428" v="501" actId="767"/>
-        <pc:sldMkLst>
-          <pc:docMk/>
-          <pc:sldMk cId="963926578" sldId="2613"/>
-        </pc:sldMkLst>
-      </pc:sldChg>
-      <pc:sldChg chg="modSp add mod">
-        <pc:chgData name="Xin Luo" userId="82312ee5779919a4" providerId="LiveId" clId="{23920C8D-EBCE-A347-9C82-C14316D20539}" dt="2022-10-10T01:06:02.902" v="365" actId="403"/>
-        <pc:sldMkLst>
-          <pc:docMk/>
-          <pc:sldMk cId="2358282757" sldId="2714"/>
-        </pc:sldMkLst>
-      </pc:sldChg>
-    </pc:docChg>
-  </pc:docChgLst>
-  <pc:docChgLst>
-    <pc:chgData name="Xin Luo" userId="82312ee5779919a4" providerId="LiveId" clId="{A5D610E5-752B-7B4A-889B-D40C860DA0F0}"/>
-    <pc:docChg chg="addSld delSld modSld">
-      <pc:chgData name="Xin Luo" userId="82312ee5779919a4" providerId="LiveId" clId="{A5D610E5-752B-7B4A-889B-D40C860DA0F0}" dt="2025-05-08T15:18:36.457" v="210" actId="2696"/>
-      <pc:docMkLst>
-        <pc:docMk/>
-      </pc:docMkLst>
-      <pc:sldChg chg="modSp mod">
-        <pc:chgData name="Xin Luo" userId="82312ee5779919a4" providerId="LiveId" clId="{A5D610E5-752B-7B4A-889B-D40C860DA0F0}" dt="2025-05-08T15:13:36.832" v="125" actId="20577"/>
-        <pc:sldMkLst>
-          <pc:docMk/>
-          <pc:sldMk cId="1576120367" sldId="2387"/>
-        </pc:sldMkLst>
-        <pc:spChg chg="mod">
-          <ac:chgData name="Xin Luo" userId="82312ee5779919a4" providerId="LiveId" clId="{A5D610E5-752B-7B4A-889B-D40C860DA0F0}" dt="2025-05-08T15:13:05.058" v="119" actId="20577"/>
-          <ac:spMkLst>
-            <pc:docMk/>
-            <pc:sldMk cId="1576120367" sldId="2387"/>
-            <ac:spMk id="12" creationId="{00000000-0000-0000-0000-000000000000}"/>
-          </ac:spMkLst>
-        </pc:spChg>
-        <pc:spChg chg="mod">
-          <ac:chgData name="Xin Luo" userId="82312ee5779919a4" providerId="LiveId" clId="{A5D610E5-752B-7B4A-889B-D40C860DA0F0}" dt="2025-05-08T15:12:58.461" v="107" actId="20577"/>
-          <ac:spMkLst>
-            <pc:docMk/>
-            <pc:sldMk cId="1576120367" sldId="2387"/>
-            <ac:spMk id="14" creationId="{00000000-0000-0000-0000-000000000000}"/>
-          </ac:spMkLst>
-        </pc:spChg>
-      </pc:sldChg>
-      <pc:sldChg chg="modSp mod">
-        <pc:chgData name="Xin Luo" userId="82312ee5779919a4" providerId="LiveId" clId="{A5D610E5-752B-7B4A-889B-D40C860DA0F0}" dt="2025-05-08T15:14:31.896" v="150" actId="20577"/>
-        <pc:sldMkLst>
-          <pc:docMk/>
-          <pc:sldMk cId="2415901206" sldId="2447"/>
-        </pc:sldMkLst>
-      </pc:sldChg>
-      <pc:sldChg chg="modSp mod">
-        <pc:chgData name="Xin Luo" userId="82312ee5779919a4" providerId="LiveId" clId="{A5D610E5-752B-7B4A-889B-D40C860DA0F0}" dt="2025-05-08T15:12:24.990" v="38" actId="20577"/>
-        <pc:sldMkLst>
-          <pc:docMk/>
-          <pc:sldMk cId="1658607177" sldId="2708"/>
-        </pc:sldMkLst>
-        <pc:spChg chg="mod">
-          <ac:chgData name="Xin Luo" userId="82312ee5779919a4" providerId="LiveId" clId="{A5D610E5-752B-7B4A-889B-D40C860DA0F0}" dt="2025-05-08T15:12:24.990" v="38" actId="20577"/>
-          <ac:spMkLst>
-            <pc:docMk/>
-            <pc:sldMk cId="1658607177" sldId="2708"/>
-            <ac:spMk id="3" creationId="{E375549C-74EF-2C8F-6432-2C52B803FB1B}"/>
-          </ac:spMkLst>
-        </pc:spChg>
-        <pc:spChg chg="mod">
-          <ac:chgData name="Xin Luo" userId="82312ee5779919a4" providerId="LiveId" clId="{A5D610E5-752B-7B4A-889B-D40C860DA0F0}" dt="2025-05-08T15:12:20.641" v="34" actId="20577"/>
-          <ac:spMkLst>
-            <pc:docMk/>
-            <pc:sldMk cId="1658607177" sldId="2708"/>
-            <ac:spMk id="24" creationId="{00000000-0000-0000-0000-000000000000}"/>
-          </ac:spMkLst>
-        </pc:spChg>
-      </pc:sldChg>
-      <pc:sldChg chg="modSp mod">
-        <pc:chgData name="Xin Luo" userId="82312ee5779919a4" providerId="LiveId" clId="{A5D610E5-752B-7B4A-889B-D40C860DA0F0}" dt="2025-05-08T15:14:38.806" v="166" actId="20577"/>
-        <pc:sldMkLst>
-          <pc:docMk/>
-          <pc:sldMk cId="481122590" sldId="2709"/>
-        </pc:sldMkLst>
-        <pc:spChg chg="mod">
-          <ac:chgData name="Xin Luo" userId="82312ee5779919a4" providerId="LiveId" clId="{A5D610E5-752B-7B4A-889B-D40C860DA0F0}" dt="2025-05-08T15:14:38.806" v="166" actId="20577"/>
-          <ac:spMkLst>
-            <pc:docMk/>
-            <pc:sldMk cId="481122590" sldId="2709"/>
-            <ac:spMk id="7" creationId="{00000000-0000-0000-0000-000000000000}"/>
-          </ac:spMkLst>
-        </pc:spChg>
-      </pc:sldChg>
-      <pc:sldChg chg="del">
-        <pc:chgData name="Xin Luo" userId="82312ee5779919a4" providerId="LiveId" clId="{A5D610E5-752B-7B4A-889B-D40C860DA0F0}" dt="2025-05-08T15:18:36.427" v="198" actId="2696"/>
-        <pc:sldMkLst>
-          <pc:docMk/>
-          <pc:sldMk cId="3833073590" sldId="2716"/>
-        </pc:sldMkLst>
-      </pc:sldChg>
-      <pc:sldChg chg="modSp mod">
-        <pc:chgData name="Xin Luo" userId="82312ee5779919a4" providerId="LiveId" clId="{A5D610E5-752B-7B4A-889B-D40C860DA0F0}" dt="2025-05-08T15:15:01.919" v="196" actId="20577"/>
-        <pc:sldMkLst>
-          <pc:docMk/>
-          <pc:sldMk cId="972163772" sldId="2720"/>
-        </pc:sldMkLst>
-        <pc:spChg chg="mod">
-          <ac:chgData name="Xin Luo" userId="82312ee5779919a4" providerId="LiveId" clId="{A5D610E5-752B-7B4A-889B-D40C860DA0F0}" dt="2025-05-08T15:15:01.919" v="196" actId="20577"/>
-          <ac:spMkLst>
-            <pc:docMk/>
-            <pc:sldMk cId="972163772" sldId="2720"/>
-            <ac:spMk id="7" creationId="{00000000-0000-0000-0000-000000000000}"/>
-          </ac:spMkLst>
-        </pc:spChg>
-      </pc:sldChg>
-      <pc:sldChg chg="del">
-        <pc:chgData name="Xin Luo" userId="82312ee5779919a4" providerId="LiveId" clId="{A5D610E5-752B-7B4A-889B-D40C860DA0F0}" dt="2025-05-08T15:18:36.438" v="205" actId="2696"/>
-        <pc:sldMkLst>
-          <pc:docMk/>
-          <pc:sldMk cId="2689695864" sldId="2721"/>
-        </pc:sldMkLst>
-      </pc:sldChg>
-      <pc:sldChg chg="add">
-        <pc:chgData name="Xin Luo" userId="82312ee5779919a4" providerId="LiveId" clId="{A5D610E5-752B-7B4A-889B-D40C860DA0F0}" dt="2025-05-08T15:18:29.209" v="197"/>
-        <pc:sldMkLst>
-          <pc:docMk/>
-          <pc:sldMk cId="2826444872" sldId="2723"/>
-        </pc:sldMkLst>
-      </pc:sldChg>
-      <pc:sldChg chg="add">
-        <pc:chgData name="Xin Luo" userId="82312ee5779919a4" providerId="LiveId" clId="{A5D610E5-752B-7B4A-889B-D40C860DA0F0}" dt="2025-05-08T15:18:29.209" v="197"/>
-        <pc:sldMkLst>
-          <pc:docMk/>
-          <pc:sldMk cId="965496355" sldId="2726"/>
-        </pc:sldMkLst>
-      </pc:sldChg>
-      <pc:sldChg chg="del">
-        <pc:chgData name="Xin Luo" userId="82312ee5779919a4" providerId="LiveId" clId="{A5D610E5-752B-7B4A-889B-D40C860DA0F0}" dt="2025-05-08T15:18:36.451" v="208" actId="2696"/>
-        <pc:sldMkLst>
-          <pc:docMk/>
-          <pc:sldMk cId="2510358707" sldId="2740"/>
-        </pc:sldMkLst>
-      </pc:sldChg>
-      <pc:sldChg chg="del">
-        <pc:chgData name="Xin Luo" userId="82312ee5779919a4" providerId="LiveId" clId="{A5D610E5-752B-7B4A-889B-D40C860DA0F0}" dt="2025-05-08T15:18:36.428" v="199" actId="2696"/>
-        <pc:sldMkLst>
-          <pc:docMk/>
-          <pc:sldMk cId="3883315984" sldId="2744"/>
-        </pc:sldMkLst>
-      </pc:sldChg>
-      <pc:sldChg chg="del">
-        <pc:chgData name="Xin Luo" userId="82312ee5779919a4" providerId="LiveId" clId="{A5D610E5-752B-7B4A-889B-D40C860DA0F0}" dt="2025-05-08T15:18:36.439" v="206" actId="2696"/>
-        <pc:sldMkLst>
-          <pc:docMk/>
-          <pc:sldMk cId="3741103209" sldId="2745"/>
-        </pc:sldMkLst>
-      </pc:sldChg>
-      <pc:sldChg chg="del">
-        <pc:chgData name="Xin Luo" userId="82312ee5779919a4" providerId="LiveId" clId="{A5D610E5-752B-7B4A-889B-D40C860DA0F0}" dt="2025-05-08T15:18:36.432" v="203" actId="2696"/>
-        <pc:sldMkLst>
-          <pc:docMk/>
-          <pc:sldMk cId="322086101" sldId="2746"/>
-        </pc:sldMkLst>
-      </pc:sldChg>
-      <pc:sldChg chg="del">
-        <pc:chgData name="Xin Luo" userId="82312ee5779919a4" providerId="LiveId" clId="{A5D610E5-752B-7B4A-889B-D40C860DA0F0}" dt="2025-05-08T15:18:36.429" v="200" actId="2696"/>
-        <pc:sldMkLst>
-          <pc:docMk/>
-          <pc:sldMk cId="2920839983" sldId="2747"/>
-        </pc:sldMkLst>
-      </pc:sldChg>
-      <pc:sldChg chg="del">
-        <pc:chgData name="Xin Luo" userId="82312ee5779919a4" providerId="LiveId" clId="{A5D610E5-752B-7B4A-889B-D40C860DA0F0}" dt="2025-05-08T15:18:36.431" v="202" actId="2696"/>
-        <pc:sldMkLst>
-          <pc:docMk/>
-          <pc:sldMk cId="2081473989" sldId="2748"/>
-        </pc:sldMkLst>
-      </pc:sldChg>
-      <pc:sldChg chg="del">
-        <pc:chgData name="Xin Luo" userId="82312ee5779919a4" providerId="LiveId" clId="{A5D610E5-752B-7B4A-889B-D40C860DA0F0}" dt="2025-05-08T15:18:36.457" v="210" actId="2696"/>
-        <pc:sldMkLst>
-          <pc:docMk/>
-          <pc:sldMk cId="1994915307" sldId="2749"/>
-        </pc:sldMkLst>
-      </pc:sldChg>
-      <pc:sldChg chg="del">
-        <pc:chgData name="Xin Luo" userId="82312ee5779919a4" providerId="LiveId" clId="{A5D610E5-752B-7B4A-889B-D40C860DA0F0}" dt="2025-05-08T15:18:36.430" v="201" actId="2696"/>
-        <pc:sldMkLst>
-          <pc:docMk/>
-          <pc:sldMk cId="202264030" sldId="2750"/>
-        </pc:sldMkLst>
-      </pc:sldChg>
-      <pc:sldChg chg="del">
-        <pc:chgData name="Xin Luo" userId="82312ee5779919a4" providerId="LiveId" clId="{A5D610E5-752B-7B4A-889B-D40C860DA0F0}" dt="2025-05-08T15:18:36.448" v="207" actId="2696"/>
-        <pc:sldMkLst>
-          <pc:docMk/>
-          <pc:sldMk cId="2371836296" sldId="2756"/>
-        </pc:sldMkLst>
-      </pc:sldChg>
-      <pc:sldChg chg="del">
-        <pc:chgData name="Xin Luo" userId="82312ee5779919a4" providerId="LiveId" clId="{A5D610E5-752B-7B4A-889B-D40C860DA0F0}" dt="2025-05-08T15:18:36.437" v="204" actId="2696"/>
-        <pc:sldMkLst>
-          <pc:docMk/>
-          <pc:sldMk cId="397779649" sldId="2757"/>
-        </pc:sldMkLst>
-      </pc:sldChg>
-      <pc:sldChg chg="del">
-        <pc:chgData name="Xin Luo" userId="82312ee5779919a4" providerId="LiveId" clId="{A5D610E5-752B-7B4A-889B-D40C860DA0F0}" dt="2025-05-08T15:18:36.455" v="209" actId="2696"/>
-        <pc:sldMkLst>
-          <pc:docMk/>
-          <pc:sldMk cId="1878724924" sldId="2758"/>
-        </pc:sldMkLst>
-      </pc:sldChg>
-      <pc:sldChg chg="add">
-        <pc:chgData name="Xin Luo" userId="82312ee5779919a4" providerId="LiveId" clId="{A5D610E5-752B-7B4A-889B-D40C860DA0F0}" dt="2025-05-08T15:18:29.209" v="197"/>
-        <pc:sldMkLst>
-          <pc:docMk/>
-          <pc:sldMk cId="3506380824" sldId="2764"/>
-        </pc:sldMkLst>
-      </pc:sldChg>
-    </pc:docChg>
-  </pc:docChgLst>
-  <pc:docChgLst>
-    <pc:chgData name="Xin Luo" userId="82312ee5779919a4" providerId="LiveId" clId="{4DB6C473-8E57-A543-81F7-48BE109E8C13}"/>
-    <pc:docChg chg="undo custSel addSld delSld modSld sldOrd delMainMaster">
-      <pc:chgData name="Xin Luo" userId="82312ee5779919a4" providerId="LiveId" clId="{4DB6C473-8E57-A543-81F7-48BE109E8C13}" dt="2023-02-21T15:10:04.498" v="5724" actId="108"/>
-      <pc:docMkLst>
-        <pc:docMk/>
-      </pc:docMkLst>
-      <pc:sldChg chg="addSp delSp modSp mod">
-        <pc:chgData name="Xin Luo" userId="82312ee5779919a4" providerId="LiveId" clId="{4DB6C473-8E57-A543-81F7-48BE109E8C13}" dt="2023-02-21T08:54:32.554" v="3595" actId="1076"/>
-        <pc:sldMkLst>
-          <pc:docMk/>
-          <pc:sldMk cId="1576120367" sldId="2387"/>
-        </pc:sldMkLst>
-      </pc:sldChg>
-      <pc:sldChg chg="del">
-        <pc:chgData name="Xin Luo" userId="82312ee5779919a4" providerId="LiveId" clId="{4DB6C473-8E57-A543-81F7-48BE109E8C13}" dt="2023-02-21T08:54:15.767" v="3575" actId="2696"/>
-        <pc:sldMkLst>
-          <pc:docMk/>
-          <pc:sldMk cId="0" sldId="2446"/>
-        </pc:sldMkLst>
-      </pc:sldChg>
-      <pc:sldChg chg="modSp mod ord">
-        <pc:chgData name="Xin Luo" userId="82312ee5779919a4" providerId="LiveId" clId="{4DB6C473-8E57-A543-81F7-48BE109E8C13}" dt="2023-02-21T06:59:18.091" v="3225" actId="20578"/>
-        <pc:sldMkLst>
-          <pc:docMk/>
-          <pc:sldMk cId="2415901206" sldId="2447"/>
-        </pc:sldMkLst>
-      </pc:sldChg>
-      <pc:sldChg chg="addSp delSp modSp mod ord">
-        <pc:chgData name="Xin Luo" userId="82312ee5779919a4" providerId="LiveId" clId="{4DB6C473-8E57-A543-81F7-48BE109E8C13}" dt="2023-02-21T07:23:56.843" v="3356" actId="20577"/>
-        <pc:sldMkLst>
-          <pc:docMk/>
-          <pc:sldMk cId="4067577602" sldId="2605"/>
-        </pc:sldMkLst>
-      </pc:sldChg>
-      <pc:sldChg chg="del">
-        <pc:chgData name="Xin Luo" userId="82312ee5779919a4" providerId="LiveId" clId="{4DB6C473-8E57-A543-81F7-48BE109E8C13}" dt="2023-02-21T14:49:50.253" v="5372" actId="2696"/>
-        <pc:sldMkLst>
-          <pc:docMk/>
-          <pc:sldMk cId="963926578" sldId="2613"/>
-        </pc:sldMkLst>
-      </pc:sldChg>
-      <pc:sldChg chg="del">
-        <pc:chgData name="Xin Luo" userId="82312ee5779919a4" providerId="LiveId" clId="{4DB6C473-8E57-A543-81F7-48BE109E8C13}" dt="2023-02-21T14:49:50.286" v="5373" actId="2696"/>
-        <pc:sldMkLst>
-          <pc:docMk/>
-          <pc:sldMk cId="1377829391" sldId="2689"/>
-        </pc:sldMkLst>
-      </pc:sldChg>
-      <pc:sldChg chg="del">
-        <pc:chgData name="Xin Luo" userId="82312ee5779919a4" providerId="LiveId" clId="{4DB6C473-8E57-A543-81F7-48BE109E8C13}" dt="2023-02-21T14:49:50.299" v="5374" actId="2696"/>
-        <pc:sldMkLst>
-          <pc:docMk/>
-          <pc:sldMk cId="2843640805" sldId="2704"/>
-        </pc:sldMkLst>
-      </pc:sldChg>
-      <pc:sldChg chg="delSp modSp add mod ord">
-        <pc:chgData name="Xin Luo" userId="82312ee5779919a4" providerId="LiveId" clId="{4DB6C473-8E57-A543-81F7-48BE109E8C13}" dt="2023-02-21T05:54:53.172" v="2328" actId="113"/>
-        <pc:sldMkLst>
-          <pc:docMk/>
-          <pc:sldMk cId="2688334957" sldId="2705"/>
-        </pc:sldMkLst>
-      </pc:sldChg>
-      <pc:sldChg chg="modSp add mod">
-        <pc:chgData name="Xin Luo" userId="82312ee5779919a4" providerId="LiveId" clId="{4DB6C473-8E57-A543-81F7-48BE109E8C13}" dt="2023-02-21T05:59:45.306" v="2357" actId="2711"/>
-        <pc:sldMkLst>
-          <pc:docMk/>
-          <pc:sldMk cId="2464444856" sldId="2706"/>
-        </pc:sldMkLst>
-      </pc:sldChg>
-      <pc:sldChg chg="modSp add mod">
-        <pc:chgData name="Xin Luo" userId="82312ee5779919a4" providerId="LiveId" clId="{4DB6C473-8E57-A543-81F7-48BE109E8C13}" dt="2023-02-21T06:00:27.005" v="2362" actId="113"/>
-        <pc:sldMkLst>
-          <pc:docMk/>
-          <pc:sldMk cId="1602808061" sldId="2707"/>
-        </pc:sldMkLst>
-      </pc:sldChg>
-      <pc:sldChg chg="addSp modSp add mod">
-        <pc:chgData name="Xin Luo" userId="82312ee5779919a4" providerId="LiveId" clId="{4DB6C473-8E57-A543-81F7-48BE109E8C13}" dt="2023-02-21T03:24:12.660" v="1798" actId="207"/>
-        <pc:sldMkLst>
-          <pc:docMk/>
-          <pc:sldMk cId="1658607177" sldId="2708"/>
-        </pc:sldMkLst>
-      </pc:sldChg>
-      <pc:sldChg chg="add del setBg">
-        <pc:chgData name="Xin Luo" userId="82312ee5779919a4" providerId="LiveId" clId="{4DB6C473-8E57-A543-81F7-48BE109E8C13}" dt="2023-02-21T03:21:36.224" v="1707"/>
-        <pc:sldMkLst>
-          <pc:docMk/>
-          <pc:sldMk cId="3430641667" sldId="2708"/>
-        </pc:sldMkLst>
-      </pc:sldChg>
-      <pc:sldChg chg="modSp add mod ord">
-        <pc:chgData name="Xin Luo" userId="82312ee5779919a4" providerId="LiveId" clId="{4DB6C473-8E57-A543-81F7-48BE109E8C13}" dt="2023-02-21T07:27:15.123" v="3399" actId="20578"/>
-        <pc:sldMkLst>
-          <pc:docMk/>
-          <pc:sldMk cId="1257969106" sldId="2709"/>
-        </pc:sldMkLst>
-      </pc:sldChg>
-      <pc:sldChg chg="add del setBg">
-        <pc:chgData name="Xin Luo" userId="82312ee5779919a4" providerId="LiveId" clId="{4DB6C473-8E57-A543-81F7-48BE109E8C13}" dt="2023-02-21T03:22:38.148" v="1735"/>
-        <pc:sldMkLst>
-          <pc:docMk/>
-          <pc:sldMk cId="2068292362" sldId="2709"/>
-        </pc:sldMkLst>
-      </pc:sldChg>
-      <pc:sldChg chg="add del setBg">
-        <pc:chgData name="Xin Luo" userId="82312ee5779919a4" providerId="LiveId" clId="{4DB6C473-8E57-A543-81F7-48BE109E8C13}" dt="2023-02-21T03:22:29.206" v="1733"/>
-        <pc:sldMkLst>
-          <pc:docMk/>
-          <pc:sldMk cId="4244071672" sldId="2709"/>
-        </pc:sldMkLst>
-      </pc:sldChg>
-      <pc:sldChg chg="modSp add del mod">
-        <pc:chgData name="Xin Luo" userId="82312ee5779919a4" providerId="LiveId" clId="{4DB6C473-8E57-A543-81F7-48BE109E8C13}" dt="2023-02-21T12:49:10.754" v="4207" actId="2696"/>
-        <pc:sldMkLst>
-          <pc:docMk/>
-          <pc:sldMk cId="4096743637" sldId="2710"/>
-        </pc:sldMkLst>
-      </pc:sldChg>
-      <pc:sldChg chg="addSp delSp modSp add mod">
-        <pc:chgData name="Xin Luo" userId="82312ee5779919a4" providerId="LiveId" clId="{4DB6C473-8E57-A543-81F7-48BE109E8C13}" dt="2023-02-21T15:08:47.651" v="5619" actId="113"/>
-        <pc:sldMkLst>
-          <pc:docMk/>
-          <pc:sldMk cId="2744383376" sldId="2711"/>
-        </pc:sldMkLst>
-      </pc:sldChg>
-      <pc:sldChg chg="delSp modSp add del mod">
-        <pc:chgData name="Xin Luo" userId="82312ee5779919a4" providerId="LiveId" clId="{4DB6C473-8E57-A543-81F7-48BE109E8C13}" dt="2023-02-21T07:27:24.620" v="3402" actId="2696"/>
-        <pc:sldMkLst>
-          <pc:docMk/>
-          <pc:sldMk cId="1581220802" sldId="2712"/>
-        </pc:sldMkLst>
-      </pc:sldChg>
-      <pc:sldChg chg="modSp add del mod">
-        <pc:chgData name="Xin Luo" userId="82312ee5779919a4" providerId="LiveId" clId="{4DB6C473-8E57-A543-81F7-48BE109E8C13}" dt="2023-02-21T07:24:13.066" v="3357" actId="2696"/>
-        <pc:sldMkLst>
-          <pc:docMk/>
-          <pc:sldMk cId="2395170792" sldId="2713"/>
-        </pc:sldMkLst>
-      </pc:sldChg>
-      <pc:sldChg chg="addSp modSp add mod">
-        <pc:chgData name="Xin Luo" userId="82312ee5779919a4" providerId="LiveId" clId="{4DB6C473-8E57-A543-81F7-48BE109E8C13}" dt="2023-02-21T07:23:52.393" v="3353" actId="20577"/>
-        <pc:sldMkLst>
-          <pc:docMk/>
-          <pc:sldMk cId="280619949" sldId="2714"/>
-        </pc:sldMkLst>
-      </pc:sldChg>
-      <pc:sldChg chg="addSp modSp add mod">
-        <pc:chgData name="Xin Luo" userId="82312ee5779919a4" providerId="LiveId" clId="{4DB6C473-8E57-A543-81F7-48BE109E8C13}" dt="2023-02-21T13:47:35.461" v="4912" actId="1076"/>
-        <pc:sldMkLst>
-          <pc:docMk/>
-          <pc:sldMk cId="3852391939" sldId="2715"/>
-        </pc:sldMkLst>
-      </pc:sldChg>
-      <pc:sldChg chg="addSp modSp add mod ord">
-        <pc:chgData name="Xin Luo" userId="82312ee5779919a4" providerId="LiveId" clId="{4DB6C473-8E57-A543-81F7-48BE109E8C13}" dt="2023-02-21T13:15:30.678" v="4562" actId="1035"/>
-        <pc:sldMkLst>
-          <pc:docMk/>
-          <pc:sldMk cId="3026715585" sldId="2716"/>
-        </pc:sldMkLst>
-      </pc:sldChg>
-      <pc:sldChg chg="addSp modSp add mod">
-        <pc:chgData name="Xin Luo" userId="82312ee5779919a4" providerId="LiveId" clId="{4DB6C473-8E57-A543-81F7-48BE109E8C13}" dt="2023-02-21T13:48:38.001" v="4936" actId="1076"/>
-        <pc:sldMkLst>
-          <pc:docMk/>
-          <pc:sldMk cId="4136986794" sldId="2717"/>
-        </pc:sldMkLst>
-      </pc:sldChg>
-      <pc:sldChg chg="addSp delSp modSp add mod">
-        <pc:chgData name="Xin Luo" userId="82312ee5779919a4" providerId="LiveId" clId="{4DB6C473-8E57-A543-81F7-48BE109E8C13}" dt="2023-02-21T14:08:09.514" v="5152" actId="1035"/>
-        <pc:sldMkLst>
-          <pc:docMk/>
-          <pc:sldMk cId="1778017482" sldId="2718"/>
-        </pc:sldMkLst>
-      </pc:sldChg>
-      <pc:sldChg chg="delSp modSp add mod">
-        <pc:chgData name="Xin Luo" userId="82312ee5779919a4" providerId="LiveId" clId="{4DB6C473-8E57-A543-81F7-48BE109E8C13}" dt="2023-02-21T15:10:04.498" v="5724" actId="108"/>
-        <pc:sldMkLst>
-          <pc:docMk/>
-          <pc:sldMk cId="1858913004" sldId="2719"/>
-        </pc:sldMkLst>
-      </pc:sldChg>
-      <pc:sldChg chg="addSp delSp modSp add mod ord">
-        <pc:chgData name="Xin Luo" userId="82312ee5779919a4" providerId="LiveId" clId="{4DB6C473-8E57-A543-81F7-48BE109E8C13}" dt="2023-02-21T15:06:45.211" v="5600" actId="20578"/>
-        <pc:sldMkLst>
-          <pc:docMk/>
-          <pc:sldMk cId="3480831675" sldId="2720"/>
-        </pc:sldMkLst>
-      </pc:sldChg>
-      <pc:sldChg chg="add del">
-        <pc:chgData name="Xin Luo" userId="82312ee5779919a4" providerId="LiveId" clId="{4DB6C473-8E57-A543-81F7-48BE109E8C13}" dt="2023-02-21T14:55:30.326" v="5468" actId="2696"/>
-        <pc:sldMkLst>
-          <pc:docMk/>
-          <pc:sldMk cId="120373349" sldId="2721"/>
-        </pc:sldMkLst>
-      </pc:sldChg>
-      <pc:sldChg chg="addSp delSp modSp add mod ord">
-        <pc:chgData name="Xin Luo" userId="82312ee5779919a4" providerId="LiveId" clId="{4DB6C473-8E57-A543-81F7-48BE109E8C13}" dt="2023-02-21T15:06:40.684" v="5599" actId="20578"/>
-        <pc:sldMkLst>
-          <pc:docMk/>
-          <pc:sldMk cId="1410676903" sldId="2721"/>
-        </pc:sldMkLst>
-      </pc:sldChg>
-      <pc:sldMasterChg chg="del delSldLayout">
-        <pc:chgData name="Xin Luo" userId="82312ee5779919a4" providerId="LiveId" clId="{4DB6C473-8E57-A543-81F7-48BE109E8C13}" dt="2023-02-21T08:54:15.791" v="3593" actId="2696"/>
-        <pc:sldMasterMkLst>
-          <pc:docMk/>
-          <pc:sldMasterMk cId="1248561168" sldId="2147484998"/>
-        </pc:sldMasterMkLst>
-        <pc:sldLayoutChg chg="del">
-          <pc:chgData name="Xin Luo" userId="82312ee5779919a4" providerId="LiveId" clId="{4DB6C473-8E57-A543-81F7-48BE109E8C13}" dt="2023-02-21T08:54:15.772" v="3576" actId="2696"/>
-          <pc:sldLayoutMkLst>
-            <pc:docMk/>
-            <pc:sldMasterMk cId="1248561168" sldId="2147484998"/>
-            <pc:sldLayoutMk cId="2755518727" sldId="2147484999"/>
-          </pc:sldLayoutMkLst>
-        </pc:sldLayoutChg>
-        <pc:sldLayoutChg chg="del">
-          <pc:chgData name="Xin Luo" userId="82312ee5779919a4" providerId="LiveId" clId="{4DB6C473-8E57-A543-81F7-48BE109E8C13}" dt="2023-02-21T08:54:15.773" v="3577" actId="2696"/>
-          <pc:sldLayoutMkLst>
-            <pc:docMk/>
-            <pc:sldMasterMk cId="1248561168" sldId="2147484998"/>
-            <pc:sldLayoutMk cId="784447712" sldId="2147485000"/>
-          </pc:sldLayoutMkLst>
-        </pc:sldLayoutChg>
-        <pc:sldLayoutChg chg="del">
-          <pc:chgData name="Xin Luo" userId="82312ee5779919a4" providerId="LiveId" clId="{4DB6C473-8E57-A543-81F7-48BE109E8C13}" dt="2023-02-21T08:54:15.774" v="3578" actId="2696"/>
-          <pc:sldLayoutMkLst>
-            <pc:docMk/>
-            <pc:sldMasterMk cId="1248561168" sldId="2147484998"/>
-            <pc:sldLayoutMk cId="36404751" sldId="2147485001"/>
-          </pc:sldLayoutMkLst>
-        </pc:sldLayoutChg>
-        <pc:sldLayoutChg chg="del">
-          <pc:chgData name="Xin Luo" userId="82312ee5779919a4" providerId="LiveId" clId="{4DB6C473-8E57-A543-81F7-48BE109E8C13}" dt="2023-02-21T08:54:15.775" v="3579" actId="2696"/>
-          <pc:sldLayoutMkLst>
-            <pc:docMk/>
-            <pc:sldMasterMk cId="1248561168" sldId="2147484998"/>
-            <pc:sldLayoutMk cId="2142531553" sldId="2147485002"/>
-          </pc:sldLayoutMkLst>
-        </pc:sldLayoutChg>
-        <pc:sldLayoutChg chg="del">
-          <pc:chgData name="Xin Luo" userId="82312ee5779919a4" providerId="LiveId" clId="{4DB6C473-8E57-A543-81F7-48BE109E8C13}" dt="2023-02-21T08:54:15.776" v="3580" actId="2696"/>
-          <pc:sldLayoutMkLst>
-            <pc:docMk/>
-            <pc:sldMasterMk cId="1248561168" sldId="2147484998"/>
-            <pc:sldLayoutMk cId="646270699" sldId="2147485003"/>
-          </pc:sldLayoutMkLst>
-        </pc:sldLayoutChg>
-        <pc:sldLayoutChg chg="del">
-          <pc:chgData name="Xin Luo" userId="82312ee5779919a4" providerId="LiveId" clId="{4DB6C473-8E57-A543-81F7-48BE109E8C13}" dt="2023-02-21T08:54:15.777" v="3581" actId="2696"/>
-          <pc:sldLayoutMkLst>
-            <pc:docMk/>
-            <pc:sldMasterMk cId="1248561168" sldId="2147484998"/>
-            <pc:sldLayoutMk cId="1316154404" sldId="2147485004"/>
-          </pc:sldLayoutMkLst>
-        </pc:sldLayoutChg>
-        <pc:sldLayoutChg chg="del">
-          <pc:chgData name="Xin Luo" userId="82312ee5779919a4" providerId="LiveId" clId="{4DB6C473-8E57-A543-81F7-48BE109E8C13}" dt="2023-02-21T08:54:15.778" v="3582" actId="2696"/>
-          <pc:sldLayoutMkLst>
-            <pc:docMk/>
-            <pc:sldMasterMk cId="1248561168" sldId="2147484998"/>
-            <pc:sldLayoutMk cId="275448905" sldId="2147485005"/>
-          </pc:sldLayoutMkLst>
-        </pc:sldLayoutChg>
-        <pc:sldLayoutChg chg="del">
-          <pc:chgData name="Xin Luo" userId="82312ee5779919a4" providerId="LiveId" clId="{4DB6C473-8E57-A543-81F7-48BE109E8C13}" dt="2023-02-21T08:54:15.779" v="3583" actId="2696"/>
-          <pc:sldLayoutMkLst>
-            <pc:docMk/>
-            <pc:sldMasterMk cId="1248561168" sldId="2147484998"/>
-            <pc:sldLayoutMk cId="3173493555" sldId="2147485006"/>
-          </pc:sldLayoutMkLst>
-        </pc:sldLayoutChg>
-        <pc:sldLayoutChg chg="del">
-          <pc:chgData name="Xin Luo" userId="82312ee5779919a4" providerId="LiveId" clId="{4DB6C473-8E57-A543-81F7-48BE109E8C13}" dt="2023-02-21T08:54:15.780" v="3584" actId="2696"/>
-          <pc:sldLayoutMkLst>
-            <pc:docMk/>
-            <pc:sldMasterMk cId="1248561168" sldId="2147484998"/>
-            <pc:sldLayoutMk cId="2494408642" sldId="2147485007"/>
-          </pc:sldLayoutMkLst>
-        </pc:sldLayoutChg>
-        <pc:sldLayoutChg chg="del">
-          <pc:chgData name="Xin Luo" userId="82312ee5779919a4" providerId="LiveId" clId="{4DB6C473-8E57-A543-81F7-48BE109E8C13}" dt="2023-02-21T08:54:15.781" v="3585" actId="2696"/>
-          <pc:sldLayoutMkLst>
-            <pc:docMk/>
-            <pc:sldMasterMk cId="1248561168" sldId="2147484998"/>
-            <pc:sldLayoutMk cId="2144339703" sldId="2147485008"/>
-          </pc:sldLayoutMkLst>
-        </pc:sldLayoutChg>
-        <pc:sldLayoutChg chg="del">
-          <pc:chgData name="Xin Luo" userId="82312ee5779919a4" providerId="LiveId" clId="{4DB6C473-8E57-A543-81F7-48BE109E8C13}" dt="2023-02-21T08:54:15.781" v="3586" actId="2696"/>
-          <pc:sldLayoutMkLst>
-            <pc:docMk/>
-            <pc:sldMasterMk cId="1248561168" sldId="2147484998"/>
-            <pc:sldLayoutMk cId="3933479768" sldId="2147485009"/>
-          </pc:sldLayoutMkLst>
-        </pc:sldLayoutChg>
-        <pc:sldLayoutChg chg="del">
-          <pc:chgData name="Xin Luo" userId="82312ee5779919a4" providerId="LiveId" clId="{4DB6C473-8E57-A543-81F7-48BE109E8C13}" dt="2023-02-21T08:54:15.782" v="3587" actId="2696"/>
-          <pc:sldLayoutMkLst>
-            <pc:docMk/>
-            <pc:sldMasterMk cId="1248561168" sldId="2147484998"/>
-            <pc:sldLayoutMk cId="2569911404" sldId="2147485010"/>
-          </pc:sldLayoutMkLst>
-        </pc:sldLayoutChg>
-        <pc:sldLayoutChg chg="del">
-          <pc:chgData name="Xin Luo" userId="82312ee5779919a4" providerId="LiveId" clId="{4DB6C473-8E57-A543-81F7-48BE109E8C13}" dt="2023-02-21T08:54:15.783" v="3588" actId="2696"/>
-          <pc:sldLayoutMkLst>
-            <pc:docMk/>
-            <pc:sldMasterMk cId="1248561168" sldId="2147484998"/>
-            <pc:sldLayoutMk cId="487309151" sldId="2147485011"/>
-          </pc:sldLayoutMkLst>
-        </pc:sldLayoutChg>
-        <pc:sldLayoutChg chg="del">
-          <pc:chgData name="Xin Luo" userId="82312ee5779919a4" providerId="LiveId" clId="{4DB6C473-8E57-A543-81F7-48BE109E8C13}" dt="2023-02-21T08:54:15.784" v="3589" actId="2696"/>
-          <pc:sldLayoutMkLst>
-            <pc:docMk/>
-            <pc:sldMasterMk cId="1248561168" sldId="2147484998"/>
-            <pc:sldLayoutMk cId="940838525" sldId="2147485012"/>
-          </pc:sldLayoutMkLst>
-        </pc:sldLayoutChg>
-        <pc:sldLayoutChg chg="del">
-          <pc:chgData name="Xin Luo" userId="82312ee5779919a4" providerId="LiveId" clId="{4DB6C473-8E57-A543-81F7-48BE109E8C13}" dt="2023-02-21T08:54:15.785" v="3590" actId="2696"/>
-          <pc:sldLayoutMkLst>
-            <pc:docMk/>
-            <pc:sldMasterMk cId="1248561168" sldId="2147484998"/>
-            <pc:sldLayoutMk cId="858249230" sldId="2147485013"/>
-          </pc:sldLayoutMkLst>
-        </pc:sldLayoutChg>
-        <pc:sldLayoutChg chg="del">
-          <pc:chgData name="Xin Luo" userId="82312ee5779919a4" providerId="LiveId" clId="{4DB6C473-8E57-A543-81F7-48BE109E8C13}" dt="2023-02-21T08:54:15.786" v="3591" actId="2696"/>
-          <pc:sldLayoutMkLst>
-            <pc:docMk/>
-            <pc:sldMasterMk cId="1248561168" sldId="2147484998"/>
-            <pc:sldLayoutMk cId="1094809115" sldId="2147485014"/>
-          </pc:sldLayoutMkLst>
-        </pc:sldLayoutChg>
-        <pc:sldLayoutChg chg="del">
-          <pc:chgData name="Xin Luo" userId="82312ee5779919a4" providerId="LiveId" clId="{4DB6C473-8E57-A543-81F7-48BE109E8C13}" dt="2023-02-21T08:54:15.787" v="3592" actId="2696"/>
-          <pc:sldLayoutMkLst>
-            <pc:docMk/>
-            <pc:sldMasterMk cId="1248561168" sldId="2147484998"/>
-            <pc:sldLayoutMk cId="2452001345" sldId="2147485015"/>
-          </pc:sldLayoutMkLst>
-        </pc:sldLayoutChg>
-      </pc:sldMasterChg>
-    </pc:docChg>
-  </pc:docChgLst>
-  <pc:docChgLst>
-    <pc:chgData name="Xin Luo" userId="82312ee5779919a4" providerId="LiveId" clId="{743256A7-6CE7-B242-894F-C640845B5FDB}"/>
-    <pc:docChg chg="addSld delSld modSld">
-      <pc:chgData name="Xin Luo" userId="82312ee5779919a4" providerId="LiveId" clId="{743256A7-6CE7-B242-894F-C640845B5FDB}" dt="2025-05-08T15:21:00.183" v="109" actId="2696"/>
-      <pc:docMkLst>
-        <pc:docMk/>
-      </pc:docMkLst>
-      <pc:sldChg chg="modSp mod">
-        <pc:chgData name="Xin Luo" userId="82312ee5779919a4" providerId="LiveId" clId="{743256A7-6CE7-B242-894F-C640845B5FDB}" dt="2025-05-08T15:20:37.707" v="84" actId="20577"/>
-        <pc:sldMkLst>
-          <pc:docMk/>
-          <pc:sldMk cId="1576120367" sldId="2387"/>
-        </pc:sldMkLst>
-        <pc:spChg chg="mod">
-          <ac:chgData name="Xin Luo" userId="82312ee5779919a4" providerId="LiveId" clId="{743256A7-6CE7-B242-894F-C640845B5FDB}" dt="2025-05-08T15:20:37.707" v="84" actId="20577"/>
-          <ac:spMkLst>
-            <pc:docMk/>
-            <pc:sldMk cId="1576120367" sldId="2387"/>
-            <ac:spMk id="12" creationId="{00000000-0000-0000-0000-000000000000}"/>
-          </ac:spMkLst>
-        </pc:spChg>
-        <pc:spChg chg="mod">
-          <ac:chgData name="Xin Luo" userId="82312ee5779919a4" providerId="LiveId" clId="{743256A7-6CE7-B242-894F-C640845B5FDB}" dt="2025-05-08T15:20:26.333" v="64" actId="20577"/>
-          <ac:spMkLst>
-            <pc:docMk/>
-            <pc:sldMk cId="1576120367" sldId="2387"/>
-            <ac:spMk id="14" creationId="{00000000-0000-0000-0000-000000000000}"/>
-          </ac:spMkLst>
-        </pc:spChg>
-      </pc:sldChg>
-      <pc:sldChg chg="modSp mod">
-        <pc:chgData name="Xin Luo" userId="82312ee5779919a4" providerId="LiveId" clId="{743256A7-6CE7-B242-894F-C640845B5FDB}" dt="2025-05-08T15:20:46.798" v="105" actId="20577"/>
-        <pc:sldMkLst>
-          <pc:docMk/>
-          <pc:sldMk cId="2415901206" sldId="2447"/>
-        </pc:sldMkLst>
-      </pc:sldChg>
-      <pc:sldChg chg="modSp mod">
-        <pc:chgData name="Xin Luo" userId="82312ee5779919a4" providerId="LiveId" clId="{743256A7-6CE7-B242-894F-C640845B5FDB}" dt="2025-05-08T15:19:20.037" v="22" actId="20577"/>
-        <pc:sldMkLst>
-          <pc:docMk/>
-          <pc:sldMk cId="1658607177" sldId="2708"/>
-        </pc:sldMkLst>
-        <pc:spChg chg="mod">
-          <ac:chgData name="Xin Luo" userId="82312ee5779919a4" providerId="LiveId" clId="{743256A7-6CE7-B242-894F-C640845B5FDB}" dt="2025-05-08T15:19:20.037" v="22" actId="20577"/>
-          <ac:spMkLst>
-            <pc:docMk/>
-            <pc:sldMk cId="1658607177" sldId="2708"/>
-            <ac:spMk id="3" creationId="{E375549C-74EF-2C8F-6432-2C52B803FB1B}"/>
-          </ac:spMkLst>
-        </pc:spChg>
-        <pc:spChg chg="mod">
-          <ac:chgData name="Xin Luo" userId="82312ee5779919a4" providerId="LiveId" clId="{743256A7-6CE7-B242-894F-C640845B5FDB}" dt="2025-05-08T15:19:16.924" v="19" actId="20577"/>
-          <ac:spMkLst>
-            <pc:docMk/>
-            <pc:sldMk cId="1658607177" sldId="2708"/>
-            <ac:spMk id="24" creationId="{00000000-0000-0000-0000-000000000000}"/>
-          </ac:spMkLst>
-        </pc:spChg>
-      </pc:sldChg>
-      <pc:sldChg chg="del">
-        <pc:chgData name="Xin Luo" userId="82312ee5779919a4" providerId="LiveId" clId="{743256A7-6CE7-B242-894F-C640845B5FDB}" dt="2025-05-08T15:21:00.169" v="107" actId="2696"/>
-        <pc:sldMkLst>
-          <pc:docMk/>
-          <pc:sldMk cId="2826444872" sldId="2723"/>
-        </pc:sldMkLst>
-      </pc:sldChg>
-      <pc:sldChg chg="del">
-        <pc:chgData name="Xin Luo" userId="82312ee5779919a4" providerId="LiveId" clId="{743256A7-6CE7-B242-894F-C640845B5FDB}" dt="2025-05-08T15:21:00.180" v="108" actId="2696"/>
-        <pc:sldMkLst>
-          <pc:docMk/>
-          <pc:sldMk cId="965496355" sldId="2726"/>
-        </pc:sldMkLst>
-      </pc:sldChg>
-      <pc:sldChg chg="add">
-        <pc:chgData name="Xin Luo" userId="82312ee5779919a4" providerId="LiveId" clId="{743256A7-6CE7-B242-894F-C640845B5FDB}" dt="2025-05-08T15:20:56.193" v="106"/>
-        <pc:sldMkLst>
-          <pc:docMk/>
-          <pc:sldMk cId="2742362314" sldId="2727"/>
-        </pc:sldMkLst>
-      </pc:sldChg>
-      <pc:sldChg chg="add">
-        <pc:chgData name="Xin Luo" userId="82312ee5779919a4" providerId="LiveId" clId="{743256A7-6CE7-B242-894F-C640845B5FDB}" dt="2025-05-08T15:20:56.193" v="106"/>
-        <pc:sldMkLst>
-          <pc:docMk/>
-          <pc:sldMk cId="3682048310" sldId="2728"/>
-        </pc:sldMkLst>
-      </pc:sldChg>
-      <pc:sldChg chg="add">
-        <pc:chgData name="Xin Luo" userId="82312ee5779919a4" providerId="LiveId" clId="{743256A7-6CE7-B242-894F-C640845B5FDB}" dt="2025-05-08T15:20:56.193" v="106"/>
-        <pc:sldMkLst>
-          <pc:docMk/>
-          <pc:sldMk cId="13868781" sldId="2732"/>
-        </pc:sldMkLst>
-      </pc:sldChg>
-      <pc:sldChg chg="del">
-        <pc:chgData name="Xin Luo" userId="82312ee5779919a4" providerId="LiveId" clId="{743256A7-6CE7-B242-894F-C640845B5FDB}" dt="2025-05-08T15:21:00.183" v="109" actId="2696"/>
-        <pc:sldMkLst>
-          <pc:docMk/>
-          <pc:sldMk cId="3506380824" sldId="2764"/>
-        </pc:sldMkLst>
       </pc:sldChg>
     </pc:docChg>
   </pc:docChgLst>
@@ -17697,7 +14552,7 @@
         <p:spPr>
           <a:xfrm>
             <a:off x="552734" y="937433"/>
-            <a:ext cx="9984639" cy="743986"/>
+            <a:ext cx="9984639" cy="738664"/>
           </a:xfrm>
           <a:prstGeom prst="rect">
             <a:avLst/>
@@ -17736,14 +14591,24 @@
               <a:t>-</a:t>
             </a:r>
             <a:r>
-              <a:rPr lang="zh-CN" altLang="en-US" sz="3200" b="1" dirty="0">
+              <a:rPr lang="en-US" sz="3200" b="1" dirty="0">
                 <a:solidFill>
                   <a:srgbClr val="333333"/>
                 </a:solidFill>
                 <a:latin typeface="+mn-ea"/>
                 <a:ea typeface="+mn-ea"/>
               </a:rPr>
-              <a:t>统计参与本门课程同学的家乡所在省市情况</a:t>
+              <a:t> Python</a:t>
+            </a:r>
+            <a:r>
+              <a:rPr lang="zh-CN" altLang="en-US" sz="3200" b="1" dirty="0">
+                <a:solidFill>
+                  <a:srgbClr val="333333"/>
+                </a:solidFill>
+                <a:latin typeface="+mn-ea"/>
+                <a:ea typeface="+mn-ea"/>
+              </a:rPr>
+              <a:t>条件循环程序设计</a:t>
             </a:r>
             <a:endParaRPr lang="en-US" altLang="zh-CN" sz="3200" b="1" dirty="0">
               <a:solidFill>
@@ -17770,7 +14635,7 @@
         <p:spPr>
           <a:xfrm>
             <a:off x="627797" y="1701891"/>
-            <a:ext cx="11143398" cy="4945778"/>
+            <a:ext cx="11143398" cy="3508653"/>
           </a:xfrm>
           <a:prstGeom prst="rect">
             <a:avLst/>
@@ -17811,22 +14676,11 @@
           <a:p>
             <a:pPr algn="just">
               <a:lnSpc>
-                <a:spcPct val="150000"/>
+                <a:spcPct val="100000"/>
               </a:lnSpc>
             </a:pPr>
             <a:r>
-              <a:rPr lang="zh-CN" altLang="en-US" sz="2600" dirty="0">
-                <a:solidFill>
-                  <a:schemeClr val="bg2"/>
-                </a:solidFill>
-                <a:latin typeface="Times New Roman" panose="02020603050405020304" pitchFamily="18" charset="0"/>
-                <a:ea typeface="+mn-ea"/>
-                <a:cs typeface="Times New Roman" panose="02020603050405020304" pitchFamily="18" charset="0"/>
-              </a:rPr>
-              <a:t>掌握</a:t>
-            </a:r>
-            <a:r>
-              <a:rPr lang="en-US" altLang="zh-CN" sz="2600" dirty="0">
+              <a:rPr lang="en-US" sz="2600" dirty="0">
                 <a:solidFill>
                   <a:schemeClr val="bg2"/>
                 </a:solidFill>
@@ -17845,7 +14699,18 @@
                 <a:ea typeface="+mn-ea"/>
                 <a:cs typeface="Times New Roman" panose="02020603050405020304" pitchFamily="18" charset="0"/>
               </a:rPr>
-              <a:t>编程中条件循环语句的使用</a:t>
+              <a:t>条件循环程序设计</a:t>
+            </a:r>
+            <a:r>
+              <a:rPr lang="en-CN" sz="2600" dirty="0">
+                <a:solidFill>
+                  <a:schemeClr val="bg2"/>
+                </a:solidFill>
+                <a:latin typeface="Times New Roman" panose="02020603050405020304" pitchFamily="18" charset="0"/>
+                <a:ea typeface="+mn-ea"/>
+                <a:cs typeface="Times New Roman" panose="02020603050405020304" pitchFamily="18" charset="0"/>
+              </a:rPr>
+              <a:t> </a:t>
             </a:r>
             <a:endParaRPr lang="en-US" altLang="zh-CN" sz="2600" dirty="0">
               <a:solidFill>
@@ -17883,11 +14748,7 @@
             </a:endParaRPr>
           </a:p>
           <a:p>
-            <a:pPr algn="just">
-              <a:lnSpc>
-                <a:spcPct val="150000"/>
-              </a:lnSpc>
-            </a:pPr>
+            <a:pPr algn="l"/>
             <a:r>
               <a:rPr lang="zh-CN" altLang="en-US" sz="2600" dirty="0">
                 <a:solidFill>
@@ -17900,7 +14761,7 @@
               <a:t>（</a:t>
             </a:r>
             <a:r>
-              <a:rPr lang="en-US" altLang="zh-CN" sz="2600" dirty="0">
+              <a:rPr lang="en-US" sz="2600" dirty="0">
                 <a:solidFill>
                   <a:schemeClr val="bg2"/>
                 </a:solidFill>
@@ -17919,10 +14780,10 @@
                 <a:ea typeface="+mn-ea"/>
                 <a:cs typeface="Times New Roman" panose="02020603050405020304" pitchFamily="18" charset="0"/>
               </a:rPr>
-              <a:t>）获取表格中同学家乡信息，并</a:t>
-            </a:r>
-            <a:r>
-              <a:rPr lang="zh-CN" altLang="en-US" sz="2600" u="sng" dirty="0">
+              <a:t>）利用</a:t>
+            </a:r>
+            <a:r>
+              <a:rPr lang="en-US" sz="2600" dirty="0">
                 <a:solidFill>
                   <a:schemeClr val="bg2"/>
                 </a:solidFill>
@@ -17930,7 +14791,7 @@
                 <a:ea typeface="+mn-ea"/>
                 <a:cs typeface="Times New Roman" panose="02020603050405020304" pitchFamily="18" charset="0"/>
               </a:rPr>
-              <a:t>选取合适数据类型</a:t>
+              <a:t>pandas</a:t>
             </a:r>
             <a:r>
               <a:rPr lang="zh-CN" altLang="en-US" sz="2600" dirty="0">
@@ -17941,9 +14802,9 @@
                 <a:ea typeface="+mn-ea"/>
                 <a:cs typeface="Times New Roman" panose="02020603050405020304" pitchFamily="18" charset="0"/>
               </a:rPr>
-              <a:t>存储同学家乡信息。</a:t>
-            </a:r>
-            <a:endParaRPr lang="en-US" altLang="zh-CN" sz="2600" dirty="0">
+              <a:t>库读取学生信息表格。</a:t>
+            </a:r>
+            <a:endParaRPr lang="en-CN" sz="2600" dirty="0">
               <a:solidFill>
                 <a:schemeClr val="bg2"/>
               </a:solidFill>
@@ -17953,11 +14814,7 @@
             </a:endParaRPr>
           </a:p>
           <a:p>
-            <a:pPr algn="just">
-              <a:lnSpc>
-                <a:spcPct val="150000"/>
-              </a:lnSpc>
-            </a:pPr>
+            <a:pPr algn="l"/>
             <a:r>
               <a:rPr lang="zh-CN" altLang="en-US" sz="2600" dirty="0">
                 <a:solidFill>
@@ -17970,7 +14827,7 @@
               <a:t>（</a:t>
             </a:r>
             <a:r>
-              <a:rPr lang="en-US" altLang="zh-CN" sz="2600" dirty="0">
+              <a:rPr lang="en-US" sz="2600" dirty="0">
                 <a:solidFill>
                   <a:schemeClr val="bg2"/>
                 </a:solidFill>
@@ -17989,10 +14846,10 @@
                 <a:ea typeface="+mn-ea"/>
                 <a:cs typeface="Times New Roman" panose="02020603050405020304" pitchFamily="18" charset="0"/>
               </a:rPr>
-              <a:t>）</a:t>
-            </a:r>
-            <a:r>
-              <a:rPr lang="zh-CN" altLang="en-US" sz="2600" u="sng" dirty="0">
+              <a:t>）条件循环</a:t>
+            </a:r>
+            <a:r>
+              <a:rPr lang="en-US" sz="2600" dirty="0">
                 <a:solidFill>
                   <a:schemeClr val="bg2"/>
                 </a:solidFill>
@@ -18000,7 +14857,7 @@
                 <a:ea typeface="+mn-ea"/>
                 <a:cs typeface="Times New Roman" panose="02020603050405020304" pitchFamily="18" charset="0"/>
               </a:rPr>
-              <a:t>编写条件循环语句</a:t>
+              <a:t>python</a:t>
             </a:r>
             <a:r>
               <a:rPr lang="zh-CN" altLang="en-US" sz="2600" dirty="0">
@@ -18011,79 +14868,9 @@
                 <a:ea typeface="+mn-ea"/>
                 <a:cs typeface="Times New Roman" panose="02020603050405020304" pitchFamily="18" charset="0"/>
               </a:rPr>
-              <a:t>，统计与自己家乡同为一个省的同学数量。</a:t>
-            </a:r>
-            <a:endParaRPr lang="en-US" altLang="zh-CN" sz="2600" dirty="0">
-              <a:solidFill>
-                <a:schemeClr val="bg2"/>
-              </a:solidFill>
-              <a:latin typeface="Times New Roman" panose="02020603050405020304" pitchFamily="18" charset="0"/>
-              <a:ea typeface="+mn-ea"/>
-              <a:cs typeface="Times New Roman" panose="02020603050405020304" pitchFamily="18" charset="0"/>
-            </a:endParaRPr>
-          </a:p>
-          <a:p>
-            <a:pPr algn="just">
-              <a:lnSpc>
-                <a:spcPct val="150000"/>
-              </a:lnSpc>
-            </a:pPr>
-            <a:r>
-              <a:rPr lang="zh-CN" altLang="en-US" sz="2600" dirty="0">
-                <a:solidFill>
-                  <a:schemeClr val="bg2"/>
-                </a:solidFill>
-                <a:latin typeface="Times New Roman" panose="02020603050405020304" pitchFamily="18" charset="0"/>
-                <a:ea typeface="+mn-ea"/>
-                <a:cs typeface="Times New Roman" panose="02020603050405020304" pitchFamily="18" charset="0"/>
-              </a:rPr>
-              <a:t>（</a:t>
-            </a:r>
-            <a:r>
-              <a:rPr lang="en-US" altLang="zh-CN" sz="2600" dirty="0">
-                <a:solidFill>
-                  <a:schemeClr val="bg2"/>
-                </a:solidFill>
-                <a:latin typeface="Times New Roman" panose="02020603050405020304" pitchFamily="18" charset="0"/>
-                <a:ea typeface="+mn-ea"/>
-                <a:cs typeface="Times New Roman" panose="02020603050405020304" pitchFamily="18" charset="0"/>
-              </a:rPr>
-              <a:t>3</a:t>
-            </a:r>
-            <a:r>
-              <a:rPr lang="zh-CN" altLang="en-US" sz="2600" dirty="0">
-                <a:solidFill>
-                  <a:schemeClr val="bg2"/>
-                </a:solidFill>
-                <a:latin typeface="Times New Roman" panose="02020603050405020304" pitchFamily="18" charset="0"/>
-                <a:ea typeface="+mn-ea"/>
-                <a:cs typeface="Times New Roman" panose="02020603050405020304" pitchFamily="18" charset="0"/>
-              </a:rPr>
-              <a:t>）</a:t>
-            </a:r>
-            <a:r>
-              <a:rPr lang="zh-CN" altLang="en-US" sz="2600" u="sng" dirty="0">
-                <a:solidFill>
-                  <a:schemeClr val="bg2"/>
-                </a:solidFill>
-                <a:latin typeface="Times New Roman" panose="02020603050405020304" pitchFamily="18" charset="0"/>
-                <a:ea typeface="+mn-ea"/>
-                <a:cs typeface="Times New Roman" panose="02020603050405020304" pitchFamily="18" charset="0"/>
-              </a:rPr>
-              <a:t>主要代码及结果发课程群</a:t>
-            </a:r>
-            <a:r>
-              <a:rPr lang="zh-CN" altLang="en-US" sz="2600" dirty="0">
-                <a:solidFill>
-                  <a:schemeClr val="bg2"/>
-                </a:solidFill>
-                <a:latin typeface="Times New Roman" panose="02020603050405020304" pitchFamily="18" charset="0"/>
-                <a:ea typeface="+mn-ea"/>
-                <a:cs typeface="Times New Roman" panose="02020603050405020304" pitchFamily="18" charset="0"/>
-              </a:rPr>
-              <a:t>。</a:t>
-            </a:r>
-            <a:endParaRPr lang="en-US" altLang="zh-CN" sz="2600" dirty="0">
+              <a:t>编程，统计与自己同省的同学人数。</a:t>
+            </a:r>
+            <a:endParaRPr lang="en-CN" sz="2600" dirty="0">
               <a:solidFill>
                 <a:schemeClr val="bg2"/>
               </a:solidFill>
@@ -19595,10 +16382,92 @@
           </p:style>
         </p:cxnSp>
       </p:grpSp>
+      <p:sp>
+        <p:nvSpPr>
+          <p:cNvPr id="7" name="文本框 34">
+            <a:extLst>
+              <a:ext uri="{FF2B5EF4-FFF2-40B4-BE49-F238E27FC236}">
+                <a16:creationId xmlns:a16="http://schemas.microsoft.com/office/drawing/2014/main" id="{C1152E10-7BE6-9E36-1758-ECF1EF5F7072}"/>
+              </a:ext>
+            </a:extLst>
+          </p:cNvPr>
+          <p:cNvSpPr txBox="1"/>
+          <p:nvPr/>
+        </p:nvSpPr>
+        <p:spPr>
+          <a:xfrm>
+            <a:off x="5383821" y="3566100"/>
+            <a:ext cx="1549049" cy="400110"/>
+          </a:xfrm>
+          <a:prstGeom prst="rect">
+            <a:avLst/>
+          </a:prstGeom>
+          <a:noFill/>
+        </p:spPr>
+        <p:txBody>
+          <a:bodyPr wrap="square" rtlCol="0">
+            <a:spAutoFit/>
+          </a:bodyPr>
+          <a:lstStyle/>
+          <a:p>
+            <a:r>
+              <a:rPr lang="zh-CN" altLang="en-US" sz="2000" b="1" dirty="0">
+                <a:solidFill>
+                  <a:srgbClr val="0000CC"/>
+                </a:solidFill>
+                <a:latin typeface="+mn-ea"/>
+                <a:ea typeface="+mn-ea"/>
+              </a:rPr>
+              <a:t>条件判断</a:t>
+            </a:r>
+          </a:p>
+        </p:txBody>
+      </p:sp>
+      <p:sp>
+        <p:nvSpPr>
+          <p:cNvPr id="9" name="文本框 34">
+            <a:extLst>
+              <a:ext uri="{FF2B5EF4-FFF2-40B4-BE49-F238E27FC236}">
+                <a16:creationId xmlns:a16="http://schemas.microsoft.com/office/drawing/2014/main" id="{BC6758CF-C649-EF86-9994-37CAC0771A16}"/>
+              </a:ext>
+            </a:extLst>
+          </p:cNvPr>
+          <p:cNvSpPr txBox="1"/>
+          <p:nvPr/>
+        </p:nvSpPr>
+        <p:spPr>
+          <a:xfrm>
+            <a:off x="10102730" y="4701021"/>
+            <a:ext cx="1549049" cy="400110"/>
+          </a:xfrm>
+          <a:prstGeom prst="rect">
+            <a:avLst/>
+          </a:prstGeom>
+          <a:noFill/>
+        </p:spPr>
+        <p:txBody>
+          <a:bodyPr wrap="square" rtlCol="0">
+            <a:spAutoFit/>
+          </a:bodyPr>
+          <a:lstStyle/>
+          <a:p>
+            <a:r>
+              <a:rPr lang="zh-CN" altLang="en-US" sz="2000" b="1" dirty="0">
+                <a:solidFill>
+                  <a:srgbClr val="0000CC"/>
+                </a:solidFill>
+                <a:latin typeface="+mn-ea"/>
+                <a:ea typeface="+mn-ea"/>
+              </a:rPr>
+              <a:t>循环执行</a:t>
+            </a:r>
+          </a:p>
+        </p:txBody>
+      </p:sp>
     </p:spTree>
     <p:extLst>
       <p:ext uri="{BB962C8B-B14F-4D97-AF65-F5344CB8AC3E}">
-        <p14:creationId xmlns:p14="http://schemas.microsoft.com/office/powerpoint/2010/main" val="4047407875"/>
+        <p14:creationId xmlns:p14="http://schemas.microsoft.com/office/powerpoint/2010/main" val="2575584961"/>
       </p:ext>
     </p:extLst>
   </p:cSld>

--- a/第3章-条件与循环/第3章-条件与循环.pptx
+++ b/第3章-条件与循环/第3章-条件与循环.pptx
@@ -889,7 +889,7 @@
               </a14:hiddenFill>
             </a:ext>
             <a:ext uri="{FAA26D3D-D897-4be2-8F04-BA451C77F1D7}">
-              <ma14:placeholderFlag xmlns="" xmlns:ma14="http://schemas.microsoft.com/office/mac/drawingml/2011/main" val="1"/>
+              <ma14:placeholderFlag xmlns:ma14="http://schemas.microsoft.com/office/mac/drawingml/2011/main" xmlns="" val="1"/>
             </a:ext>
           </a:extLst>
         </p:spPr>
@@ -1277,7 +1277,7 @@
               </a14:hiddenLine>
             </a:ext>
             <a:ext uri="{FAA26D3D-D897-4be2-8F04-BA451C77F1D7}">
-              <ma14:placeholderFlag xmlns="" xmlns:ma14="http://schemas.microsoft.com/office/mac/drawingml/2011/main" val="1"/>
+              <ma14:placeholderFlag xmlns:ma14="http://schemas.microsoft.com/office/mac/drawingml/2011/main" xmlns="" val="1"/>
             </a:ext>
           </a:extLst>
         </p:spPr>
@@ -1544,7 +1544,22 @@
           <a:bodyPr/>
           <a:lstStyle/>
           <a:p>
-            <a:endParaRPr lang="zh-CN" altLang="en-US" dirty="0"/>
+            <a:r>
+              <a:rPr lang="en-US" altLang="zh-CN" dirty="0"/>
+              <a:t>while</a:t>
+            </a:r>
+            <a:r>
+              <a:rPr lang="zh-CN" altLang="en-US" dirty="0"/>
+              <a:t>和</a:t>
+            </a:r>
+            <a:r>
+              <a:rPr lang="en-US" altLang="zh-CN" dirty="0"/>
+              <a:t>if</a:t>
+            </a:r>
+            <a:r>
+              <a:rPr lang="zh-CN" altLang="en-US" dirty="0"/>
+              <a:t>区别</a:t>
+            </a:r>
           </a:p>
         </p:txBody>
       </p:sp>
@@ -4491,7 +4506,7 @@
               </a14:hiddenLine>
             </a:ext>
             <a:ext uri="{FAA26D3D-D897-4be2-8F04-BA451C77F1D7}">
-              <ma14:placeholderFlag xmlns="" xmlns:ma14="http://schemas.microsoft.com/office/mac/drawingml/2011/main" val="1"/>
+              <ma14:placeholderFlag xmlns:ma14="http://schemas.microsoft.com/office/mac/drawingml/2011/main" xmlns="" val="1"/>
             </a:ext>
           </a:extLst>
         </p:spPr>
@@ -8187,7 +8202,7 @@
               </a14:hiddenLine>
             </a:ext>
             <a:ext uri="{FAA26D3D-D897-4be2-8F04-BA451C77F1D7}">
-              <ma14:placeholderFlag xmlns="" xmlns:ma14="http://schemas.microsoft.com/office/mac/drawingml/2011/main" val="1"/>
+              <ma14:placeholderFlag xmlns:ma14="http://schemas.microsoft.com/office/mac/drawingml/2011/main" xmlns="" val="1"/>
             </a:ext>
           </a:extLst>
         </p:spPr>
@@ -10416,7 +10431,27 @@
                 <a:latin typeface="+mn-ea"/>
                 <a:ea typeface="+mn-ea"/>
               </a:rPr>
-              <a:t>。循环语句一般都与条件控制语句搭配使用，根据判断条件的返回值，决定是否执行循环体。</a:t>
+              <a:t>。循环语句一般都</a:t>
+            </a:r>
+            <a:r>
+              <a:rPr lang="zh-CN" altLang="en-US" sz="3000" b="1" u="sng" dirty="0">
+                <a:solidFill>
+                  <a:srgbClr val="333333"/>
+                </a:solidFill>
+                <a:latin typeface="+mn-ea"/>
+                <a:ea typeface="+mn-ea"/>
+              </a:rPr>
+              <a:t>与条件控制语句搭配</a:t>
+            </a:r>
+            <a:r>
+              <a:rPr lang="zh-CN" altLang="en-US" sz="3000" dirty="0">
+                <a:solidFill>
+                  <a:srgbClr val="333333"/>
+                </a:solidFill>
+                <a:latin typeface="+mn-ea"/>
+                <a:ea typeface="+mn-ea"/>
+              </a:rPr>
+              <a:t>使用，根据判断条件的返回值，决定是否执行循环体。</a:t>
             </a:r>
             <a:endParaRPr lang="en-US" altLang="zh-CN" sz="3000" dirty="0">
               <a:solidFill>
@@ -10724,7 +10759,7 @@
           </p:nvSpPr>
           <p:spPr>
             <a:xfrm>
-              <a:off x="8024327" y="3429000"/>
+              <a:off x="8024327" y="3433943"/>
               <a:ext cx="904928" cy="461665"/>
             </a:xfrm>
             <a:prstGeom prst="rect">
@@ -10772,7 +10807,7 @@
           </p:nvSpPr>
           <p:spPr>
             <a:xfrm>
-              <a:off x="6756212" y="3118365"/>
+              <a:off x="6756212" y="3187568"/>
               <a:ext cx="1041933" cy="461665"/>
             </a:xfrm>
             <a:prstGeom prst="rect">
@@ -11237,7 +11272,7 @@
           </p:nvSpPr>
           <p:spPr>
             <a:xfrm>
-              <a:off x="6403973" y="4575722"/>
+              <a:off x="6403973" y="4575723"/>
               <a:ext cx="1591159" cy="634922"/>
             </a:xfrm>
             <a:prstGeom prst="diamond">
@@ -11258,7 +11293,7 @@
                   <a:latin typeface="微软雅黑" pitchFamily="34" charset="-122"/>
                   <a:ea typeface="微软雅黑" pitchFamily="34" charset="-122"/>
                 </a:rPr>
-                <a:t>For</a:t>
+                <a:t>for</a:t>
               </a:r>
               <a:r>
                 <a:rPr lang="zh-CN" altLang="en-US" sz="1800" b="1" dirty="0">
@@ -11369,8 +11404,8 @@
           </p:nvCxnSpPr>
           <p:spPr bwMode="auto">
             <a:xfrm flipH="1">
-              <a:off x="7199554" y="4213385"/>
-              <a:ext cx="2" cy="362337"/>
+              <a:off x="7199552" y="4213385"/>
+              <a:ext cx="2" cy="362338"/>
             </a:xfrm>
             <a:prstGeom prst="straightConnector1">
               <a:avLst/>
@@ -11419,8 +11454,8 @@
           </p:nvCxnSpPr>
           <p:spPr bwMode="auto">
             <a:xfrm>
-              <a:off x="7199554" y="5210643"/>
-              <a:ext cx="0" cy="279243"/>
+              <a:off x="7199552" y="5210645"/>
+              <a:ext cx="2" cy="279241"/>
             </a:xfrm>
             <a:prstGeom prst="straightConnector1">
               <a:avLst/>
@@ -11469,12 +11504,12 @@
           </p:nvCxnSpPr>
           <p:spPr bwMode="auto">
             <a:xfrm rot="10800000">
-              <a:off x="6403976" y="4893183"/>
-              <a:ext cx="149225" cy="872875"/>
+              <a:off x="6403973" y="4893185"/>
+              <a:ext cx="149227" cy="872874"/>
             </a:xfrm>
             <a:prstGeom prst="bentConnector3">
               <a:avLst>
-                <a:gd name="adj1" fmla="val 227364"/>
+                <a:gd name="adj1" fmla="val 224820"/>
               </a:avLst>
             </a:prstGeom>
             <a:ln w="28575">
@@ -11521,8 +11556,8 @@
           </p:nvCxnSpPr>
           <p:spPr bwMode="auto">
             <a:xfrm>
-              <a:off x="7995134" y="4893183"/>
-              <a:ext cx="261215" cy="1107866"/>
+              <a:off x="7995132" y="4893184"/>
+              <a:ext cx="261216" cy="1107864"/>
             </a:xfrm>
             <a:prstGeom prst="bentConnector2">
               <a:avLst/>
@@ -11567,8 +11602,8 @@
           </p:nvSpPr>
           <p:spPr>
             <a:xfrm>
-              <a:off x="7336023" y="5078882"/>
-              <a:ext cx="622925" cy="333248"/>
+              <a:off x="7296891" y="5078882"/>
+              <a:ext cx="701189" cy="363391"/>
             </a:xfrm>
             <a:prstGeom prst="rect">
               <a:avLst/>
@@ -11582,7 +11617,7 @@
             <a:lstStyle/>
             <a:p>
               <a:r>
-                <a:rPr lang="en-US" altLang="zh-CN" sz="2000" b="1" dirty="0">
+                <a:rPr lang="en-US" altLang="zh-CN" b="1" dirty="0">
                   <a:solidFill>
                     <a:schemeClr val="bg2"/>
                   </a:solidFill>
@@ -11591,7 +11626,7 @@
                 </a:rPr>
                 <a:t>True</a:t>
               </a:r>
-              <a:endParaRPr lang="zh-CN" altLang="en-US" sz="2000" b="1" dirty="0">
+              <a:endParaRPr lang="zh-CN" altLang="en-US" b="1" dirty="0">
                 <a:solidFill>
                   <a:schemeClr val="bg2"/>
                 </a:solidFill>
@@ -11615,8 +11650,8 @@
           </p:nvSpPr>
           <p:spPr>
             <a:xfrm>
-              <a:off x="8256348" y="5030733"/>
-              <a:ext cx="887652" cy="333248"/>
+              <a:off x="8256348" y="5063448"/>
+              <a:ext cx="887652" cy="363391"/>
             </a:xfrm>
             <a:prstGeom prst="rect">
               <a:avLst/>
@@ -11630,7 +11665,7 @@
             <a:lstStyle/>
             <a:p>
               <a:r>
-                <a:rPr lang="en-US" altLang="zh-CN" sz="2000" b="1" dirty="0">
+                <a:rPr lang="en-US" altLang="zh-CN" b="1" dirty="0">
                   <a:solidFill>
                     <a:schemeClr val="bg2"/>
                   </a:solidFill>
@@ -11639,7 +11674,7 @@
                 </a:rPr>
                 <a:t>False</a:t>
               </a:r>
-              <a:endParaRPr lang="zh-CN" altLang="en-US" sz="2000" b="1" dirty="0">
+              <a:endParaRPr lang="zh-CN" altLang="en-US" b="1" dirty="0">
                 <a:solidFill>
                   <a:schemeClr val="bg2"/>
                 </a:solidFill>
@@ -12055,8 +12090,8 @@
           </p:nvSpPr>
           <p:spPr>
             <a:xfrm>
-              <a:off x="7274492" y="2318173"/>
-              <a:ext cx="622616" cy="341635"/>
+              <a:off x="7235397" y="2318173"/>
+              <a:ext cx="700807" cy="363206"/>
             </a:xfrm>
             <a:prstGeom prst="rect">
               <a:avLst/>
@@ -12070,7 +12105,7 @@
             <a:lstStyle/>
             <a:p>
               <a:r>
-                <a:rPr lang="en-US" altLang="zh-CN" sz="2000" b="1" dirty="0">
+                <a:rPr lang="en-US" altLang="zh-CN" b="1" dirty="0">
                   <a:solidFill>
                     <a:schemeClr val="bg2"/>
                   </a:solidFill>
@@ -12079,7 +12114,7 @@
                 </a:rPr>
                 <a:t>True</a:t>
               </a:r>
-              <a:endParaRPr lang="zh-CN" altLang="en-US" sz="2000" b="1" dirty="0">
+              <a:endParaRPr lang="zh-CN" altLang="en-US" b="1" dirty="0">
                 <a:solidFill>
                   <a:schemeClr val="bg2"/>
                 </a:solidFill>
@@ -12104,7 +12139,7 @@
           <p:spPr>
             <a:xfrm>
               <a:off x="8248294" y="2312540"/>
-              <a:ext cx="887653" cy="341635"/>
+              <a:ext cx="887653" cy="363206"/>
             </a:xfrm>
             <a:prstGeom prst="rect">
               <a:avLst/>
@@ -12118,7 +12153,7 @@
             <a:lstStyle/>
             <a:p>
               <a:r>
-                <a:rPr lang="en-US" altLang="zh-CN" sz="2000" b="1" dirty="0">
+                <a:rPr lang="en-US" altLang="zh-CN" b="1" dirty="0">
                   <a:solidFill>
                     <a:schemeClr val="bg2"/>
                   </a:solidFill>
@@ -12127,7 +12162,7 @@
                 </a:rPr>
                 <a:t>False</a:t>
               </a:r>
-              <a:endParaRPr lang="zh-CN" altLang="en-US" sz="2000" b="1" dirty="0">
+              <a:endParaRPr lang="zh-CN" altLang="en-US" b="1" dirty="0">
                 <a:solidFill>
                   <a:schemeClr val="bg2"/>
                 </a:solidFill>
@@ -12228,9 +12263,9 @@
         <p:grpSpPr>
           <a:xfrm>
             <a:off x="6349550" y="858892"/>
-            <a:ext cx="5627288" cy="3728753"/>
+            <a:ext cx="5276391" cy="3728753"/>
             <a:chOff x="221470" y="788693"/>
-            <a:chExt cx="5627288" cy="3728753"/>
+            <a:chExt cx="5276391" cy="3728753"/>
           </a:xfrm>
         </p:grpSpPr>
         <p:sp>
@@ -12318,7 +12353,7 @@
           </p:blipFill>
           <p:spPr>
             <a:xfrm>
-              <a:off x="1194307" y="1706009"/>
+              <a:off x="843410" y="1694483"/>
               <a:ext cx="4654451" cy="1762531"/>
             </a:xfrm>
             <a:prstGeom prst="rect">
@@ -12748,10 +12783,10 @@
       </p:grpSp>
       <p:pic>
         <p:nvPicPr>
-          <p:cNvPr id="22" name="图片 21">
+          <p:cNvPr id="8" name="图片 7">
             <a:extLst>
               <a:ext uri="{FF2B5EF4-FFF2-40B4-BE49-F238E27FC236}">
-                <a16:creationId xmlns:a16="http://schemas.microsoft.com/office/drawing/2014/main" id="{87494305-8A16-935B-8592-01D18BAF083D}"/>
+                <a16:creationId xmlns:a16="http://schemas.microsoft.com/office/drawing/2014/main" id="{E979ECE1-F4D0-540B-CD66-C217F2DB8B61}"/>
               </a:ext>
             </a:extLst>
           </p:cNvPr>
@@ -12768,8 +12803,8 @@
         </p:blipFill>
         <p:spPr>
           <a:xfrm>
-            <a:off x="6269721" y="4774981"/>
-            <a:ext cx="5701938" cy="1732606"/>
+            <a:off x="6156748" y="4725063"/>
+            <a:ext cx="5876672" cy="1629077"/>
           </a:xfrm>
           <a:prstGeom prst="rect">
             <a:avLst/>
@@ -12870,8 +12905,8 @@
         </p:nvSpPr>
         <p:spPr>
           <a:xfrm>
-            <a:off x="674914" y="846748"/>
-            <a:ext cx="7908913" cy="743986"/>
+            <a:off x="605641" y="921876"/>
+            <a:ext cx="7908913" cy="825419"/>
           </a:xfrm>
           <a:prstGeom prst="rect">
             <a:avLst/>
@@ -12890,7 +12925,7 @@
               </a:lnSpc>
             </a:pPr>
             <a:r>
-              <a:rPr lang="zh-CN" altLang="en-US" sz="3200" b="1" dirty="0">
+              <a:rPr lang="zh-CN" altLang="en-US" sz="3600" b="1" dirty="0">
                 <a:solidFill>
                   <a:srgbClr val="333333"/>
                 </a:solidFill>
@@ -12899,7 +12934,7 @@
               </a:rPr>
               <a:t>循环控制：</a:t>
             </a:r>
-            <a:endParaRPr lang="en-US" altLang="zh-CN" sz="3200" b="1" dirty="0">
+            <a:endParaRPr lang="en-US" altLang="zh-CN" sz="3600" b="1" dirty="0">
               <a:solidFill>
                 <a:srgbClr val="333333"/>
               </a:solidFill>
@@ -12923,7 +12958,7 @@
         </p:nvSpPr>
         <p:spPr>
           <a:xfrm>
-            <a:off x="551543" y="1745040"/>
+            <a:off x="605641" y="1868483"/>
             <a:ext cx="5783943" cy="4191084"/>
           </a:xfrm>
           <a:prstGeom prst="rect">
@@ -13059,24 +13094,30 @@
             </a:extLst>
           </p:cNvPr>
           <p:cNvPicPr>
-            <a:picLocks noChangeAspect="1"/>
+            <a:picLocks/>
           </p:cNvPicPr>
           <p:nvPr/>
         </p:nvPicPr>
         <p:blipFill>
           <a:blip r:embed="rId3"/>
+          <a:srcRect l="2530" r="3770"/>
           <a:stretch>
             <a:fillRect/>
           </a:stretch>
         </p:blipFill>
         <p:spPr>
           <a:xfrm>
-            <a:off x="6316011" y="2296202"/>
-            <a:ext cx="5818292" cy="2863626"/>
+            <a:off x="6463145" y="2296202"/>
+            <a:ext cx="5451764" cy="2863626"/>
           </a:xfrm>
           <a:prstGeom prst="rect">
             <a:avLst/>
           </a:prstGeom>
+          <a:ln>
+            <a:solidFill>
+              <a:schemeClr val="bg2"/>
+            </a:solidFill>
+          </a:ln>
         </p:spPr>
       </p:pic>
     </p:spTree>
@@ -16521,7 +16562,7 @@
               <a:rPr lang="zh-CN" altLang="en-US" sz="4000" dirty="0">
                 <a:latin typeface="+mn-ea"/>
               </a:rPr>
-              <a:t>二、条件语句</a:t>
+              <a:t>一、条件语句</a:t>
             </a:r>
             <a:endParaRPr lang="zh-CN" altLang="en-US" sz="4000" dirty="0"/>
           </a:p>
@@ -16541,8 +16582,8 @@
         </p:nvSpPr>
         <p:spPr>
           <a:xfrm>
-            <a:off x="260350" y="846749"/>
-            <a:ext cx="7981783" cy="5550687"/>
+            <a:off x="260350" y="895239"/>
+            <a:ext cx="8145314" cy="5550687"/>
           </a:xfrm>
           <a:prstGeom prst="rect">
             <a:avLst/>
@@ -17464,7 +17505,7 @@
               <a:rPr lang="zh-CN" altLang="en-US" sz="4000" dirty="0">
                 <a:latin typeface="+mn-ea"/>
               </a:rPr>
-              <a:t>二、条件语句</a:t>
+              <a:t>一、条件语句</a:t>
             </a:r>
             <a:endParaRPr lang="zh-CN" altLang="en-US" sz="4000" dirty="0"/>
           </a:p>
@@ -17485,7 +17526,7 @@
         <p:spPr>
           <a:xfrm>
             <a:off x="392792" y="800688"/>
-            <a:ext cx="6203951" cy="4216539"/>
+            <a:ext cx="5896295" cy="4216539"/>
           </a:xfrm>
           <a:prstGeom prst="rect">
             <a:avLst/>
@@ -17717,7 +17758,7 @@
               <a:rPr lang="zh-CN" altLang="en-US" sz="4000" dirty="0">
                 <a:latin typeface="+mn-ea"/>
               </a:rPr>
-              <a:t>二、条件语句</a:t>
+              <a:t>一、条件语句</a:t>
             </a:r>
             <a:endParaRPr lang="zh-CN" altLang="en-US" sz="4000" dirty="0"/>
           </a:p>
@@ -17791,9 +17832,9 @@
         <p:grpSpPr>
           <a:xfrm>
             <a:off x="1088891" y="3429000"/>
-            <a:ext cx="9120340" cy="3348452"/>
+            <a:ext cx="4669016" cy="3348452"/>
             <a:chOff x="1364662" y="3429000"/>
-            <a:chExt cx="9120340" cy="3348452"/>
+            <a:chExt cx="4669016" cy="3348452"/>
           </a:xfrm>
         </p:grpSpPr>
         <p:pic>
@@ -17820,36 +17861,6 @@
             <a:xfrm>
               <a:off x="1364663" y="4052788"/>
               <a:ext cx="3145250" cy="2724664"/>
-            </a:xfrm>
-            <a:prstGeom prst="rect">
-              <a:avLst/>
-            </a:prstGeom>
-          </p:spPr>
-        </p:pic>
-        <p:pic>
-          <p:nvPicPr>
-            <p:cNvPr id="7" name="Picture 6" descr="A screen shot of a computer code&#10;&#10;AI-generated content may be incorrect.">
-              <a:extLst>
-                <a:ext uri="{FF2B5EF4-FFF2-40B4-BE49-F238E27FC236}">
-                  <a16:creationId xmlns:a16="http://schemas.microsoft.com/office/drawing/2014/main" id="{607894F7-E1BB-7627-C4FB-1F4608512224}"/>
-                </a:ext>
-              </a:extLst>
-            </p:cNvPr>
-            <p:cNvPicPr>
-              <a:picLocks noChangeAspect="1"/>
-            </p:cNvPicPr>
-            <p:nvPr/>
-          </p:nvPicPr>
-          <p:blipFill>
-            <a:blip r:embed="rId4"/>
-            <a:stretch>
-              <a:fillRect/>
-            </a:stretch>
-          </p:blipFill>
-          <p:spPr>
-            <a:xfrm>
-              <a:off x="6095999" y="4059004"/>
-              <a:ext cx="4389003" cy="2718448"/>
             </a:xfrm>
             <a:prstGeom prst="rect">
               <a:avLst/>
@@ -18062,7 +18073,7 @@
             <p:nvPr/>
           </p:nvPicPr>
           <p:blipFill>
-            <a:blip r:embed="rId5"/>
+            <a:blip r:embed="rId4"/>
             <a:stretch>
               <a:fillRect/>
             </a:stretch>
@@ -18205,7 +18216,7 @@
             <p:nvPr/>
           </p:nvPicPr>
           <p:blipFill>
-            <a:blip r:embed="rId6"/>
+            <a:blip r:embed="rId5"/>
             <a:stretch>
               <a:fillRect/>
             </a:stretch>
@@ -18318,6 +18329,41 @@
           </a:p>
         </p:txBody>
       </p:sp>
+      <p:pic>
+        <p:nvPicPr>
+          <p:cNvPr id="16" name="图片 15">
+            <a:extLst>
+              <a:ext uri="{FF2B5EF4-FFF2-40B4-BE49-F238E27FC236}">
+                <a16:creationId xmlns:a16="http://schemas.microsoft.com/office/drawing/2014/main" id="{E36928E7-4999-D730-F261-1F1533543E5F}"/>
+              </a:ext>
+            </a:extLst>
+          </p:cNvPr>
+          <p:cNvPicPr>
+            <a:picLocks noChangeAspect="1"/>
+          </p:cNvPicPr>
+          <p:nvPr/>
+        </p:nvPicPr>
+        <p:blipFill>
+          <a:blip r:embed="rId6"/>
+          <a:stretch>
+            <a:fillRect/>
+          </a:stretch>
+        </p:blipFill>
+        <p:spPr>
+          <a:xfrm>
+            <a:off x="6255656" y="4052788"/>
+            <a:ext cx="2807840" cy="2683800"/>
+          </a:xfrm>
+          <a:prstGeom prst="rect">
+            <a:avLst/>
+          </a:prstGeom>
+          <a:ln>
+            <a:solidFill>
+              <a:schemeClr val="bg2"/>
+            </a:solidFill>
+          </a:ln>
+        </p:spPr>
+      </p:pic>
     </p:spTree>
     <p:extLst>
       <p:ext uri="{BB962C8B-B14F-4D97-AF65-F5344CB8AC3E}">
@@ -18387,7 +18433,7 @@
               <a:rPr lang="zh-CN" altLang="en-US" sz="4000" dirty="0">
                 <a:latin typeface="+mn-ea"/>
               </a:rPr>
-              <a:t>二、条件语句</a:t>
+              <a:t>一、条件语句</a:t>
             </a:r>
             <a:endParaRPr lang="zh-CN" altLang="en-US" sz="4000" dirty="0"/>
           </a:p>
@@ -18569,7 +18615,7 @@
         </p:blipFill>
         <p:spPr>
           <a:xfrm>
-            <a:off x="6096000" y="1207329"/>
+            <a:off x="5957523" y="1199821"/>
             <a:ext cx="5807211" cy="4182182"/>
           </a:xfrm>
           <a:prstGeom prst="rect">
@@ -18654,7 +18700,7 @@
                 <a:latin typeface="+mn-ea"/>
                 <a:ea typeface="+mn-ea"/>
               </a:rPr>
-              <a:t>简化写法</a:t>
+              <a:t>语句简化写法</a:t>
             </a:r>
             <a:endParaRPr lang="en-US" altLang="zh-CN" sz="3000" dirty="0">
               <a:solidFill>
